--- a/ETF_effects_The_role_of_primary_versus_secondary_market_activities/etf_effects_presentation.pptx
+++ b/ETF_effects_The_role_of_primary_versus_secondary_market_activities/etf_effects_presentation.pptx
@@ -126,7 +126,7 @@
   <p:extLst>
     <p:ext uri="{521415D9-36F7-43E2-AB2F-B90AF26B5E84}">
       <p14:sectionLst xmlns:p14="http://schemas.microsoft.com/office/powerpoint/2010/main">
-        <p14:section name="Introduction" id="{6a92a72b-61a9-2074-d1e7-c075134229a2}">
+        <p14:section name="Introduction" id="{75d498f1-6a0b-05eb-6583-9275ff02a1df}">
           <p14:sldIdLst>
             <p14:sldId id="256"/>
             <p14:sldId id="257"/>
@@ -134,7 +134,7 @@
             <p14:sldId id="259"/>
           </p14:sldIdLst>
         </p14:section>
-        <p14:section name="The paper" id="{a1c31d9b-931d-93a9-a21e-8404023c3f29}">
+        <p14:section name="The paper" id="{72e2697b-9348-8a9b-e314-b5e9c058a9eb}">
           <p14:sldIdLst>
             <p14:sldId id="260"/>
             <p14:sldId id="261"/>
@@ -147,14 +147,14 @@
             <p14:sldId id="268"/>
           </p14:sldIdLst>
         </p14:section>
-        <p14:section name="Our replication" id="{e986c59c-f3f2-981a-178e-ff54af37cc38}">
+        <p14:section name="Our replication" id="{934c74a4-990e-ffcb-ac3f-d4f0e060ea06}">
           <p14:sldIdLst>
             <p14:sldId id="269"/>
             <p14:sldId id="270"/>
             <p14:sldId id="271"/>
           </p14:sldIdLst>
         </p14:section>
-        <p14:section name="Discussion" id="{85ae81ce-07e0-33ff-179e-a5ac6101a0e2}">
+        <p14:section name="Discussion" id="{497f311c-a605-d1a6-fa74-42443933a885}">
           <p14:sldIdLst>
             <p14:sldId id="272"/>
             <p14:sldId id="273"/>
@@ -8596,7 +8596,7 @@
                   <a:schemeClr val="tx1"/>
                 </a:solidFill>
               </a:rPr>
-              <a:t>real-data modules for Colab (a dose–response test across BoJ regimes, with a 2021–24 placebo, and a tick-size-controlled trend) ready to run on BoJ statistics and Yahoo Finance data.</a:t>
+              <a:t>real-data modules (a dose–response test across BoJ regimes, with a 2021–24 placebo, and a tick-size-controlled trend) ready to run on BoJ statistics and Yahoo Finance data.</a:t>
             </a:r>
             <a:endParaRPr lang="en-US" sz="1500" dirty="0"/>
           </a:p>

--- a/ETF_effects_The_role_of_primary_versus_secondary_market_activities/etf_effects_presentation.pptx
+++ b/ETF_effects_The_role_of_primary_versus_secondary_market_activities/etf_effects_presentation.pptx
@@ -25,9 +25,11 @@
     <p:sldId id="273" r:id="rId19"/>
     <p:sldId id="274" r:id="rId20"/>
     <p:sldId id="275" r:id="rId21"/>
+    <p:sldId id="276" r:id="rId22"/>
+    <p:sldId id="277" r:id="rId23"/>
   </p:sldIdLst>
   <p:notesMasterIdLst>
-    <p:notesMasterId r:id="rId22"/>
+    <p:notesMasterId r:id="rId24"/>
   </p:notesMasterIdLst>
   <p:sldSz cx="12192000" cy="6858000"/>
   <p:notesSz cx="6858000" cy="12192000"/>
@@ -126,7 +128,7 @@
   <p:extLst>
     <p:ext uri="{521415D9-36F7-43E2-AB2F-B90AF26B5E84}">
       <p14:sectionLst xmlns:p14="http://schemas.microsoft.com/office/powerpoint/2010/main">
-        <p14:section name="Introduction" id="{75d498f1-6a0b-05eb-6583-9275ff02a1df}">
+        <p14:section name="Introduction" id="{4e396a60-cfef-ba94-fce7-444151440ca1}">
           <p14:sldIdLst>
             <p14:sldId id="256"/>
             <p14:sldId id="257"/>
@@ -134,7 +136,7 @@
             <p14:sldId id="259"/>
           </p14:sldIdLst>
         </p14:section>
-        <p14:section name="The paper" id="{72e2697b-9348-8a9b-e314-b5e9c058a9eb}">
+        <p14:section name="The paper" id="{673060c9-96bf-6230-d0c2-d6a059d634ea}">
           <p14:sldIdLst>
             <p14:sldId id="260"/>
             <p14:sldId id="261"/>
@@ -147,19 +149,21 @@
             <p14:sldId id="268"/>
           </p14:sldIdLst>
         </p14:section>
-        <p14:section name="Our replication" id="{934c74a4-990e-ffcb-ac3f-d4f0e060ea06}">
+        <p14:section name="Our replication" id="{f67928c2-f33e-ff8d-6456-514fefdfc3ba}">
           <p14:sldIdLst>
             <p14:sldId id="269"/>
             <p14:sldId id="270"/>
             <p14:sldId id="271"/>
+            <p14:sldId id="272"/>
+            <p14:sldId id="273"/>
           </p14:sldIdLst>
         </p14:section>
-        <p14:section name="Discussion" id="{497f311c-a605-d1a6-fa74-42443933a885}">
+        <p14:section name="Discussion" id="{ea1f4cd8-1f38-1fa6-c8ef-4ae871596f29}">
           <p14:sldIdLst>
-            <p14:sldId id="272"/>
-            <p14:sldId id="273"/>
             <p14:sldId id="274"/>
             <p14:sldId id="275"/>
+            <p14:sldId id="276"/>
+            <p14:sldId id="277"/>
           </p14:sldIdLst>
         </p14:section>
       </p14:sectionLst>
@@ -724,6 +728,368 @@
 </c:chartSpace>
 </file>
 
+<file path=ppt/charts/chart3.xml><?xml version="1.0" encoding="utf-8"?>
+<c:chartSpace xmlns:c="http://schemas.openxmlformats.org/drawingml/2006/chart" xmlns:a="http://schemas.openxmlformats.org/drawingml/2006/main" xmlns:r="http://schemas.openxmlformats.org/officeDocument/2006/relationships">
+  <c:date1904 val="0"/>
+  <c:roundedCorners val="1"/>
+  <c:chart>
+    <c:title>
+      <c:tx>
+        <c:rich>
+          <a:bodyPr/>
+          <a:lstStyle/>
+          <a:p>
+            <a:pPr>
+              <a:defRPr sz="1400" b="0" i="0" u="none" strike="noStrike">
+                <a:solidFill>
+                  <a:srgbClr val="374151"/>
+                </a:solidFill>
+                <a:latin typeface="+mn-lt"/>
+              </a:defRPr>
+            </a:pPr>
+            <a:r>
+              <a:rPr sz="1400" b="0" i="0" u="none" strike="noStrike">
+                <a:solidFill>
+                  <a:srgbClr val="374151"/>
+                </a:solidFill>
+                <a:latin typeface="+mn-lt"/>
+              </a:rPr>
+              <a:t>Mean monthly EDGE spread, Jan 2021 – Oct 2026 (bps)</a:t>
+            </a:r>
+          </a:p>
+        </c:rich>
+      </c:tx>
+      <c:layout/>
+      <c:overlay val="0"/>
+    </c:title>
+    <c:autoTitleDeleted val="0"/>
+    <c:plotArea>
+      <c:layout/>
+      <c:barChart>
+        <c:barDir val="col"/>
+        <c:grouping val="clustered"/>
+        <c:varyColors val="0"/>
+        <c:ser>
+          <c:idx val="0"/>
+          <c:order val="0"/>
+          <c:tx>
+            <c:strRef>
+              <c:f>Sheet1!$B$1</c:f>
+              <c:strCache>
+                <c:ptCount val="1"/>
+                <c:pt idx="0">
+                  <c:v>ETF</c:v>
+                </c:pt>
+              </c:strCache>
+            </c:strRef>
+          </c:tx>
+          <c:spPr>
+            <a:solidFill>
+              <a:srgbClr val="2A78D6"/>
+            </a:solidFill>
+            <a:effectLst/>
+          </c:spPr>
+          <c:invertIfNegative val="0"/>
+          <c:dLbls>
+            <c:numFmt formatCode="0.0" sourceLinked="0"/>
+            <c:txPr>
+              <a:bodyPr/>
+              <a:lstStyle/>
+              <a:p>
+                <a:pPr>
+                  <a:defRPr b="0" i="0" strike="noStrike" sz="1300" u="none">
+                    <a:solidFill>
+                      <a:srgbClr val="1B1F2A"/>
+                    </a:solidFill>
+                    <a:latin typeface="+mn-lt"/>
+                  </a:defRPr>
+                </a:pPr>
+              </a:p>
+            </c:txPr>
+            <c:showLegendKey val="0"/>
+            <c:showVal val="1"/>
+            <c:showCatName val="0"/>
+            <c:showSerName val="0"/>
+            <c:showPercent val="0"/>
+            <c:showBubbleSize val="0"/>
+            <c:showLeaderLines val="0"/>
+          </c:dLbls>
+          <c:cat>
+            <c:multiLvlStrRef>
+              <c:f>Sheet1!$A$2:$A$3</c:f>
+              <c:multiLvlStrCache>
+                <c:ptCount val="2"/>
+                <c:lvl>
+                  <c:pt idx="0">
+                    <c:v>SPY</c:v>
+                  </c:pt>
+                  <c:pt idx="1">
+                    <c:v>Nikkei 225 ETF (1321.T)</c:v>
+                  </c:pt>
+                </c:lvl>
+              </c:multiLvlStrCache>
+            </c:multiLvlStrRef>
+          </c:cat>
+          <c:val>
+            <c:numRef>
+              <c:f>Sheet1!$B$2:$B$3</c:f>
+              <c:numCache>
+                <c:formatCode>General</c:formatCode>
+                <c:ptCount val="2"/>
+                <c:pt idx="0">
+                  <c:v>32.8</c:v>
+                </c:pt>
+                <c:pt idx="1">
+                  <c:v>42.6</c:v>
+                </c:pt>
+              </c:numCache>
+            </c:numRef>
+          </c:val>
+        </c:ser>
+        <c:ser>
+          <c:idx val="1"/>
+          <c:order val="1"/>
+          <c:tx>
+            <c:strRef>
+              <c:f>Sheet1!$C$1</c:f>
+              <c:strCache>
+                <c:ptCount val="1"/>
+                <c:pt idx="0">
+                  <c:v>Top-10 basket</c:v>
+                </c:pt>
+              </c:strCache>
+            </c:strRef>
+          </c:tx>
+          <c:spPr>
+            <a:solidFill>
+              <a:srgbClr val="EB6834"/>
+            </a:solidFill>
+            <a:effectLst/>
+          </c:spPr>
+          <c:invertIfNegative val="0"/>
+          <c:dLbls>
+            <c:numFmt formatCode="0.0" sourceLinked="0"/>
+            <c:txPr>
+              <a:bodyPr/>
+              <a:lstStyle/>
+              <a:p>
+                <a:pPr>
+                  <a:defRPr b="0" i="0" strike="noStrike" sz="1300" u="none">
+                    <a:solidFill>
+                      <a:srgbClr val="1B1F2A"/>
+                    </a:solidFill>
+                    <a:latin typeface="+mn-lt"/>
+                  </a:defRPr>
+                </a:pPr>
+              </a:p>
+            </c:txPr>
+            <c:showLegendKey val="0"/>
+            <c:showVal val="1"/>
+            <c:showCatName val="0"/>
+            <c:showSerName val="0"/>
+            <c:showPercent val="0"/>
+            <c:showBubbleSize val="0"/>
+            <c:showLeaderLines val="0"/>
+          </c:dLbls>
+          <c:cat>
+            <c:multiLvlStrRef>
+              <c:f>Sheet1!$A$2:$A$3</c:f>
+              <c:multiLvlStrCache>
+                <c:ptCount val="2"/>
+                <c:lvl>
+                  <c:pt idx="0">
+                    <c:v>SPY</c:v>
+                  </c:pt>
+                  <c:pt idx="1">
+                    <c:v>Nikkei 225 ETF (1321.T)</c:v>
+                  </c:pt>
+                </c:lvl>
+              </c:multiLvlStrCache>
+            </c:multiLvlStrRef>
+          </c:cat>
+          <c:val>
+            <c:numRef>
+              <c:f>Sheet1!$C$2:$C$3</c:f>
+              <c:numCache>
+                <c:formatCode>General</c:formatCode>
+                <c:ptCount val="2"/>
+                <c:pt idx="0">
+                  <c:v>71.4</c:v>
+                </c:pt>
+                <c:pt idx="1">
+                  <c:v>84.3</c:v>
+                </c:pt>
+              </c:numCache>
+            </c:numRef>
+          </c:val>
+        </c:ser>
+        <c:dLbls>
+          <c:numFmt formatCode="0.0" sourceLinked="0"/>
+          <c:txPr>
+            <a:bodyPr/>
+            <a:lstStyle/>
+            <a:p>
+              <a:pPr>
+                <a:defRPr b="0" i="0" strike="noStrike" sz="1300" u="none">
+                  <a:solidFill>
+                    <a:srgbClr val="1B1F2A"/>
+                  </a:solidFill>
+                  <a:latin typeface="+mn-lt"/>
+                </a:defRPr>
+              </a:pPr>
+            </a:p>
+          </c:txPr>
+          <c:showLegendKey val="0"/>
+          <c:showVal val="1"/>
+          <c:showCatName val="0"/>
+          <c:showSerName val="0"/>
+          <c:showPercent val="0"/>
+          <c:showBubbleSize val="0"/>
+          <c:showLeaderLines val="0"/>
+        </c:dLbls>
+        <c:gapWidth val="60"/>
+        <c:overlap val="0"/>
+        <c:axId val="2094734554"/>
+        <c:axId val="2094734552"/>
+        <c:axId val="2094734556"/>
+      </c:barChart>
+      <c:catAx>
+        <c:axId val="2094734554"/>
+        <c:scaling>
+          <c:orientation val="minMax"/>
+        </c:scaling>
+        <c:delete val="0"/>
+        <c:axPos val="b"/>
+        <c:numFmt formatCode="General" sourceLinked="1"/>
+        <c:majorTickMark val="out"/>
+        <c:minorTickMark val="none"/>
+        <c:tickLblPos val="low"/>
+        <c:spPr>
+          <a:ln w="12700" cap="flat">
+            <a:solidFill>
+              <a:srgbClr val="888888"/>
+            </a:solidFill>
+            <a:prstDash val="solid"/>
+            <a:round/>
+          </a:ln>
+        </c:spPr>
+        <c:txPr>
+          <a:bodyPr/>
+          <a:lstStyle/>
+          <a:p>
+            <a:pPr>
+              <a:defRPr sz="1300" b="0" i="0" u="none" strike="noStrike">
+                <a:solidFill>
+                  <a:srgbClr val="4B5563"/>
+                </a:solidFill>
+                <a:latin typeface="+mn-lt"/>
+              </a:defRPr>
+            </a:pPr>
+            <a:endParaRPr lang="en-US"/>
+          </a:p>
+        </c:txPr>
+        <c:crossAx val="2094734552"/>
+        <c:crosses val="autoZero"/>
+        <c:auto val="1"/>
+        <c:lblAlgn val="ctr"/>
+        <c:noMultiLvlLbl val="1"/>
+      </c:catAx>
+      <c:valAx>
+        <c:axId val="2094734552"/>
+        <c:scaling>
+          <c:orientation val="minMax"/>
+          <c:max val="100"/>
+          <c:min val="0"/>
+        </c:scaling>
+        <c:delete val="0"/>
+        <c:axPos val="l"/>
+        <c:majorGridlines>
+          <c:spPr>
+            <a:ln w="9525" cap="flat">
+              <a:solidFill>
+                <a:srgbClr val="E5E7EB"/>
+              </a:solidFill>
+              <a:prstDash val="solid"/>
+              <a:round/>
+            </a:ln>
+          </c:spPr>
+        </c:majorGridlines>
+        <c:numFmt formatCode="0" sourceLinked="0"/>
+        <c:majorTickMark val="out"/>
+        <c:minorTickMark val="none"/>
+        <c:tickLblPos val="nextTo"/>
+        <c:spPr>
+          <a:ln w="12700" cap="flat">
+            <a:solidFill>
+              <a:srgbClr val="888888"/>
+            </a:solidFill>
+            <a:prstDash val="solid"/>
+            <a:round/>
+          </a:ln>
+        </c:spPr>
+        <c:txPr>
+          <a:bodyPr/>
+          <a:lstStyle/>
+          <a:p>
+            <a:pPr>
+              <a:defRPr sz="1100" b="0" i="0" u="none" strike="noStrike">
+                <a:solidFill>
+                  <a:srgbClr val="6B7280"/>
+                </a:solidFill>
+                <a:latin typeface="+mn-lt"/>
+              </a:defRPr>
+            </a:pPr>
+            <a:endParaRPr lang="en-US"/>
+          </a:p>
+        </c:txPr>
+        <c:crossAx val="2094734554"/>
+        <c:crosses val="autoZero"/>
+        <c:crossBetween val="between"/>
+      </c:valAx>
+      <c:spPr>
+        <a:noFill/>
+        <a:ln>
+          <a:noFill/>
+        </a:ln>
+        <a:effectLst/>
+      </c:spPr>
+    </c:plotArea>
+    <c:legend>
+      <c:legendPos val="b"/>
+      <c:overlay val="0"/>
+      <c:txPr>
+        <a:bodyPr/>
+        <a:lstStyle/>
+        <a:p>
+          <a:pPr>
+            <a:defRPr sz="1200">
+              <a:solidFill>
+                <a:srgbClr val="374151"/>
+              </a:solidFill>
+              <a:latin typeface="+mn-lt"/>
+              <a:cs typeface="+mn-lt"/>
+            </a:defRPr>
+          </a:pPr>
+          <a:endParaRPr lang="en-US"/>
+        </a:p>
+      </c:txPr>
+    </c:legend>
+    <c:plotVisOnly val="1"/>
+    <c:dispBlanksAs val="span"/>
+  </c:chart>
+  <c:spPr>
+    <a:noFill/>
+    <a:ln>
+      <a:noFill/>
+    </a:ln>
+    <a:effectLst/>
+  </c:spPr>
+  <c:externalData r:id="rId1">
+    <c:autoUpdate val="0"/>
+  </c:externalData>
+</c:chartSpace>
+</file>
+
 <file path=ppt/notesMasters/notesMaster1.xml><?xml version="1.0" encoding="utf-8"?>
 <p:notesMaster xmlns:a="http://schemas.openxmlformats.org/drawingml/2006/main" xmlns:r="http://schemas.openxmlformats.org/officeDocument/2006/relationships" xmlns:p="http://schemas.openxmlformats.org/presentationml/2006/main">
   <p:cSld>
@@ -1823,7 +2189,7 @@
           <a:p>
             <a:r>
               <a:rPr lang="en-US" dirty="0"/>
-              <a:t>Six concerns. First, the French evidence is one year and, for stocks, one ETF. Second, both activity measures are proxies. Third, the Japanese shock only covers creations, so the redemption and fire-sale case remains open. Fourth, BoJ days are selected and the doses are extreme. Fifth, the long-run argument is a trend regression confounded by the 2014–2015 tick-size reform. Sixth, some reported magnitudes are hard to reconcile and should be clarified.</a:t>
+              <a:t>We ran the paper's Japanese design on real data: Bank of Japan purchase records, Nikkei 225 constituents and factors, and daily Yahoo Finance prices for 469 stocks. The size of the shock matches the paper, but none of the outcomes reacts on purchase days, and the placebo comparison is flat. The only significant slope, on Amihud illiquidity, is equally strong when the BoJ bought no Nikkei ETFs, so it reflects which stocks are heavily weighted, not the purchases. The paper uses five-minute data; daily proxies are much noisier, and our index membership and factors are today's, so this is a failure to replicate with open data rather than a refutation.</a:t>
             </a:r>
             <a:endParaRPr lang="en-US" dirty="0"/>
           </a:p>
@@ -1911,7 +2277,7 @@
           <a:p>
             <a:r>
               <a:rPr lang="en-US" dirty="0"/>
-              <a:t>Since the paper was written, the BoJ stopped buying ETFs in March 2024, decided in September 2025 to sell about 330 billion yen a year, and started selling in January 2026. That is the redemption experiment the paper lacked, though the pace is tiny. Our notebook includes real-data modules that extend the BoJ test across policy regimes and re-run the trend analysis with tick-size controls.</a:t>
+              <a:t>Two more checks on open data. First, both SPY and the Nomura Nikkei 225 ETF are much more liquid than their largest holdings, and basket spreads move one-for-one with the ETF's spread, which supports the paper's information-linkage channel. Second, the paper's long-run improvement in Japanese market quality does not show up in our daily proxies for large stocks: the 2010–2016 trends are flat or slightly worse, with or without controls for the tick-size reform.</a:t>
             </a:r>
             <a:endParaRPr lang="en-US" dirty="0"/>
           </a:p>
@@ -1999,7 +2365,7 @@
           <a:p>
             <a:r>
               <a:rPr lang="en-US" dirty="0"/>
-              <a:t>Four takeaways. Arbitrage is infrequent and small. The two markets have opposite associations with stock market quality. The Japanese evidence makes the arbitrage harm causal but bounded. Our replication lab shows the methods work, while flagging that the claim that benefits dominate rests on the weakest evidence.</a:t>
+              <a:t>Six concerns. First, the French evidence is one year and, for stocks, one ETF. Second, both activity measures are proxies. Third, the Japanese shock only covers creations, so the redemption and fire-sale case remains open. Fourth, BoJ days are selected and the doses are extreme. Fifth, the long-run argument is a trend regression confounded by the 2014–2015 tick-size reform. Sixth, some reported magnitudes are hard to reconcile and should be clarified.</a:t>
             </a:r>
             <a:endParaRPr lang="en-US" dirty="0"/>
           </a:p>
@@ -2175,7 +2541,7 @@
           <a:p>
             <a:r>
               <a:rPr lang="en-US" dirty="0"/>
-              <a:t>Main references. Market data used in the notebook come from Yahoo Finance and Bank of Japan statistics.</a:t>
+              <a:t>Since the paper was written, the BoJ stopped buying ETFs in March 2024, decided in September 2025 to sell about 330 billion yen a year, and started selling in January 2026. That is the redemption experiment the paper lacked, though the pace is tiny. Given that our real-data run finds no detectable effect even of the large purchases, the sales should leave no visible trace in daily data.</a:t>
             </a:r>
             <a:endParaRPr lang="en-US" dirty="0"/>
           </a:p>
@@ -2199,6 +2565,182 @@
             <a:fld id="{F7021451-1387-4CA6-816F-3879F97B5CBC}" type="slidenum">
               <a:rPr lang="en-US"/>
               <a:t>20</a:t>
+            </a:fld>
+            <a:endParaRPr lang="en-US"/>
+          </a:p>
+        </p:txBody>
+      </p:sp>
+    </p:spTree>
+    <p:extLst>
+      <p:ext uri="{BB962C8B-B14F-4D97-AF65-F5344CB8AC3E}">
+        <p14:creationId xmlns:p14="http://schemas.microsoft.com/office/powerpoint/2010/main" val="1024086991"/>
+      </p:ext>
+    </p:extLst>
+  </p:cSld>
+  <p:clrMapOvr>
+    <a:masterClrMapping/>
+  </p:clrMapOvr>
+</p:notes>
+</file>
+
+<file path=ppt/notesSlides/notesSlide21.xml><?xml version="1.0" encoding="utf-8"?>
+<p:notes xmlns:a="http://schemas.openxmlformats.org/drawingml/2006/main" xmlns:r="http://schemas.openxmlformats.org/officeDocument/2006/relationships" xmlns:p="http://schemas.openxmlformats.org/presentationml/2006/main">
+  <p:cSld>
+    <p:spTree>
+      <p:nvGrpSpPr>
+        <p:cNvPr id="1" name=""/>
+        <p:cNvGrpSpPr/>
+        <p:nvPr/>
+      </p:nvGrpSpPr>
+      <p:grpSpPr>
+        <a:xfrm>
+          <a:off x="0" y="0"/>
+          <a:ext cx="0" cy="0"/>
+          <a:chOff x="0" y="0"/>
+          <a:chExt cx="0" cy="0"/>
+        </a:xfrm>
+      </p:grpSpPr>
+      <p:sp>
+        <p:nvSpPr>
+          <p:cNvPr id="2" name="Slide Image Placeholder 1"/>
+          <p:cNvSpPr>
+            <a:spLocks noGrp="1" noRot="1" noChangeAspect="1"/>
+          </p:cNvSpPr>
+          <p:nvPr>
+            <p:ph type="sldImg"/>
+          </p:nvPr>
+        </p:nvSpPr>
+        <p:spPr/>
+      </p:sp>
+      <p:sp>
+        <p:nvSpPr>
+          <p:cNvPr id="3" name="Notes Placeholder 2"/>
+          <p:cNvSpPr>
+            <a:spLocks noGrp="1"/>
+          </p:cNvSpPr>
+          <p:nvPr>
+            <p:ph type="body" idx="1"/>
+          </p:nvPr>
+        </p:nvSpPr>
+        <p:spPr/>
+        <p:txBody>
+          <a:bodyPr/>
+          <a:lstStyle/>
+          <a:p>
+            <a:r>
+              <a:rPr lang="en-US" dirty="0"/>
+              <a:t>Four takeaways. Arbitrage is infrequent and small. The two markets have opposite associations with stock market quality. The Japanese evidence makes the arbitrage harm causal but bounded. Our replication shows the methods work in simulation; on open daily data the liquidity spill-over replicates, while the BoJ effect and the long-run improvement do not, which suggests they depend on the paper's intraday data.</a:t>
+            </a:r>
+            <a:endParaRPr lang="en-US" dirty="0"/>
+          </a:p>
+        </p:txBody>
+      </p:sp>
+      <p:sp>
+        <p:nvSpPr>
+          <p:cNvPr id="4" name="Slide Number Placeholder 3"/>
+          <p:cNvSpPr>
+            <a:spLocks noGrp="1"/>
+          </p:cNvSpPr>
+          <p:nvPr>
+            <p:ph type="sldNum" sz="quarter" idx="10"/>
+          </p:nvPr>
+        </p:nvSpPr>
+        <p:spPr/>
+        <p:txBody>
+          <a:bodyPr/>
+          <a:lstStyle/>
+          <a:p>
+            <a:fld id="{F7021451-1387-4CA6-816F-3879F97B5CBC}" type="slidenum">
+              <a:rPr lang="en-US"/>
+              <a:t>21</a:t>
+            </a:fld>
+            <a:endParaRPr lang="en-US"/>
+          </a:p>
+        </p:txBody>
+      </p:sp>
+    </p:spTree>
+    <p:extLst>
+      <p:ext uri="{BB962C8B-B14F-4D97-AF65-F5344CB8AC3E}">
+        <p14:creationId xmlns:p14="http://schemas.microsoft.com/office/powerpoint/2010/main" val="1024086991"/>
+      </p:ext>
+    </p:extLst>
+  </p:cSld>
+  <p:clrMapOvr>
+    <a:masterClrMapping/>
+  </p:clrMapOvr>
+</p:notes>
+</file>
+
+<file path=ppt/notesSlides/notesSlide22.xml><?xml version="1.0" encoding="utf-8"?>
+<p:notes xmlns:a="http://schemas.openxmlformats.org/drawingml/2006/main" xmlns:r="http://schemas.openxmlformats.org/officeDocument/2006/relationships" xmlns:p="http://schemas.openxmlformats.org/presentationml/2006/main">
+  <p:cSld>
+    <p:spTree>
+      <p:nvGrpSpPr>
+        <p:cNvPr id="1" name=""/>
+        <p:cNvGrpSpPr/>
+        <p:nvPr/>
+      </p:nvGrpSpPr>
+      <p:grpSpPr>
+        <a:xfrm>
+          <a:off x="0" y="0"/>
+          <a:ext cx="0" cy="0"/>
+          <a:chOff x="0" y="0"/>
+          <a:chExt cx="0" cy="0"/>
+        </a:xfrm>
+      </p:grpSpPr>
+      <p:sp>
+        <p:nvSpPr>
+          <p:cNvPr id="2" name="Slide Image Placeholder 1"/>
+          <p:cNvSpPr>
+            <a:spLocks noGrp="1" noRot="1" noChangeAspect="1"/>
+          </p:cNvSpPr>
+          <p:nvPr>
+            <p:ph type="sldImg"/>
+          </p:nvPr>
+        </p:nvSpPr>
+        <p:spPr/>
+      </p:sp>
+      <p:sp>
+        <p:nvSpPr>
+          <p:cNvPr id="3" name="Notes Placeholder 2"/>
+          <p:cNvSpPr>
+            <a:spLocks noGrp="1"/>
+          </p:cNvSpPr>
+          <p:nvPr>
+            <p:ph type="body" idx="1"/>
+          </p:nvPr>
+        </p:nvSpPr>
+        <p:spPr/>
+        <p:txBody>
+          <a:bodyPr/>
+          <a:lstStyle/>
+          <a:p>
+            <a:r>
+              <a:rPr lang="en-US" dirty="0"/>
+              <a:t>Main references. Market data used in the notebook come from Yahoo Finance and Bank of Japan statistics.</a:t>
+            </a:r>
+            <a:endParaRPr lang="en-US" dirty="0"/>
+          </a:p>
+        </p:txBody>
+      </p:sp>
+      <p:sp>
+        <p:nvSpPr>
+          <p:cNvPr id="4" name="Slide Number Placeholder 3"/>
+          <p:cNvSpPr>
+            <a:spLocks noGrp="1"/>
+          </p:cNvSpPr>
+          <p:nvPr>
+            <p:ph type="sldNum" sz="quarter" idx="10"/>
+          </p:nvPr>
+        </p:nvSpPr>
+        <p:spPr/>
+        <p:txBody>
+          <a:bodyPr/>
+          <a:lstStyle/>
+          <a:p>
+            <a:fld id="{F7021451-1387-4CA6-816F-3879F97B5CBC}" type="slidenum">
+              <a:rPr lang="en-US"/>
+              <a:t>22</a:t>
             </a:fld>
             <a:endParaRPr lang="en-US"/>
           </a:p>
@@ -7089,26 +7631,1805 @@
                 <a:ea typeface="Cambria" pitchFamily="34" charset="-122"/>
                 <a:cs typeface="Cambria" pitchFamily="34" charset="-120"/>
               </a:rPr>
-              <a:t>Critical assessment</a:t>
+              <a:t>Real data I: no BoJ effect in daily data</a:t>
             </a:r>
             <a:endParaRPr lang="en-US" sz="3200" dirty="0"/>
           </a:p>
         </p:txBody>
       </p:sp>
-      <p:sp>
-        <p:nvSpPr>
-          <p:cNvPr id="3" name="Critique card 1"/>
+      <p:graphicFrame>
+        <p:nvGraphicFramePr>
+          <p:cNvPr id="18" name="Real Table 8"/>
+          <p:cNvGraphicFramePr>
+            <a:graphicFrameLocks noGrp="1"/>
+          </p:cNvGraphicFramePr>
+          <p:nvPr>
+            <p:extLst>
+              <p:ext uri="{D42A27DB-BD31-4B8C-83A1-F6EECF244321}">
+                <p14:modId xmlns:p14="http://schemas.microsoft.com/office/powerpoint/2010/main" val="1579011935"/>
+              </p:ext>
+            </p:extLst>
+          </p:nvPr>
+        </p:nvGraphicFramePr>
+        <p:xfrm>
+          <a:off x="548640" y="1371600"/>
+          <a:ext cx="7223760" cy="914400"/>
+        </p:xfrm>
+        <a:graphic>
+          <a:graphicData uri="http://schemas.openxmlformats.org/drawingml/2006/table">
+            <a:tbl>
+              <a:tblPr/>
+              <a:tblGrid>
+                <a:gridCol w="1783080"/>
+                <a:gridCol w="1325880"/>
+                <a:gridCol w="1463040"/>
+                <a:gridCol w="1463040"/>
+                <a:gridCol w="1188720"/>
+              </a:tblGrid>
+              <a:tr h="566928">
+                <a:tc>
+                  <a:txBody>
+                    <a:bodyPr/>
+                    <a:lstStyle/>
+                    <a:p>
+                      <a:pPr algn="ctr" indent="0" marL="0">
+                        <a:buNone/>
+                      </a:pPr>
+                      <a:r>
+                        <a:rPr lang="en-US" sz="1400" b="1" dirty="0">
+                          <a:solidFill>
+                            <a:srgbClr val="FFFFFF"/>
+                          </a:solidFill>
+                          <a:latin typeface="Calibri" pitchFamily="34" charset="0"/>
+                          <a:ea typeface="Calibri" pitchFamily="34" charset="-122"/>
+                          <a:cs typeface="Calibri" pitchFamily="34" charset="-120"/>
+                        </a:rPr>
+                        <a:t>Outcome</a:t>
+                      </a:r>
+                      <a:endParaRPr lang="en-US" sz="1400" dirty="0">
+                        <a:latin typeface="Calibri" charset="0"/>
+                        <a:ea typeface="Calibri" charset="0"/>
+                        <a:cs typeface="Calibri" charset="0"/>
+                      </a:endParaRPr>
+                    </a:p>
+                  </a:txBody>
+                  <a:tcPr marL="91440" marR="91440" marT="45720" marB="45720" anchor="ctr">
+                    <a:lnL w="12700" cap="flat" cmpd="sng" algn="ctr">
+                      <a:solidFill>
+                        <a:srgbClr val="D1D5DB"/>
+                      </a:solidFill>
+                      <a:prstDash val="solid"/>
+                      <a:round/>
+                      <a:headEnd type="none" w="med" len="med"/>
+                      <a:tailEnd type="none" w="med" len="med"/>
+                    </a:lnL>
+                    <a:lnR w="12700" cap="flat" cmpd="sng" algn="ctr">
+                      <a:solidFill>
+                        <a:srgbClr val="D1D5DB"/>
+                      </a:solidFill>
+                      <a:prstDash val="solid"/>
+                      <a:round/>
+                      <a:headEnd type="none" w="med" len="med"/>
+                      <a:tailEnd type="none" w="med" len="med"/>
+                    </a:lnR>
+                    <a:lnT w="12700" cap="flat" cmpd="sng" algn="ctr">
+                      <a:solidFill>
+                        <a:srgbClr val="D1D5DB"/>
+                      </a:solidFill>
+                      <a:prstDash val="solid"/>
+                      <a:round/>
+                      <a:headEnd type="none" w="med" len="med"/>
+                      <a:tailEnd type="none" w="med" len="med"/>
+                    </a:lnT>
+                    <a:lnB w="12700" cap="flat" cmpd="sng" algn="ctr">
+                      <a:solidFill>
+                        <a:srgbClr val="D1D5DB"/>
+                      </a:solidFill>
+                      <a:prstDash val="solid"/>
+                      <a:round/>
+                      <a:headEnd type="none" w="med" len="med"/>
+                      <a:tailEnd type="none" w="med" len="med"/>
+                    </a:lnB>
+                    <a:solidFill>
+                      <a:srgbClr val="14213D"/>
+                    </a:solidFill>
+                  </a:tcPr>
+                </a:tc>
+                <a:tc>
+                  <a:txBody>
+                    <a:bodyPr/>
+                    <a:lstStyle/>
+                    <a:p>
+                      <a:pPr algn="ctr" indent="0" marL="0">
+                        <a:buNone/>
+                      </a:pPr>
+                      <a:r>
+                        <a:rPr lang="en-US" sz="1400" b="1" dirty="0">
+                          <a:solidFill>
+                            <a:srgbClr val="FFFFFF"/>
+                          </a:solidFill>
+                          <a:latin typeface="Calibri" pitchFamily="34" charset="0"/>
+                          <a:ea typeface="Calibri" pitchFamily="34" charset="-122"/>
+                          <a:cs typeface="Calibri" pitchFamily="34" charset="-120"/>
+                        </a:rPr>
+                        <a:t>Paper, Panel A</a:t>
+                      </a:r>
+                      <a:endParaRPr lang="en-US" sz="1400" dirty="0">
+                        <a:latin typeface="Calibri" charset="0"/>
+                        <a:ea typeface="Calibri" charset="0"/>
+                        <a:cs typeface="Calibri" charset="0"/>
+                      </a:endParaRPr>
+                    </a:p>
+                  </a:txBody>
+                  <a:tcPr marL="91440" marR="91440" marT="45720" marB="45720" anchor="ctr">
+                    <a:lnL w="12700" cap="flat" cmpd="sng" algn="ctr">
+                      <a:solidFill>
+                        <a:srgbClr val="D1D5DB"/>
+                      </a:solidFill>
+                      <a:prstDash val="solid"/>
+                      <a:round/>
+                      <a:headEnd type="none" w="med" len="med"/>
+                      <a:tailEnd type="none" w="med" len="med"/>
+                    </a:lnL>
+                    <a:lnR w="12700" cap="flat" cmpd="sng" algn="ctr">
+                      <a:solidFill>
+                        <a:srgbClr val="D1D5DB"/>
+                      </a:solidFill>
+                      <a:prstDash val="solid"/>
+                      <a:round/>
+                      <a:headEnd type="none" w="med" len="med"/>
+                      <a:tailEnd type="none" w="med" len="med"/>
+                    </a:lnR>
+                    <a:lnT w="12700" cap="flat" cmpd="sng" algn="ctr">
+                      <a:solidFill>
+                        <a:srgbClr val="D1D5DB"/>
+                      </a:solidFill>
+                      <a:prstDash val="solid"/>
+                      <a:round/>
+                      <a:headEnd type="none" w="med" len="med"/>
+                      <a:tailEnd type="none" w="med" len="med"/>
+                    </a:lnT>
+                    <a:lnB w="12700" cap="flat" cmpd="sng" algn="ctr">
+                      <a:solidFill>
+                        <a:srgbClr val="D1D5DB"/>
+                      </a:solidFill>
+                      <a:prstDash val="solid"/>
+                      <a:round/>
+                      <a:headEnd type="none" w="med" len="med"/>
+                      <a:tailEnd type="none" w="med" len="med"/>
+                    </a:lnB>
+                    <a:solidFill>
+                      <a:srgbClr val="14213D"/>
+                    </a:solidFill>
+                  </a:tcPr>
+                </a:tc>
+                <a:tc>
+                  <a:txBody>
+                    <a:bodyPr/>
+                    <a:lstStyle/>
+                    <a:p>
+                      <a:pPr algn="ctr" indent="0" marL="0">
+                        <a:buNone/>
+                      </a:pPr>
+                      <a:r>
+                        <a:rPr lang="en-US" sz="1400" b="1" dirty="0">
+                          <a:solidFill>
+                            <a:srgbClr val="FFFFFF"/>
+                          </a:solidFill>
+                          <a:latin typeface="Calibri" pitchFamily="34" charset="0"/>
+                          <a:ea typeface="Calibri" pitchFamily="34" charset="-122"/>
+                          <a:cs typeface="Calibri" pitchFamily="34" charset="-120"/>
+                        </a:rPr>
+                        <a:t>Ours, Panel A (t)</a:t>
+                      </a:r>
+                      <a:endParaRPr lang="en-US" sz="1400" dirty="0">
+                        <a:latin typeface="Calibri" charset="0"/>
+                        <a:ea typeface="Calibri" charset="0"/>
+                        <a:cs typeface="Calibri" charset="0"/>
+                      </a:endParaRPr>
+                    </a:p>
+                  </a:txBody>
+                  <a:tcPr marL="91440" marR="91440" marT="45720" marB="45720" anchor="ctr">
+                    <a:lnL w="12700" cap="flat" cmpd="sng" algn="ctr">
+                      <a:solidFill>
+                        <a:srgbClr val="D1D5DB"/>
+                      </a:solidFill>
+                      <a:prstDash val="solid"/>
+                      <a:round/>
+                      <a:headEnd type="none" w="med" len="med"/>
+                      <a:tailEnd type="none" w="med" len="med"/>
+                    </a:lnL>
+                    <a:lnR w="12700" cap="flat" cmpd="sng" algn="ctr">
+                      <a:solidFill>
+                        <a:srgbClr val="D1D5DB"/>
+                      </a:solidFill>
+                      <a:prstDash val="solid"/>
+                      <a:round/>
+                      <a:headEnd type="none" w="med" len="med"/>
+                      <a:tailEnd type="none" w="med" len="med"/>
+                    </a:lnR>
+                    <a:lnT w="12700" cap="flat" cmpd="sng" algn="ctr">
+                      <a:solidFill>
+                        <a:srgbClr val="D1D5DB"/>
+                      </a:solidFill>
+                      <a:prstDash val="solid"/>
+                      <a:round/>
+                      <a:headEnd type="none" w="med" len="med"/>
+                      <a:tailEnd type="none" w="med" len="med"/>
+                    </a:lnT>
+                    <a:lnB w="12700" cap="flat" cmpd="sng" algn="ctr">
+                      <a:solidFill>
+                        <a:srgbClr val="D1D5DB"/>
+                      </a:solidFill>
+                      <a:prstDash val="solid"/>
+                      <a:round/>
+                      <a:headEnd type="none" w="med" len="med"/>
+                      <a:tailEnd type="none" w="med" len="med"/>
+                    </a:lnB>
+                    <a:solidFill>
+                      <a:srgbClr val="14213D"/>
+                    </a:solidFill>
+                  </a:tcPr>
+                </a:tc>
+                <a:tc>
+                  <a:txBody>
+                    <a:bodyPr/>
+                    <a:lstStyle/>
+                    <a:p>
+                      <a:pPr algn="ctr" indent="0" marL="0">
+                        <a:buNone/>
+                      </a:pPr>
+                      <a:r>
+                        <a:rPr lang="en-US" sz="1400" b="1" dirty="0">
+                          <a:solidFill>
+                            <a:srgbClr val="FFFFFF"/>
+                          </a:solidFill>
+                          <a:latin typeface="Calibri" pitchFamily="34" charset="0"/>
+                          <a:ea typeface="Calibri" pitchFamily="34" charset="-122"/>
+                          <a:cs typeface="Calibri" pitchFamily="34" charset="-120"/>
+                        </a:rPr>
+                        <a:t>Ours, placebo (t)</a:t>
+                      </a:r>
+                      <a:endParaRPr lang="en-US" sz="1400" dirty="0">
+                        <a:latin typeface="Calibri" charset="0"/>
+                        <a:ea typeface="Calibri" charset="0"/>
+                        <a:cs typeface="Calibri" charset="0"/>
+                      </a:endParaRPr>
+                    </a:p>
+                  </a:txBody>
+                  <a:tcPr marL="91440" marR="91440" marT="45720" marB="45720" anchor="ctr">
+                    <a:lnL w="12700" cap="flat" cmpd="sng" algn="ctr">
+                      <a:solidFill>
+                        <a:srgbClr val="D1D5DB"/>
+                      </a:solidFill>
+                      <a:prstDash val="solid"/>
+                      <a:round/>
+                      <a:headEnd type="none" w="med" len="med"/>
+                      <a:tailEnd type="none" w="med" len="med"/>
+                    </a:lnL>
+                    <a:lnR w="12700" cap="flat" cmpd="sng" algn="ctr">
+                      <a:solidFill>
+                        <a:srgbClr val="D1D5DB"/>
+                      </a:solidFill>
+                      <a:prstDash val="solid"/>
+                      <a:round/>
+                      <a:headEnd type="none" w="med" len="med"/>
+                      <a:tailEnd type="none" w="med" len="med"/>
+                    </a:lnR>
+                    <a:lnT w="12700" cap="flat" cmpd="sng" algn="ctr">
+                      <a:solidFill>
+                        <a:srgbClr val="D1D5DB"/>
+                      </a:solidFill>
+                      <a:prstDash val="solid"/>
+                      <a:round/>
+                      <a:headEnd type="none" w="med" len="med"/>
+                      <a:tailEnd type="none" w="med" len="med"/>
+                    </a:lnT>
+                    <a:lnB w="12700" cap="flat" cmpd="sng" algn="ctr">
+                      <a:solidFill>
+                        <a:srgbClr val="D1D5DB"/>
+                      </a:solidFill>
+                      <a:prstDash val="solid"/>
+                      <a:round/>
+                      <a:headEnd type="none" w="med" len="med"/>
+                      <a:tailEnd type="none" w="med" len="med"/>
+                    </a:lnB>
+                    <a:solidFill>
+                      <a:srgbClr val="14213D"/>
+                    </a:solidFill>
+                  </a:tcPr>
+                </a:tc>
+                <a:tc>
+                  <a:txBody>
+                    <a:bodyPr/>
+                    <a:lstStyle/>
+                    <a:p>
+                      <a:pPr algn="ctr" indent="0" marL="0">
+                        <a:buNone/>
+                      </a:pPr>
+                      <a:r>
+                        <a:rPr lang="en-US" sz="1400" b="1" dirty="0">
+                          <a:solidFill>
+                            <a:srgbClr val="FFFFFF"/>
+                          </a:solidFill>
+                          <a:latin typeface="Calibri" pitchFamily="34" charset="0"/>
+                          <a:ea typeface="Calibri" pitchFamily="34" charset="-122"/>
+                          <a:cs typeface="Calibri" pitchFamily="34" charset="-120"/>
+                        </a:rPr>
+                        <a:t>Z (A vs B)</a:t>
+                      </a:r>
+                      <a:endParaRPr lang="en-US" sz="1400" dirty="0">
+                        <a:latin typeface="Calibri" charset="0"/>
+                        <a:ea typeface="Calibri" charset="0"/>
+                        <a:cs typeface="Calibri" charset="0"/>
+                      </a:endParaRPr>
+                    </a:p>
+                  </a:txBody>
+                  <a:tcPr marL="91440" marR="91440" marT="45720" marB="45720" anchor="ctr">
+                    <a:lnL w="12700" cap="flat" cmpd="sng" algn="ctr">
+                      <a:solidFill>
+                        <a:srgbClr val="D1D5DB"/>
+                      </a:solidFill>
+                      <a:prstDash val="solid"/>
+                      <a:round/>
+                      <a:headEnd type="none" w="med" len="med"/>
+                      <a:tailEnd type="none" w="med" len="med"/>
+                    </a:lnL>
+                    <a:lnR w="12700" cap="flat" cmpd="sng" algn="ctr">
+                      <a:solidFill>
+                        <a:srgbClr val="D1D5DB"/>
+                      </a:solidFill>
+                      <a:prstDash val="solid"/>
+                      <a:round/>
+                      <a:headEnd type="none" w="med" len="med"/>
+                      <a:tailEnd type="none" w="med" len="med"/>
+                    </a:lnR>
+                    <a:lnT w="12700" cap="flat" cmpd="sng" algn="ctr">
+                      <a:solidFill>
+                        <a:srgbClr val="D1D5DB"/>
+                      </a:solidFill>
+                      <a:prstDash val="solid"/>
+                      <a:round/>
+                      <a:headEnd type="none" w="med" len="med"/>
+                      <a:tailEnd type="none" w="med" len="med"/>
+                    </a:lnT>
+                    <a:lnB w="12700" cap="flat" cmpd="sng" algn="ctr">
+                      <a:solidFill>
+                        <a:srgbClr val="D1D5DB"/>
+                      </a:solidFill>
+                      <a:prstDash val="solid"/>
+                      <a:round/>
+                      <a:headEnd type="none" w="med" len="med"/>
+                      <a:tailEnd type="none" w="med" len="med"/>
+                    </a:lnB>
+                    <a:solidFill>
+                      <a:srgbClr val="14213D"/>
+                    </a:solidFill>
+                  </a:tcPr>
+                </a:tc>
+              </a:tr>
+              <a:tr h="566928">
+                <a:tc>
+                  <a:txBody>
+                    <a:bodyPr/>
+                    <a:lstStyle/>
+                    <a:p>
+                      <a:pPr algn="ctr" indent="0" marL="0">
+                        <a:buNone/>
+                      </a:pPr>
+                      <a:r>
+                        <a:rPr lang="en-US" sz="1400" b="1" dirty="0">
+                          <a:solidFill>
+                            <a:srgbClr val="1B1F2A"/>
+                          </a:solidFill>
+                          <a:latin typeface="Calibri" pitchFamily="34" charset="0"/>
+                          <a:ea typeface="Calibri" pitchFamily="34" charset="-122"/>
+                          <a:cs typeface="Calibri" pitchFamily="34" charset="-120"/>
+                        </a:rPr>
+                        <a:t>Return</a:t>
+                      </a:r>
+                      <a:endParaRPr lang="en-US" sz="1400" dirty="0">
+                        <a:latin typeface="Calibri" charset="0"/>
+                        <a:ea typeface="Calibri" charset="0"/>
+                        <a:cs typeface="Calibri" charset="0"/>
+                      </a:endParaRPr>
+                    </a:p>
+                  </a:txBody>
+                  <a:tcPr marL="91440" marR="91440" marT="45720" marB="45720" anchor="ctr">
+                    <a:lnL w="12700" cap="flat" cmpd="sng" algn="ctr">
+                      <a:solidFill>
+                        <a:srgbClr val="D1D5DB"/>
+                      </a:solidFill>
+                      <a:prstDash val="solid"/>
+                      <a:round/>
+                      <a:headEnd type="none" w="med" len="med"/>
+                      <a:tailEnd type="none" w="med" len="med"/>
+                    </a:lnL>
+                    <a:lnR w="12700" cap="flat" cmpd="sng" algn="ctr">
+                      <a:solidFill>
+                        <a:srgbClr val="D1D5DB"/>
+                      </a:solidFill>
+                      <a:prstDash val="solid"/>
+                      <a:round/>
+                      <a:headEnd type="none" w="med" len="med"/>
+                      <a:tailEnd type="none" w="med" len="med"/>
+                    </a:lnR>
+                    <a:lnT w="12700" cap="flat" cmpd="sng" algn="ctr">
+                      <a:solidFill>
+                        <a:srgbClr val="D1D5DB"/>
+                      </a:solidFill>
+                      <a:prstDash val="solid"/>
+                      <a:round/>
+                      <a:headEnd type="none" w="med" len="med"/>
+                      <a:tailEnd type="none" w="med" len="med"/>
+                    </a:lnT>
+                    <a:lnB w="12700" cap="flat" cmpd="sng" algn="ctr">
+                      <a:solidFill>
+                        <a:srgbClr val="D1D5DB"/>
+                      </a:solidFill>
+                      <a:prstDash val="solid"/>
+                      <a:round/>
+                      <a:headEnd type="none" w="med" len="med"/>
+                      <a:tailEnd type="none" w="med" len="med"/>
+                    </a:lnB>
+                    <a:solidFill>
+                      <a:srgbClr val="FFFFFF"/>
+                    </a:solidFill>
+                  </a:tcPr>
+                </a:tc>
+                <a:tc>
+                  <a:txBody>
+                    <a:bodyPr/>
+                    <a:lstStyle/>
+                    <a:p>
+                      <a:pPr algn="ctr" indent="0" marL="0">
+                        <a:buNone/>
+                      </a:pPr>
+                      <a:r>
+                        <a:rPr lang="en-US" sz="1400" dirty="0">
+                          <a:solidFill>
+                            <a:srgbClr val="1B1F2A"/>
+                          </a:solidFill>
+                          <a:latin typeface="Calibri" pitchFamily="34" charset="0"/>
+                          <a:ea typeface="Calibri" pitchFamily="34" charset="-122"/>
+                          <a:cs typeface="Calibri" pitchFamily="34" charset="-120"/>
+                        </a:rPr>
+                        <a:t>0.239***</a:t>
+                      </a:r>
+                      <a:endParaRPr lang="en-US" sz="1400" dirty="0">
+                        <a:latin typeface="Calibri" charset="0"/>
+                        <a:ea typeface="Calibri" charset="0"/>
+                        <a:cs typeface="Calibri" charset="0"/>
+                      </a:endParaRPr>
+                    </a:p>
+                  </a:txBody>
+                  <a:tcPr marL="91440" marR="91440" marT="45720" marB="45720" anchor="ctr">
+                    <a:lnL w="12700" cap="flat" cmpd="sng" algn="ctr">
+                      <a:solidFill>
+                        <a:srgbClr val="D1D5DB"/>
+                      </a:solidFill>
+                      <a:prstDash val="solid"/>
+                      <a:round/>
+                      <a:headEnd type="none" w="med" len="med"/>
+                      <a:tailEnd type="none" w="med" len="med"/>
+                    </a:lnL>
+                    <a:lnR w="12700" cap="flat" cmpd="sng" algn="ctr">
+                      <a:solidFill>
+                        <a:srgbClr val="D1D5DB"/>
+                      </a:solidFill>
+                      <a:prstDash val="solid"/>
+                      <a:round/>
+                      <a:headEnd type="none" w="med" len="med"/>
+                      <a:tailEnd type="none" w="med" len="med"/>
+                    </a:lnR>
+                    <a:lnT w="12700" cap="flat" cmpd="sng" algn="ctr">
+                      <a:solidFill>
+                        <a:srgbClr val="D1D5DB"/>
+                      </a:solidFill>
+                      <a:prstDash val="solid"/>
+                      <a:round/>
+                      <a:headEnd type="none" w="med" len="med"/>
+                      <a:tailEnd type="none" w="med" len="med"/>
+                    </a:lnT>
+                    <a:lnB w="12700" cap="flat" cmpd="sng" algn="ctr">
+                      <a:solidFill>
+                        <a:srgbClr val="D1D5DB"/>
+                      </a:solidFill>
+                      <a:prstDash val="solid"/>
+                      <a:round/>
+                      <a:headEnd type="none" w="med" len="med"/>
+                      <a:tailEnd type="none" w="med" len="med"/>
+                    </a:lnB>
+                    <a:solidFill>
+                      <a:srgbClr val="EEF2F8"/>
+                    </a:solidFill>
+                  </a:tcPr>
+                </a:tc>
+                <a:tc>
+                  <a:txBody>
+                    <a:bodyPr/>
+                    <a:lstStyle/>
+                    <a:p>
+                      <a:pPr algn="ctr" indent="0" marL="0">
+                        <a:buNone/>
+                      </a:pPr>
+                      <a:r>
+                        <a:rPr lang="en-US" sz="1400" dirty="0">
+                          <a:solidFill>
+                            <a:srgbClr val="1B1F2A"/>
+                          </a:solidFill>
+                          <a:latin typeface="Calibri" pitchFamily="34" charset="0"/>
+                          <a:ea typeface="Calibri" pitchFamily="34" charset="-122"/>
+                          <a:cs typeface="Calibri" pitchFamily="34" charset="-120"/>
+                        </a:rPr>
+                        <a:t>−0.027 (−0.8)</a:t>
+                      </a:r>
+                      <a:endParaRPr lang="en-US" sz="1400" dirty="0">
+                        <a:latin typeface="Calibri" charset="0"/>
+                        <a:ea typeface="Calibri" charset="0"/>
+                        <a:cs typeface="Calibri" charset="0"/>
+                      </a:endParaRPr>
+                    </a:p>
+                  </a:txBody>
+                  <a:tcPr marL="91440" marR="91440" marT="45720" marB="45720" anchor="ctr">
+                    <a:lnL w="12700" cap="flat" cmpd="sng" algn="ctr">
+                      <a:solidFill>
+                        <a:srgbClr val="D1D5DB"/>
+                      </a:solidFill>
+                      <a:prstDash val="solid"/>
+                      <a:round/>
+                      <a:headEnd type="none" w="med" len="med"/>
+                      <a:tailEnd type="none" w="med" len="med"/>
+                    </a:lnL>
+                    <a:lnR w="12700" cap="flat" cmpd="sng" algn="ctr">
+                      <a:solidFill>
+                        <a:srgbClr val="D1D5DB"/>
+                      </a:solidFill>
+                      <a:prstDash val="solid"/>
+                      <a:round/>
+                      <a:headEnd type="none" w="med" len="med"/>
+                      <a:tailEnd type="none" w="med" len="med"/>
+                    </a:lnR>
+                    <a:lnT w="12700" cap="flat" cmpd="sng" algn="ctr">
+                      <a:solidFill>
+                        <a:srgbClr val="D1D5DB"/>
+                      </a:solidFill>
+                      <a:prstDash val="solid"/>
+                      <a:round/>
+                      <a:headEnd type="none" w="med" len="med"/>
+                      <a:tailEnd type="none" w="med" len="med"/>
+                    </a:lnT>
+                    <a:lnB w="12700" cap="flat" cmpd="sng" algn="ctr">
+                      <a:solidFill>
+                        <a:srgbClr val="D1D5DB"/>
+                      </a:solidFill>
+                      <a:prstDash val="solid"/>
+                      <a:round/>
+                      <a:headEnd type="none" w="med" len="med"/>
+                      <a:tailEnd type="none" w="med" len="med"/>
+                    </a:lnB>
+                    <a:solidFill>
+                      <a:srgbClr val="FFFFFF"/>
+                    </a:solidFill>
+                  </a:tcPr>
+                </a:tc>
+                <a:tc>
+                  <a:txBody>
+                    <a:bodyPr/>
+                    <a:lstStyle/>
+                    <a:p>
+                      <a:pPr algn="ctr" indent="0" marL="0">
+                        <a:buNone/>
+                      </a:pPr>
+                      <a:r>
+                        <a:rPr lang="en-US" sz="1400" dirty="0">
+                          <a:solidFill>
+                            <a:srgbClr val="1B1F2A"/>
+                          </a:solidFill>
+                          <a:latin typeface="Calibri" pitchFamily="34" charset="0"/>
+                          <a:ea typeface="Calibri" pitchFamily="34" charset="-122"/>
+                          <a:cs typeface="Calibri" pitchFamily="34" charset="-120"/>
+                        </a:rPr>
+                        <a:t>−0.033 (−1.9)</a:t>
+                      </a:r>
+                      <a:endParaRPr lang="en-US" sz="1400" dirty="0">
+                        <a:latin typeface="Calibri" charset="0"/>
+                        <a:ea typeface="Calibri" charset="0"/>
+                        <a:cs typeface="Calibri" charset="0"/>
+                      </a:endParaRPr>
+                    </a:p>
+                  </a:txBody>
+                  <a:tcPr marL="91440" marR="91440" marT="45720" marB="45720" anchor="ctr">
+                    <a:lnL w="12700" cap="flat" cmpd="sng" algn="ctr">
+                      <a:solidFill>
+                        <a:srgbClr val="D1D5DB"/>
+                      </a:solidFill>
+                      <a:prstDash val="solid"/>
+                      <a:round/>
+                      <a:headEnd type="none" w="med" len="med"/>
+                      <a:tailEnd type="none" w="med" len="med"/>
+                    </a:lnL>
+                    <a:lnR w="12700" cap="flat" cmpd="sng" algn="ctr">
+                      <a:solidFill>
+                        <a:srgbClr val="D1D5DB"/>
+                      </a:solidFill>
+                      <a:prstDash val="solid"/>
+                      <a:round/>
+                      <a:headEnd type="none" w="med" len="med"/>
+                      <a:tailEnd type="none" w="med" len="med"/>
+                    </a:lnR>
+                    <a:lnT w="12700" cap="flat" cmpd="sng" algn="ctr">
+                      <a:solidFill>
+                        <a:srgbClr val="D1D5DB"/>
+                      </a:solidFill>
+                      <a:prstDash val="solid"/>
+                      <a:round/>
+                      <a:headEnd type="none" w="med" len="med"/>
+                      <a:tailEnd type="none" w="med" len="med"/>
+                    </a:lnT>
+                    <a:lnB w="12700" cap="flat" cmpd="sng" algn="ctr">
+                      <a:solidFill>
+                        <a:srgbClr val="D1D5DB"/>
+                      </a:solidFill>
+                      <a:prstDash val="solid"/>
+                      <a:round/>
+                      <a:headEnd type="none" w="med" len="med"/>
+                      <a:tailEnd type="none" w="med" len="med"/>
+                    </a:lnB>
+                    <a:solidFill>
+                      <a:srgbClr val="FFFFFF"/>
+                    </a:solidFill>
+                  </a:tcPr>
+                </a:tc>
+                <a:tc>
+                  <a:txBody>
+                    <a:bodyPr/>
+                    <a:lstStyle/>
+                    <a:p>
+                      <a:pPr algn="ctr" indent="0" marL="0">
+                        <a:buNone/>
+                      </a:pPr>
+                      <a:r>
+                        <a:rPr lang="en-US" sz="1400" dirty="0">
+                          <a:solidFill>
+                            <a:srgbClr val="1B1F2A"/>
+                          </a:solidFill>
+                          <a:latin typeface="Calibri" pitchFamily="34" charset="0"/>
+                          <a:ea typeface="Calibri" pitchFamily="34" charset="-122"/>
+                          <a:cs typeface="Calibri" pitchFamily="34" charset="-120"/>
+                        </a:rPr>
+                        <a:t>0.16</a:t>
+                      </a:r>
+                      <a:endParaRPr lang="en-US" sz="1400" dirty="0">
+                        <a:latin typeface="Calibri" charset="0"/>
+                        <a:ea typeface="Calibri" charset="0"/>
+                        <a:cs typeface="Calibri" charset="0"/>
+                      </a:endParaRPr>
+                    </a:p>
+                  </a:txBody>
+                  <a:tcPr marL="91440" marR="91440" marT="45720" marB="45720" anchor="ctr">
+                    <a:lnL w="12700" cap="flat" cmpd="sng" algn="ctr">
+                      <a:solidFill>
+                        <a:srgbClr val="D1D5DB"/>
+                      </a:solidFill>
+                      <a:prstDash val="solid"/>
+                      <a:round/>
+                      <a:headEnd type="none" w="med" len="med"/>
+                      <a:tailEnd type="none" w="med" len="med"/>
+                    </a:lnL>
+                    <a:lnR w="12700" cap="flat" cmpd="sng" algn="ctr">
+                      <a:solidFill>
+                        <a:srgbClr val="D1D5DB"/>
+                      </a:solidFill>
+                      <a:prstDash val="solid"/>
+                      <a:round/>
+                      <a:headEnd type="none" w="med" len="med"/>
+                      <a:tailEnd type="none" w="med" len="med"/>
+                    </a:lnR>
+                    <a:lnT w="12700" cap="flat" cmpd="sng" algn="ctr">
+                      <a:solidFill>
+                        <a:srgbClr val="D1D5DB"/>
+                      </a:solidFill>
+                      <a:prstDash val="solid"/>
+                      <a:round/>
+                      <a:headEnd type="none" w="med" len="med"/>
+                      <a:tailEnd type="none" w="med" len="med"/>
+                    </a:lnT>
+                    <a:lnB w="12700" cap="flat" cmpd="sng" algn="ctr">
+                      <a:solidFill>
+                        <a:srgbClr val="D1D5DB"/>
+                      </a:solidFill>
+                      <a:prstDash val="solid"/>
+                      <a:round/>
+                      <a:headEnd type="none" w="med" len="med"/>
+                      <a:tailEnd type="none" w="med" len="med"/>
+                    </a:lnB>
+                    <a:solidFill>
+                      <a:srgbClr val="FFFFFF"/>
+                    </a:solidFill>
+                  </a:tcPr>
+                </a:tc>
+              </a:tr>
+              <a:tr h="566928">
+                <a:tc>
+                  <a:txBody>
+                    <a:bodyPr/>
+                    <a:lstStyle/>
+                    <a:p>
+                      <a:pPr algn="ctr" indent="0" marL="0">
+                        <a:buNone/>
+                      </a:pPr>
+                      <a:r>
+                        <a:rPr lang="en-US" sz="1400" b="1" dirty="0">
+                          <a:solidFill>
+                            <a:srgbClr val="1B1F2A"/>
+                          </a:solidFill>
+                          <a:latin typeface="Calibri" pitchFamily="34" charset="0"/>
+                          <a:ea typeface="Calibri" pitchFamily="34" charset="-122"/>
+                          <a:cs typeface="Calibri" pitchFamily="34" charset="-120"/>
+                        </a:rPr>
+                        <a:t>Volatility</a:t>
+                      </a:r>
+                      <a:endParaRPr lang="en-US" sz="1400" dirty="0">
+                        <a:latin typeface="Calibri" charset="0"/>
+                        <a:ea typeface="Calibri" charset="0"/>
+                        <a:cs typeface="Calibri" charset="0"/>
+                      </a:endParaRPr>
+                    </a:p>
+                  </a:txBody>
+                  <a:tcPr marL="91440" marR="91440" marT="45720" marB="45720" anchor="ctr">
+                    <a:lnL w="12700" cap="flat" cmpd="sng" algn="ctr">
+                      <a:solidFill>
+                        <a:srgbClr val="D1D5DB"/>
+                      </a:solidFill>
+                      <a:prstDash val="solid"/>
+                      <a:round/>
+                      <a:headEnd type="none" w="med" len="med"/>
+                      <a:tailEnd type="none" w="med" len="med"/>
+                    </a:lnL>
+                    <a:lnR w="12700" cap="flat" cmpd="sng" algn="ctr">
+                      <a:solidFill>
+                        <a:srgbClr val="D1D5DB"/>
+                      </a:solidFill>
+                      <a:prstDash val="solid"/>
+                      <a:round/>
+                      <a:headEnd type="none" w="med" len="med"/>
+                      <a:tailEnd type="none" w="med" len="med"/>
+                    </a:lnR>
+                    <a:lnT w="12700" cap="flat" cmpd="sng" algn="ctr">
+                      <a:solidFill>
+                        <a:srgbClr val="D1D5DB"/>
+                      </a:solidFill>
+                      <a:prstDash val="solid"/>
+                      <a:round/>
+                      <a:headEnd type="none" w="med" len="med"/>
+                      <a:tailEnd type="none" w="med" len="med"/>
+                    </a:lnT>
+                    <a:lnB w="12700" cap="flat" cmpd="sng" algn="ctr">
+                      <a:solidFill>
+                        <a:srgbClr val="D1D5DB"/>
+                      </a:solidFill>
+                      <a:prstDash val="solid"/>
+                      <a:round/>
+                      <a:headEnd type="none" w="med" len="med"/>
+                      <a:tailEnd type="none" w="med" len="med"/>
+                    </a:lnB>
+                    <a:solidFill>
+                      <a:srgbClr val="FFFFFF"/>
+                    </a:solidFill>
+                  </a:tcPr>
+                </a:tc>
+                <a:tc>
+                  <a:txBody>
+                    <a:bodyPr/>
+                    <a:lstStyle/>
+                    <a:p>
+                      <a:pPr algn="ctr" indent="0" marL="0">
+                        <a:buNone/>
+                      </a:pPr>
+                      <a:r>
+                        <a:rPr lang="en-US" sz="1400" dirty="0">
+                          <a:solidFill>
+                            <a:srgbClr val="1B1F2A"/>
+                          </a:solidFill>
+                          <a:latin typeface="Calibri" pitchFamily="34" charset="0"/>
+                          <a:ea typeface="Calibri" pitchFamily="34" charset="-122"/>
+                          <a:cs typeface="Calibri" pitchFamily="34" charset="-120"/>
+                        </a:rPr>
+                        <a:t>1.901***</a:t>
+                      </a:r>
+                      <a:endParaRPr lang="en-US" sz="1400" dirty="0">
+                        <a:latin typeface="Calibri" charset="0"/>
+                        <a:ea typeface="Calibri" charset="0"/>
+                        <a:cs typeface="Calibri" charset="0"/>
+                      </a:endParaRPr>
+                    </a:p>
+                  </a:txBody>
+                  <a:tcPr marL="91440" marR="91440" marT="45720" marB="45720" anchor="ctr">
+                    <a:lnL w="12700" cap="flat" cmpd="sng" algn="ctr">
+                      <a:solidFill>
+                        <a:srgbClr val="D1D5DB"/>
+                      </a:solidFill>
+                      <a:prstDash val="solid"/>
+                      <a:round/>
+                      <a:headEnd type="none" w="med" len="med"/>
+                      <a:tailEnd type="none" w="med" len="med"/>
+                    </a:lnL>
+                    <a:lnR w="12700" cap="flat" cmpd="sng" algn="ctr">
+                      <a:solidFill>
+                        <a:srgbClr val="D1D5DB"/>
+                      </a:solidFill>
+                      <a:prstDash val="solid"/>
+                      <a:round/>
+                      <a:headEnd type="none" w="med" len="med"/>
+                      <a:tailEnd type="none" w="med" len="med"/>
+                    </a:lnR>
+                    <a:lnT w="12700" cap="flat" cmpd="sng" algn="ctr">
+                      <a:solidFill>
+                        <a:srgbClr val="D1D5DB"/>
+                      </a:solidFill>
+                      <a:prstDash val="solid"/>
+                      <a:round/>
+                      <a:headEnd type="none" w="med" len="med"/>
+                      <a:tailEnd type="none" w="med" len="med"/>
+                    </a:lnT>
+                    <a:lnB w="12700" cap="flat" cmpd="sng" algn="ctr">
+                      <a:solidFill>
+                        <a:srgbClr val="D1D5DB"/>
+                      </a:solidFill>
+                      <a:prstDash val="solid"/>
+                      <a:round/>
+                      <a:headEnd type="none" w="med" len="med"/>
+                      <a:tailEnd type="none" w="med" len="med"/>
+                    </a:lnB>
+                    <a:solidFill>
+                      <a:srgbClr val="EEF2F8"/>
+                    </a:solidFill>
+                  </a:tcPr>
+                </a:tc>
+                <a:tc>
+                  <a:txBody>
+                    <a:bodyPr/>
+                    <a:lstStyle/>
+                    <a:p>
+                      <a:pPr algn="ctr" indent="0" marL="0">
+                        <a:buNone/>
+                      </a:pPr>
+                      <a:r>
+                        <a:rPr lang="en-US" sz="1400" dirty="0">
+                          <a:solidFill>
+                            <a:srgbClr val="1B1F2A"/>
+                          </a:solidFill>
+                          <a:latin typeface="Calibri" pitchFamily="34" charset="0"/>
+                          <a:ea typeface="Calibri" pitchFamily="34" charset="-122"/>
+                          <a:cs typeface="Calibri" pitchFamily="34" charset="-120"/>
+                        </a:rPr>
+                        <a:t>−0.031 (−0.1)</a:t>
+                      </a:r>
+                      <a:endParaRPr lang="en-US" sz="1400" dirty="0">
+                        <a:latin typeface="Calibri" charset="0"/>
+                        <a:ea typeface="Calibri" charset="0"/>
+                        <a:cs typeface="Calibri" charset="0"/>
+                      </a:endParaRPr>
+                    </a:p>
+                  </a:txBody>
+                  <a:tcPr marL="91440" marR="91440" marT="45720" marB="45720" anchor="ctr">
+                    <a:lnL w="12700" cap="flat" cmpd="sng" algn="ctr">
+                      <a:solidFill>
+                        <a:srgbClr val="D1D5DB"/>
+                      </a:solidFill>
+                      <a:prstDash val="solid"/>
+                      <a:round/>
+                      <a:headEnd type="none" w="med" len="med"/>
+                      <a:tailEnd type="none" w="med" len="med"/>
+                    </a:lnL>
+                    <a:lnR w="12700" cap="flat" cmpd="sng" algn="ctr">
+                      <a:solidFill>
+                        <a:srgbClr val="D1D5DB"/>
+                      </a:solidFill>
+                      <a:prstDash val="solid"/>
+                      <a:round/>
+                      <a:headEnd type="none" w="med" len="med"/>
+                      <a:tailEnd type="none" w="med" len="med"/>
+                    </a:lnR>
+                    <a:lnT w="12700" cap="flat" cmpd="sng" algn="ctr">
+                      <a:solidFill>
+                        <a:srgbClr val="D1D5DB"/>
+                      </a:solidFill>
+                      <a:prstDash val="solid"/>
+                      <a:round/>
+                      <a:headEnd type="none" w="med" len="med"/>
+                      <a:tailEnd type="none" w="med" len="med"/>
+                    </a:lnT>
+                    <a:lnB w="12700" cap="flat" cmpd="sng" algn="ctr">
+                      <a:solidFill>
+                        <a:srgbClr val="D1D5DB"/>
+                      </a:solidFill>
+                      <a:prstDash val="solid"/>
+                      <a:round/>
+                      <a:headEnd type="none" w="med" len="med"/>
+                      <a:tailEnd type="none" w="med" len="med"/>
+                    </a:lnB>
+                    <a:solidFill>
+                      <a:srgbClr val="FFFFFF"/>
+                    </a:solidFill>
+                  </a:tcPr>
+                </a:tc>
+                <a:tc>
+                  <a:txBody>
+                    <a:bodyPr/>
+                    <a:lstStyle/>
+                    <a:p>
+                      <a:pPr algn="ctr" indent="0" marL="0">
+                        <a:buNone/>
+                      </a:pPr>
+                      <a:r>
+                        <a:rPr lang="en-US" sz="1400" dirty="0">
+                          <a:solidFill>
+                            <a:srgbClr val="1B1F2A"/>
+                          </a:solidFill>
+                          <a:latin typeface="Calibri" pitchFamily="34" charset="0"/>
+                          <a:ea typeface="Calibri" pitchFamily="34" charset="-122"/>
+                          <a:cs typeface="Calibri" pitchFamily="34" charset="-120"/>
+                        </a:rPr>
+                        <a:t>0.243 (1.4)</a:t>
+                      </a:r>
+                      <a:endParaRPr lang="en-US" sz="1400" dirty="0">
+                        <a:latin typeface="Calibri" charset="0"/>
+                        <a:ea typeface="Calibri" charset="0"/>
+                        <a:cs typeface="Calibri" charset="0"/>
+                      </a:endParaRPr>
+                    </a:p>
+                  </a:txBody>
+                  <a:tcPr marL="91440" marR="91440" marT="45720" marB="45720" anchor="ctr">
+                    <a:lnL w="12700" cap="flat" cmpd="sng" algn="ctr">
+                      <a:solidFill>
+                        <a:srgbClr val="D1D5DB"/>
+                      </a:solidFill>
+                      <a:prstDash val="solid"/>
+                      <a:round/>
+                      <a:headEnd type="none" w="med" len="med"/>
+                      <a:tailEnd type="none" w="med" len="med"/>
+                    </a:lnL>
+                    <a:lnR w="12700" cap="flat" cmpd="sng" algn="ctr">
+                      <a:solidFill>
+                        <a:srgbClr val="D1D5DB"/>
+                      </a:solidFill>
+                      <a:prstDash val="solid"/>
+                      <a:round/>
+                      <a:headEnd type="none" w="med" len="med"/>
+                      <a:tailEnd type="none" w="med" len="med"/>
+                    </a:lnR>
+                    <a:lnT w="12700" cap="flat" cmpd="sng" algn="ctr">
+                      <a:solidFill>
+                        <a:srgbClr val="D1D5DB"/>
+                      </a:solidFill>
+                      <a:prstDash val="solid"/>
+                      <a:round/>
+                      <a:headEnd type="none" w="med" len="med"/>
+                      <a:tailEnd type="none" w="med" len="med"/>
+                    </a:lnT>
+                    <a:lnB w="12700" cap="flat" cmpd="sng" algn="ctr">
+                      <a:solidFill>
+                        <a:srgbClr val="D1D5DB"/>
+                      </a:solidFill>
+                      <a:prstDash val="solid"/>
+                      <a:round/>
+                      <a:headEnd type="none" w="med" len="med"/>
+                      <a:tailEnd type="none" w="med" len="med"/>
+                    </a:lnB>
+                    <a:solidFill>
+                      <a:srgbClr val="FFFFFF"/>
+                    </a:solidFill>
+                  </a:tcPr>
+                </a:tc>
+                <a:tc>
+                  <a:txBody>
+                    <a:bodyPr/>
+                    <a:lstStyle/>
+                    <a:p>
+                      <a:pPr algn="ctr" indent="0" marL="0">
+                        <a:buNone/>
+                      </a:pPr>
+                      <a:r>
+                        <a:rPr lang="en-US" sz="1400" dirty="0">
+                          <a:solidFill>
+                            <a:srgbClr val="1B1F2A"/>
+                          </a:solidFill>
+                          <a:latin typeface="Calibri" pitchFamily="34" charset="0"/>
+                          <a:ea typeface="Calibri" pitchFamily="34" charset="-122"/>
+                          <a:cs typeface="Calibri" pitchFamily="34" charset="-120"/>
+                        </a:rPr>
+                        <a:t>−0.96</a:t>
+                      </a:r>
+                      <a:endParaRPr lang="en-US" sz="1400" dirty="0">
+                        <a:latin typeface="Calibri" charset="0"/>
+                        <a:ea typeface="Calibri" charset="0"/>
+                        <a:cs typeface="Calibri" charset="0"/>
+                      </a:endParaRPr>
+                    </a:p>
+                  </a:txBody>
+                  <a:tcPr marL="91440" marR="91440" marT="45720" marB="45720" anchor="ctr">
+                    <a:lnL w="12700" cap="flat" cmpd="sng" algn="ctr">
+                      <a:solidFill>
+                        <a:srgbClr val="D1D5DB"/>
+                      </a:solidFill>
+                      <a:prstDash val="solid"/>
+                      <a:round/>
+                      <a:headEnd type="none" w="med" len="med"/>
+                      <a:tailEnd type="none" w="med" len="med"/>
+                    </a:lnL>
+                    <a:lnR w="12700" cap="flat" cmpd="sng" algn="ctr">
+                      <a:solidFill>
+                        <a:srgbClr val="D1D5DB"/>
+                      </a:solidFill>
+                      <a:prstDash val="solid"/>
+                      <a:round/>
+                      <a:headEnd type="none" w="med" len="med"/>
+                      <a:tailEnd type="none" w="med" len="med"/>
+                    </a:lnR>
+                    <a:lnT w="12700" cap="flat" cmpd="sng" algn="ctr">
+                      <a:solidFill>
+                        <a:srgbClr val="D1D5DB"/>
+                      </a:solidFill>
+                      <a:prstDash val="solid"/>
+                      <a:round/>
+                      <a:headEnd type="none" w="med" len="med"/>
+                      <a:tailEnd type="none" w="med" len="med"/>
+                    </a:lnT>
+                    <a:lnB w="12700" cap="flat" cmpd="sng" algn="ctr">
+                      <a:solidFill>
+                        <a:srgbClr val="D1D5DB"/>
+                      </a:solidFill>
+                      <a:prstDash val="solid"/>
+                      <a:round/>
+                      <a:headEnd type="none" w="med" len="med"/>
+                      <a:tailEnd type="none" w="med" len="med"/>
+                    </a:lnB>
+                    <a:solidFill>
+                      <a:srgbClr val="FFFFFF"/>
+                    </a:solidFill>
+                  </a:tcPr>
+                </a:tc>
+              </a:tr>
+              <a:tr h="566928">
+                <a:tc>
+                  <a:txBody>
+                    <a:bodyPr/>
+                    <a:lstStyle/>
+                    <a:p>
+                      <a:pPr algn="ctr" indent="0" marL="0">
+                        <a:buNone/>
+                      </a:pPr>
+                      <a:r>
+                        <a:rPr lang="en-US" sz="1400" b="1" dirty="0">
+                          <a:solidFill>
+                            <a:srgbClr val="1B1F2A"/>
+                          </a:solidFill>
+                          <a:latin typeface="Calibri" pitchFamily="34" charset="0"/>
+                          <a:ea typeface="Calibri" pitchFamily="34" charset="-122"/>
+                          <a:cs typeface="Calibri" pitchFamily="34" charset="-120"/>
+                        </a:rPr>
+                        <a:t>Quoted spread</a:t>
+                      </a:r>
+                      <a:endParaRPr lang="en-US" sz="1400" dirty="0">
+                        <a:latin typeface="Calibri" charset="0"/>
+                        <a:ea typeface="Calibri" charset="0"/>
+                        <a:cs typeface="Calibri" charset="0"/>
+                      </a:endParaRPr>
+                    </a:p>
+                  </a:txBody>
+                  <a:tcPr marL="91440" marR="91440" marT="45720" marB="45720" anchor="ctr">
+                    <a:lnL w="12700" cap="flat" cmpd="sng" algn="ctr">
+                      <a:solidFill>
+                        <a:srgbClr val="D1D5DB"/>
+                      </a:solidFill>
+                      <a:prstDash val="solid"/>
+                      <a:round/>
+                      <a:headEnd type="none" w="med" len="med"/>
+                      <a:tailEnd type="none" w="med" len="med"/>
+                    </a:lnL>
+                    <a:lnR w="12700" cap="flat" cmpd="sng" algn="ctr">
+                      <a:solidFill>
+                        <a:srgbClr val="D1D5DB"/>
+                      </a:solidFill>
+                      <a:prstDash val="solid"/>
+                      <a:round/>
+                      <a:headEnd type="none" w="med" len="med"/>
+                      <a:tailEnd type="none" w="med" len="med"/>
+                    </a:lnR>
+                    <a:lnT w="12700" cap="flat" cmpd="sng" algn="ctr">
+                      <a:solidFill>
+                        <a:srgbClr val="D1D5DB"/>
+                      </a:solidFill>
+                      <a:prstDash val="solid"/>
+                      <a:round/>
+                      <a:headEnd type="none" w="med" len="med"/>
+                      <a:tailEnd type="none" w="med" len="med"/>
+                    </a:lnT>
+                    <a:lnB w="12700" cap="flat" cmpd="sng" algn="ctr">
+                      <a:solidFill>
+                        <a:srgbClr val="D1D5DB"/>
+                      </a:solidFill>
+                      <a:prstDash val="solid"/>
+                      <a:round/>
+                      <a:headEnd type="none" w="med" len="med"/>
+                      <a:tailEnd type="none" w="med" len="med"/>
+                    </a:lnB>
+                    <a:solidFill>
+                      <a:srgbClr val="FFFFFF"/>
+                    </a:solidFill>
+                  </a:tcPr>
+                </a:tc>
+                <a:tc>
+                  <a:txBody>
+                    <a:bodyPr/>
+                    <a:lstStyle/>
+                    <a:p>
+                      <a:pPr algn="ctr" indent="0" marL="0">
+                        <a:buNone/>
+                      </a:pPr>
+                      <a:r>
+                        <a:rPr lang="en-US" sz="1400" dirty="0">
+                          <a:solidFill>
+                            <a:srgbClr val="1B1F2A"/>
+                          </a:solidFill>
+                          <a:latin typeface="Calibri" pitchFamily="34" charset="0"/>
+                          <a:ea typeface="Calibri" pitchFamily="34" charset="-122"/>
+                          <a:cs typeface="Calibri" pitchFamily="34" charset="-120"/>
+                        </a:rPr>
+                        <a:t>0.011**</a:t>
+                      </a:r>
+                      <a:endParaRPr lang="en-US" sz="1400" dirty="0">
+                        <a:latin typeface="Calibri" charset="0"/>
+                        <a:ea typeface="Calibri" charset="0"/>
+                        <a:cs typeface="Calibri" charset="0"/>
+                      </a:endParaRPr>
+                    </a:p>
+                  </a:txBody>
+                  <a:tcPr marL="91440" marR="91440" marT="45720" marB="45720" anchor="ctr">
+                    <a:lnL w="12700" cap="flat" cmpd="sng" algn="ctr">
+                      <a:solidFill>
+                        <a:srgbClr val="D1D5DB"/>
+                      </a:solidFill>
+                      <a:prstDash val="solid"/>
+                      <a:round/>
+                      <a:headEnd type="none" w="med" len="med"/>
+                      <a:tailEnd type="none" w="med" len="med"/>
+                    </a:lnL>
+                    <a:lnR w="12700" cap="flat" cmpd="sng" algn="ctr">
+                      <a:solidFill>
+                        <a:srgbClr val="D1D5DB"/>
+                      </a:solidFill>
+                      <a:prstDash val="solid"/>
+                      <a:round/>
+                      <a:headEnd type="none" w="med" len="med"/>
+                      <a:tailEnd type="none" w="med" len="med"/>
+                    </a:lnR>
+                    <a:lnT w="12700" cap="flat" cmpd="sng" algn="ctr">
+                      <a:solidFill>
+                        <a:srgbClr val="D1D5DB"/>
+                      </a:solidFill>
+                      <a:prstDash val="solid"/>
+                      <a:round/>
+                      <a:headEnd type="none" w="med" len="med"/>
+                      <a:tailEnd type="none" w="med" len="med"/>
+                    </a:lnT>
+                    <a:lnB w="12700" cap="flat" cmpd="sng" algn="ctr">
+                      <a:solidFill>
+                        <a:srgbClr val="D1D5DB"/>
+                      </a:solidFill>
+                      <a:prstDash val="solid"/>
+                      <a:round/>
+                      <a:headEnd type="none" w="med" len="med"/>
+                      <a:tailEnd type="none" w="med" len="med"/>
+                    </a:lnB>
+                    <a:solidFill>
+                      <a:srgbClr val="EEF2F8"/>
+                    </a:solidFill>
+                  </a:tcPr>
+                </a:tc>
+                <a:tc>
+                  <a:txBody>
+                    <a:bodyPr/>
+                    <a:lstStyle/>
+                    <a:p>
+                      <a:pPr algn="ctr" indent="0" marL="0">
+                        <a:buNone/>
+                      </a:pPr>
+                      <a:r>
+                        <a:rPr lang="en-US" sz="1400" dirty="0">
+                          <a:solidFill>
+                            <a:srgbClr val="1B1F2A"/>
+                          </a:solidFill>
+                          <a:latin typeface="Calibri" pitchFamily="34" charset="0"/>
+                          <a:ea typeface="Calibri" pitchFamily="34" charset="-122"/>
+                          <a:cs typeface="Calibri" pitchFamily="34" charset="-120"/>
+                        </a:rPr>
+                        <a:t>−0.010 (−0.5)</a:t>
+                      </a:r>
+                      <a:endParaRPr lang="en-US" sz="1400" dirty="0">
+                        <a:latin typeface="Calibri" charset="0"/>
+                        <a:ea typeface="Calibri" charset="0"/>
+                        <a:cs typeface="Calibri" charset="0"/>
+                      </a:endParaRPr>
+                    </a:p>
+                  </a:txBody>
+                  <a:tcPr marL="91440" marR="91440" marT="45720" marB="45720" anchor="ctr">
+                    <a:lnL w="12700" cap="flat" cmpd="sng" algn="ctr">
+                      <a:solidFill>
+                        <a:srgbClr val="D1D5DB"/>
+                      </a:solidFill>
+                      <a:prstDash val="solid"/>
+                      <a:round/>
+                      <a:headEnd type="none" w="med" len="med"/>
+                      <a:tailEnd type="none" w="med" len="med"/>
+                    </a:lnL>
+                    <a:lnR w="12700" cap="flat" cmpd="sng" algn="ctr">
+                      <a:solidFill>
+                        <a:srgbClr val="D1D5DB"/>
+                      </a:solidFill>
+                      <a:prstDash val="solid"/>
+                      <a:round/>
+                      <a:headEnd type="none" w="med" len="med"/>
+                      <a:tailEnd type="none" w="med" len="med"/>
+                    </a:lnR>
+                    <a:lnT w="12700" cap="flat" cmpd="sng" algn="ctr">
+                      <a:solidFill>
+                        <a:srgbClr val="D1D5DB"/>
+                      </a:solidFill>
+                      <a:prstDash val="solid"/>
+                      <a:round/>
+                      <a:headEnd type="none" w="med" len="med"/>
+                      <a:tailEnd type="none" w="med" len="med"/>
+                    </a:lnT>
+                    <a:lnB w="12700" cap="flat" cmpd="sng" algn="ctr">
+                      <a:solidFill>
+                        <a:srgbClr val="D1D5DB"/>
+                      </a:solidFill>
+                      <a:prstDash val="solid"/>
+                      <a:round/>
+                      <a:headEnd type="none" w="med" len="med"/>
+                      <a:tailEnd type="none" w="med" len="med"/>
+                    </a:lnB>
+                    <a:solidFill>
+                      <a:srgbClr val="FFFFFF"/>
+                    </a:solidFill>
+                  </a:tcPr>
+                </a:tc>
+                <a:tc>
+                  <a:txBody>
+                    <a:bodyPr/>
+                    <a:lstStyle/>
+                    <a:p>
+                      <a:pPr algn="ctr" indent="0" marL="0">
+                        <a:buNone/>
+                      </a:pPr>
+                      <a:r>
+                        <a:rPr lang="en-US" sz="1400" dirty="0">
+                          <a:solidFill>
+                            <a:srgbClr val="1B1F2A"/>
+                          </a:solidFill>
+                          <a:latin typeface="Calibri" pitchFamily="34" charset="0"/>
+                          <a:ea typeface="Calibri" pitchFamily="34" charset="-122"/>
+                          <a:cs typeface="Calibri" pitchFamily="34" charset="-120"/>
+                        </a:rPr>
+                        <a:t>0.008 (0.8)</a:t>
+                      </a:r>
+                      <a:endParaRPr lang="en-US" sz="1400" dirty="0">
+                        <a:latin typeface="Calibri" charset="0"/>
+                        <a:ea typeface="Calibri" charset="0"/>
+                        <a:cs typeface="Calibri" charset="0"/>
+                      </a:endParaRPr>
+                    </a:p>
+                  </a:txBody>
+                  <a:tcPr marL="91440" marR="91440" marT="45720" marB="45720" anchor="ctr">
+                    <a:lnL w="12700" cap="flat" cmpd="sng" algn="ctr">
+                      <a:solidFill>
+                        <a:srgbClr val="D1D5DB"/>
+                      </a:solidFill>
+                      <a:prstDash val="solid"/>
+                      <a:round/>
+                      <a:headEnd type="none" w="med" len="med"/>
+                      <a:tailEnd type="none" w="med" len="med"/>
+                    </a:lnL>
+                    <a:lnR w="12700" cap="flat" cmpd="sng" algn="ctr">
+                      <a:solidFill>
+                        <a:srgbClr val="D1D5DB"/>
+                      </a:solidFill>
+                      <a:prstDash val="solid"/>
+                      <a:round/>
+                      <a:headEnd type="none" w="med" len="med"/>
+                      <a:tailEnd type="none" w="med" len="med"/>
+                    </a:lnR>
+                    <a:lnT w="12700" cap="flat" cmpd="sng" algn="ctr">
+                      <a:solidFill>
+                        <a:srgbClr val="D1D5DB"/>
+                      </a:solidFill>
+                      <a:prstDash val="solid"/>
+                      <a:round/>
+                      <a:headEnd type="none" w="med" len="med"/>
+                      <a:tailEnd type="none" w="med" len="med"/>
+                    </a:lnT>
+                    <a:lnB w="12700" cap="flat" cmpd="sng" algn="ctr">
+                      <a:solidFill>
+                        <a:srgbClr val="D1D5DB"/>
+                      </a:solidFill>
+                      <a:prstDash val="solid"/>
+                      <a:round/>
+                      <a:headEnd type="none" w="med" len="med"/>
+                      <a:tailEnd type="none" w="med" len="med"/>
+                    </a:lnB>
+                    <a:solidFill>
+                      <a:srgbClr val="FFFFFF"/>
+                    </a:solidFill>
+                  </a:tcPr>
+                </a:tc>
+                <a:tc>
+                  <a:txBody>
+                    <a:bodyPr/>
+                    <a:lstStyle/>
+                    <a:p>
+                      <a:pPr algn="ctr" indent="0" marL="0">
+                        <a:buNone/>
+                      </a:pPr>
+                      <a:r>
+                        <a:rPr lang="en-US" sz="1400" dirty="0">
+                          <a:solidFill>
+                            <a:srgbClr val="1B1F2A"/>
+                          </a:solidFill>
+                          <a:latin typeface="Calibri" pitchFamily="34" charset="0"/>
+                          <a:ea typeface="Calibri" pitchFamily="34" charset="-122"/>
+                          <a:cs typeface="Calibri" pitchFamily="34" charset="-120"/>
+                        </a:rPr>
+                        <a:t>−0.83</a:t>
+                      </a:r>
+                      <a:endParaRPr lang="en-US" sz="1400" dirty="0">
+                        <a:latin typeface="Calibri" charset="0"/>
+                        <a:ea typeface="Calibri" charset="0"/>
+                        <a:cs typeface="Calibri" charset="0"/>
+                      </a:endParaRPr>
+                    </a:p>
+                  </a:txBody>
+                  <a:tcPr marL="91440" marR="91440" marT="45720" marB="45720" anchor="ctr">
+                    <a:lnL w="12700" cap="flat" cmpd="sng" algn="ctr">
+                      <a:solidFill>
+                        <a:srgbClr val="D1D5DB"/>
+                      </a:solidFill>
+                      <a:prstDash val="solid"/>
+                      <a:round/>
+                      <a:headEnd type="none" w="med" len="med"/>
+                      <a:tailEnd type="none" w="med" len="med"/>
+                    </a:lnL>
+                    <a:lnR w="12700" cap="flat" cmpd="sng" algn="ctr">
+                      <a:solidFill>
+                        <a:srgbClr val="D1D5DB"/>
+                      </a:solidFill>
+                      <a:prstDash val="solid"/>
+                      <a:round/>
+                      <a:headEnd type="none" w="med" len="med"/>
+                      <a:tailEnd type="none" w="med" len="med"/>
+                    </a:lnR>
+                    <a:lnT w="12700" cap="flat" cmpd="sng" algn="ctr">
+                      <a:solidFill>
+                        <a:srgbClr val="D1D5DB"/>
+                      </a:solidFill>
+                      <a:prstDash val="solid"/>
+                      <a:round/>
+                      <a:headEnd type="none" w="med" len="med"/>
+                      <a:tailEnd type="none" w="med" len="med"/>
+                    </a:lnT>
+                    <a:lnB w="12700" cap="flat" cmpd="sng" algn="ctr">
+                      <a:solidFill>
+                        <a:srgbClr val="D1D5DB"/>
+                      </a:solidFill>
+                      <a:prstDash val="solid"/>
+                      <a:round/>
+                      <a:headEnd type="none" w="med" len="med"/>
+                      <a:tailEnd type="none" w="med" len="med"/>
+                    </a:lnB>
+                    <a:solidFill>
+                      <a:srgbClr val="FFFFFF"/>
+                    </a:solidFill>
+                  </a:tcPr>
+                </a:tc>
+              </a:tr>
+              <a:tr h="566928">
+                <a:tc>
+                  <a:txBody>
+                    <a:bodyPr/>
+                    <a:lstStyle/>
+                    <a:p>
+                      <a:pPr algn="ctr" indent="0" marL="0">
+                        <a:buNone/>
+                      </a:pPr>
+                      <a:r>
+                        <a:rPr lang="en-US" sz="1400" b="1" dirty="0">
+                          <a:solidFill>
+                            <a:srgbClr val="1B1F2A"/>
+                          </a:solidFill>
+                          <a:latin typeface="Calibri" pitchFamily="34" charset="0"/>
+                          <a:ea typeface="Calibri" pitchFamily="34" charset="-122"/>
+                          <a:cs typeface="Calibri" pitchFamily="34" charset="-120"/>
+                        </a:rPr>
+                        <a:t>Depth / Illiquidity*</a:t>
+                      </a:r>
+                      <a:endParaRPr lang="en-US" sz="1400" dirty="0">
+                        <a:latin typeface="Calibri" charset="0"/>
+                        <a:ea typeface="Calibri" charset="0"/>
+                        <a:cs typeface="Calibri" charset="0"/>
+                      </a:endParaRPr>
+                    </a:p>
+                  </a:txBody>
+                  <a:tcPr marL="91440" marR="91440" marT="45720" marB="45720" anchor="ctr">
+                    <a:lnL w="12700" cap="flat" cmpd="sng" algn="ctr">
+                      <a:solidFill>
+                        <a:srgbClr val="D1D5DB"/>
+                      </a:solidFill>
+                      <a:prstDash val="solid"/>
+                      <a:round/>
+                      <a:headEnd type="none" w="med" len="med"/>
+                      <a:tailEnd type="none" w="med" len="med"/>
+                    </a:lnL>
+                    <a:lnR w="12700" cap="flat" cmpd="sng" algn="ctr">
+                      <a:solidFill>
+                        <a:srgbClr val="D1D5DB"/>
+                      </a:solidFill>
+                      <a:prstDash val="solid"/>
+                      <a:round/>
+                      <a:headEnd type="none" w="med" len="med"/>
+                      <a:tailEnd type="none" w="med" len="med"/>
+                    </a:lnR>
+                    <a:lnT w="12700" cap="flat" cmpd="sng" algn="ctr">
+                      <a:solidFill>
+                        <a:srgbClr val="D1D5DB"/>
+                      </a:solidFill>
+                      <a:prstDash val="solid"/>
+                      <a:round/>
+                      <a:headEnd type="none" w="med" len="med"/>
+                      <a:tailEnd type="none" w="med" len="med"/>
+                    </a:lnT>
+                    <a:lnB w="12700" cap="flat" cmpd="sng" algn="ctr">
+                      <a:solidFill>
+                        <a:srgbClr val="D1D5DB"/>
+                      </a:solidFill>
+                      <a:prstDash val="solid"/>
+                      <a:round/>
+                      <a:headEnd type="none" w="med" len="med"/>
+                      <a:tailEnd type="none" w="med" len="med"/>
+                    </a:lnB>
+                    <a:solidFill>
+                      <a:srgbClr val="FFFFFF"/>
+                    </a:solidFill>
+                  </a:tcPr>
+                </a:tc>
+                <a:tc>
+                  <a:txBody>
+                    <a:bodyPr/>
+                    <a:lstStyle/>
+                    <a:p>
+                      <a:pPr algn="ctr" indent="0" marL="0">
+                        <a:buNone/>
+                      </a:pPr>
+                      <a:r>
+                        <a:rPr lang="en-US" sz="1400" dirty="0">
+                          <a:solidFill>
+                            <a:srgbClr val="1B1F2A"/>
+                          </a:solidFill>
+                          <a:latin typeface="Calibri" pitchFamily="34" charset="0"/>
+                          <a:ea typeface="Calibri" pitchFamily="34" charset="-122"/>
+                          <a:cs typeface="Calibri" pitchFamily="34" charset="-120"/>
+                        </a:rPr>
+                        <a:t>−0.943***</a:t>
+                      </a:r>
+                      <a:endParaRPr lang="en-US" sz="1400" dirty="0">
+                        <a:latin typeface="Calibri" charset="0"/>
+                        <a:ea typeface="Calibri" charset="0"/>
+                        <a:cs typeface="Calibri" charset="0"/>
+                      </a:endParaRPr>
+                    </a:p>
+                  </a:txBody>
+                  <a:tcPr marL="91440" marR="91440" marT="45720" marB="45720" anchor="ctr">
+                    <a:lnL w="12700" cap="flat" cmpd="sng" algn="ctr">
+                      <a:solidFill>
+                        <a:srgbClr val="D1D5DB"/>
+                      </a:solidFill>
+                      <a:prstDash val="solid"/>
+                      <a:round/>
+                      <a:headEnd type="none" w="med" len="med"/>
+                      <a:tailEnd type="none" w="med" len="med"/>
+                    </a:lnL>
+                    <a:lnR w="12700" cap="flat" cmpd="sng" algn="ctr">
+                      <a:solidFill>
+                        <a:srgbClr val="D1D5DB"/>
+                      </a:solidFill>
+                      <a:prstDash val="solid"/>
+                      <a:round/>
+                      <a:headEnd type="none" w="med" len="med"/>
+                      <a:tailEnd type="none" w="med" len="med"/>
+                    </a:lnR>
+                    <a:lnT w="12700" cap="flat" cmpd="sng" algn="ctr">
+                      <a:solidFill>
+                        <a:srgbClr val="D1D5DB"/>
+                      </a:solidFill>
+                      <a:prstDash val="solid"/>
+                      <a:round/>
+                      <a:headEnd type="none" w="med" len="med"/>
+                      <a:tailEnd type="none" w="med" len="med"/>
+                    </a:lnT>
+                    <a:lnB w="12700" cap="flat" cmpd="sng" algn="ctr">
+                      <a:solidFill>
+                        <a:srgbClr val="D1D5DB"/>
+                      </a:solidFill>
+                      <a:prstDash val="solid"/>
+                      <a:round/>
+                      <a:headEnd type="none" w="med" len="med"/>
+                      <a:tailEnd type="none" w="med" len="med"/>
+                    </a:lnB>
+                    <a:solidFill>
+                      <a:srgbClr val="EEF2F8"/>
+                    </a:solidFill>
+                  </a:tcPr>
+                </a:tc>
+                <a:tc>
+                  <a:txBody>
+                    <a:bodyPr/>
+                    <a:lstStyle/>
+                    <a:p>
+                      <a:pPr algn="ctr" indent="0" marL="0">
+                        <a:buNone/>
+                      </a:pPr>
+                      <a:r>
+                        <a:rPr lang="en-US" sz="1400" dirty="0">
+                          <a:solidFill>
+                            <a:srgbClr val="1B1F2A"/>
+                          </a:solidFill>
+                          <a:latin typeface="Calibri" pitchFamily="34" charset="0"/>
+                          <a:ea typeface="Calibri" pitchFamily="34" charset="-122"/>
+                          <a:cs typeface="Calibri" pitchFamily="34" charset="-120"/>
+                        </a:rPr>
+                        <a:t>−3.69 (−2.1)</a:t>
+                      </a:r>
+                      <a:endParaRPr lang="en-US" sz="1400" dirty="0">
+                        <a:latin typeface="Calibri" charset="0"/>
+                        <a:ea typeface="Calibri" charset="0"/>
+                        <a:cs typeface="Calibri" charset="0"/>
+                      </a:endParaRPr>
+                    </a:p>
+                  </a:txBody>
+                  <a:tcPr marL="91440" marR="91440" marT="45720" marB="45720" anchor="ctr">
+                    <a:lnL w="12700" cap="flat" cmpd="sng" algn="ctr">
+                      <a:solidFill>
+                        <a:srgbClr val="D1D5DB"/>
+                      </a:solidFill>
+                      <a:prstDash val="solid"/>
+                      <a:round/>
+                      <a:headEnd type="none" w="med" len="med"/>
+                      <a:tailEnd type="none" w="med" len="med"/>
+                    </a:lnL>
+                    <a:lnR w="12700" cap="flat" cmpd="sng" algn="ctr">
+                      <a:solidFill>
+                        <a:srgbClr val="D1D5DB"/>
+                      </a:solidFill>
+                      <a:prstDash val="solid"/>
+                      <a:round/>
+                      <a:headEnd type="none" w="med" len="med"/>
+                      <a:tailEnd type="none" w="med" len="med"/>
+                    </a:lnR>
+                    <a:lnT w="12700" cap="flat" cmpd="sng" algn="ctr">
+                      <a:solidFill>
+                        <a:srgbClr val="D1D5DB"/>
+                      </a:solidFill>
+                      <a:prstDash val="solid"/>
+                      <a:round/>
+                      <a:headEnd type="none" w="med" len="med"/>
+                      <a:tailEnd type="none" w="med" len="med"/>
+                    </a:lnT>
+                    <a:lnB w="12700" cap="flat" cmpd="sng" algn="ctr">
+                      <a:solidFill>
+                        <a:srgbClr val="D1D5DB"/>
+                      </a:solidFill>
+                      <a:prstDash val="solid"/>
+                      <a:round/>
+                      <a:headEnd type="none" w="med" len="med"/>
+                      <a:tailEnd type="none" w="med" len="med"/>
+                    </a:lnB>
+                    <a:solidFill>
+                      <a:srgbClr val="FFFFFF"/>
+                    </a:solidFill>
+                  </a:tcPr>
+                </a:tc>
+                <a:tc>
+                  <a:txBody>
+                    <a:bodyPr/>
+                    <a:lstStyle/>
+                    <a:p>
+                      <a:pPr algn="ctr" indent="0" marL="0">
+                        <a:buNone/>
+                      </a:pPr>
+                      <a:r>
+                        <a:rPr lang="en-US" sz="1400" dirty="0">
+                          <a:solidFill>
+                            <a:srgbClr val="1B1F2A"/>
+                          </a:solidFill>
+                          <a:latin typeface="Calibri" pitchFamily="34" charset="0"/>
+                          <a:ea typeface="Calibri" pitchFamily="34" charset="-122"/>
+                          <a:cs typeface="Calibri" pitchFamily="34" charset="-120"/>
+                        </a:rPr>
+                        <a:t>−3.08 (−2.3)</a:t>
+                      </a:r>
+                      <a:endParaRPr lang="en-US" sz="1400" dirty="0">
+                        <a:latin typeface="Calibri" charset="0"/>
+                        <a:ea typeface="Calibri" charset="0"/>
+                        <a:cs typeface="Calibri" charset="0"/>
+                      </a:endParaRPr>
+                    </a:p>
+                  </a:txBody>
+                  <a:tcPr marL="91440" marR="91440" marT="45720" marB="45720" anchor="ctr">
+                    <a:lnL w="12700" cap="flat" cmpd="sng" algn="ctr">
+                      <a:solidFill>
+                        <a:srgbClr val="D1D5DB"/>
+                      </a:solidFill>
+                      <a:prstDash val="solid"/>
+                      <a:round/>
+                      <a:headEnd type="none" w="med" len="med"/>
+                      <a:tailEnd type="none" w="med" len="med"/>
+                    </a:lnL>
+                    <a:lnR w="12700" cap="flat" cmpd="sng" algn="ctr">
+                      <a:solidFill>
+                        <a:srgbClr val="D1D5DB"/>
+                      </a:solidFill>
+                      <a:prstDash val="solid"/>
+                      <a:round/>
+                      <a:headEnd type="none" w="med" len="med"/>
+                      <a:tailEnd type="none" w="med" len="med"/>
+                    </a:lnR>
+                    <a:lnT w="12700" cap="flat" cmpd="sng" algn="ctr">
+                      <a:solidFill>
+                        <a:srgbClr val="D1D5DB"/>
+                      </a:solidFill>
+                      <a:prstDash val="solid"/>
+                      <a:round/>
+                      <a:headEnd type="none" w="med" len="med"/>
+                      <a:tailEnd type="none" w="med" len="med"/>
+                    </a:lnT>
+                    <a:lnB w="12700" cap="flat" cmpd="sng" algn="ctr">
+                      <a:solidFill>
+                        <a:srgbClr val="D1D5DB"/>
+                      </a:solidFill>
+                      <a:prstDash val="solid"/>
+                      <a:round/>
+                      <a:headEnd type="none" w="med" len="med"/>
+                      <a:tailEnd type="none" w="med" len="med"/>
+                    </a:lnB>
+                    <a:solidFill>
+                      <a:srgbClr val="FFFFFF"/>
+                    </a:solidFill>
+                  </a:tcPr>
+                </a:tc>
+                <a:tc>
+                  <a:txBody>
+                    <a:bodyPr/>
+                    <a:lstStyle/>
+                    <a:p>
+                      <a:pPr algn="ctr" indent="0" marL="0">
+                        <a:buNone/>
+                      </a:pPr>
+                      <a:r>
+                        <a:rPr lang="en-US" sz="1400" dirty="0">
+                          <a:solidFill>
+                            <a:srgbClr val="1B1F2A"/>
+                          </a:solidFill>
+                          <a:latin typeface="Calibri" pitchFamily="34" charset="0"/>
+                          <a:ea typeface="Calibri" pitchFamily="34" charset="-122"/>
+                          <a:cs typeface="Calibri" pitchFamily="34" charset="-120"/>
+                        </a:rPr>
+                        <a:t>−0.28</a:t>
+                      </a:r>
+                      <a:endParaRPr lang="en-US" sz="1400" dirty="0">
+                        <a:latin typeface="Calibri" charset="0"/>
+                        <a:ea typeface="Calibri" charset="0"/>
+                        <a:cs typeface="Calibri" charset="0"/>
+                      </a:endParaRPr>
+                    </a:p>
+                  </a:txBody>
+                  <a:tcPr marL="91440" marR="91440" marT="45720" marB="45720" anchor="ctr">
+                    <a:lnL w="12700" cap="flat" cmpd="sng" algn="ctr">
+                      <a:solidFill>
+                        <a:srgbClr val="D1D5DB"/>
+                      </a:solidFill>
+                      <a:prstDash val="solid"/>
+                      <a:round/>
+                      <a:headEnd type="none" w="med" len="med"/>
+                      <a:tailEnd type="none" w="med" len="med"/>
+                    </a:lnL>
+                    <a:lnR w="12700" cap="flat" cmpd="sng" algn="ctr">
+                      <a:solidFill>
+                        <a:srgbClr val="D1D5DB"/>
+                      </a:solidFill>
+                      <a:prstDash val="solid"/>
+                      <a:round/>
+                      <a:headEnd type="none" w="med" len="med"/>
+                      <a:tailEnd type="none" w="med" len="med"/>
+                    </a:lnR>
+                    <a:lnT w="12700" cap="flat" cmpd="sng" algn="ctr">
+                      <a:solidFill>
+                        <a:srgbClr val="D1D5DB"/>
+                      </a:solidFill>
+                      <a:prstDash val="solid"/>
+                      <a:round/>
+                      <a:headEnd type="none" w="med" len="med"/>
+                      <a:tailEnd type="none" w="med" len="med"/>
+                    </a:lnT>
+                    <a:lnB w="12700" cap="flat" cmpd="sng" algn="ctr">
+                      <a:solidFill>
+                        <a:srgbClr val="D1D5DB"/>
+                      </a:solidFill>
+                      <a:prstDash val="solid"/>
+                      <a:round/>
+                      <a:headEnd type="none" w="med" len="med"/>
+                      <a:tailEnd type="none" w="med" len="med"/>
+                    </a:lnB>
+                    <a:solidFill>
+                      <a:srgbClr val="FFFFFF"/>
+                    </a:solidFill>
+                  </a:tcPr>
+                </a:tc>
+              </a:tr>
+            </a:tbl>
+          </a:graphicData>
+        </a:graphic>
+      </p:graphicFrame>
+      <p:sp>
+        <p:nvSpPr>
+          <p:cNvPr id="4" name="Caption"/>
+          <p:cNvSpPr txBox="1"/>
+          <p:nvPr/>
+        </p:nvSpPr>
+        <p:spPr>
+          <a:xfrm>
+            <a:off x="548640" y="4343400"/>
+            <a:ext cx="7223760" cy="548640"/>
+          </a:xfrm>
+          <a:prstGeom prst="rect">
+            <a:avLst/>
+          </a:prstGeom>
+          <a:noFill/>
+          <a:ln/>
+        </p:spPr>
+        <p:txBody>
+          <a:bodyPr wrap="square" lIns="0" tIns="0" rIns="0" bIns="0" rtlCol="0" anchor="ctr"/>
+          <a:lstStyle/>
+          <a:p>
+            <a:pPr indent="0" marL="0">
+              <a:buNone/>
+            </a:pPr>
+            <a:r>
+              <a:rPr lang="en-US" sz="1100" i="1" dirty="0">
+                <a:solidFill>
+                  <a:srgbClr val="6B7280"/>
+                </a:solidFill>
+              </a:rPr>
+              <a:t>Sep 2010 – Sep 2016 · 469 stocks · 355 BoJ purchase days · stock &amp; day FE · double-clustered SEs. *Ours uses Amihud illiquidity in place of depth (opposite expected sign).</a:t>
+            </a:r>
+            <a:endParaRPr lang="en-US" sz="1100" dirty="0"/>
+          </a:p>
+        </p:txBody>
+      </p:sp>
+      <p:sp>
+        <p:nvSpPr>
+          <p:cNvPr id="5" name="Real data I reading card"/>
           <p:cNvSpPr/>
           <p:nvPr/>
         </p:nvSpPr>
         <p:spPr>
           <a:xfrm>
-            <a:off x="548640" y="1371600"/>
-            <a:ext cx="3502152" cy="2194560"/>
+            <a:off x="8092440" y="1371600"/>
+            <a:ext cx="3547872" cy="4663440"/>
           </a:xfrm>
           <a:prstGeom prst="roundRect">
             <a:avLst>
-              <a:gd name="adj" fmla="val 5000"/>
+              <a:gd name="adj" fmla="val 3093"/>
             </a:avLst>
           </a:prstGeom>
           <a:solidFill>
@@ -7124,63 +9445,14 @@
       </p:sp>
       <p:sp>
         <p:nvSpPr>
-          <p:cNvPr id="4" name="Critique 1 circle"/>
-          <p:cNvSpPr/>
-          <p:nvPr/>
-        </p:nvSpPr>
-        <p:spPr>
-          <a:xfrm>
-            <a:off x="777240" y="1600200"/>
-            <a:ext cx="548640" cy="548640"/>
-          </a:xfrm>
-          <a:prstGeom prst="ellipse">
-            <a:avLst/>
-          </a:prstGeom>
-          <a:solidFill>
-            <a:schemeClr val="accent2"/>
-          </a:solidFill>
-          <a:ln w="12700">
-            <a:solidFill>
-              <a:schemeClr val="accent2"/>
-            </a:solidFill>
-            <a:prstDash val="solid"/>
-          </a:ln>
-        </p:spPr>
-      </p:sp>
-      <p:pic>
-        <p:nvPicPr>
-          <p:cNvPr id="5" name="Critique 1 icon" descr="preencoded.png">    </p:cNvPr>
-          <p:cNvPicPr>
-            <a:picLocks noChangeAspect="1"/>
-          </p:cNvPicPr>
-          <p:nvPr/>
-        </p:nvPicPr>
-        <p:blipFill>
-          <a:blip r:embed="rId1"/>
-          <a:stretch>
-            <a:fillRect/>
-          </a:stretch>
-        </p:blipFill>
-        <p:spPr>
-          <a:xfrm>
-            <a:off x="908914" y="1731874"/>
-            <a:ext cx="285293" cy="285293"/>
-          </a:xfrm>
-          <a:prstGeom prst="rect">
-            <a:avLst/>
-          </a:prstGeom>
-        </p:spPr>
-      </p:pic>
-      <p:sp>
-        <p:nvSpPr>
           <p:cNvPr id="6" name="Text 3"/>
           <p:cNvSpPr txBox="1"/>
           <p:nvPr/>
         </p:nvSpPr>
         <p:spPr>
           <a:xfrm>
-            <a:off x="1463040" y="1600200"/>
-            <a:ext cx="2404872" cy="548640"/>
+            <a:off x="8321040" y="1554480"/>
+            <a:ext cx="3108960" cy="4343400"/>
           </a:xfrm>
           <a:prstGeom prst="rect">
             <a:avLst/>
@@ -7189,21 +9461,113 @@
           <a:ln/>
         </p:spPr>
         <p:txBody>
-          <a:bodyPr wrap="square" lIns="0" tIns="0" rIns="0" bIns="0" rtlCol="0" anchor="ctr"/>
+          <a:bodyPr wrap="square" lIns="0" tIns="0" rIns="0" bIns="0" rtlCol="0" anchor="t"/>
           <a:lstStyle/>
           <a:p>
             <a:pPr indent="0" marL="0">
               <a:buNone/>
             </a:pPr>
             <a:r>
-              <a:rPr lang="en-US" sz="1700" b="1" dirty="0">
-                <a:solidFill>
-                  <a:schemeClr val="tx2"/>
-                </a:solidFill>
-              </a:rPr>
-              <a:t>Narrow French sample</a:t>
-            </a:r>
-            <a:endParaRPr lang="en-US" sz="1700" dirty="0"/>
+              <a:rPr lang="en-US" sz="1800" b="1" dirty="0">
+                <a:solidFill>
+                  <a:srgbClr val="14213D"/>
+                </a:solidFill>
+              </a:rPr>
+              <a:t>What we find</a:t>
+            </a:r>
+            <a:endParaRPr lang="en-US" sz="1400" dirty="0"/>
+          </a:p>
+          <a:p>
+            <a:pPr indent="0" marL="0">
+              <a:buNone/>
+            </a:pPr>
+            <a:r>
+              <a:rPr lang="en-US" sz="1400" dirty="0">
+                <a:solidFill>
+                  <a:schemeClr val="tx1"/>
+                </a:solidFill>
+              </a:rPr>
+              <a:t>No outcome reacts to BoJ-driven buying, and no Z-test separates purchase days from placebo days.</a:t>
+            </a:r>
+            <a:endParaRPr lang="en-US" sz="1400" dirty="0"/>
+          </a:p>
+          <a:p>
+            <a:pPr indent="0" marL="0">
+              <a:buNone/>
+            </a:pPr>
+            <a:r>
+              <a:rPr lang="en-US" sz="600" dirty="0">
+                <a:solidFill>
+                  <a:schemeClr val="tx1"/>
+                </a:solidFill>
+              </a:rPr>
+              <a:t> </a:t>
+            </a:r>
+            <a:endParaRPr lang="en-US" sz="1400" dirty="0"/>
+          </a:p>
+          <a:p>
+            <a:pPr indent="0" marL="0">
+              <a:buNone/>
+            </a:pPr>
+            <a:r>
+              <a:rPr lang="en-US" sz="1400" b="1" dirty="0">
+                <a:solidFill>
+                  <a:schemeClr val="tx1"/>
+                </a:solidFill>
+              </a:rPr>
+              <a:t>No dose–response: </a:t>
+            </a:r>
+            <a:pPr indent="0" marL="0">
+              <a:buNone/>
+            </a:pPr>
+            <a:r>
+              <a:rPr lang="en-US" sz="1400" dirty="0">
+                <a:solidFill>
+                  <a:schemeClr val="tx1"/>
+                </a:solidFill>
+              </a:rPr>
+              <a:t>effects are no larger when the Nikkei share of purchases was larger, and the Amihud slope is as strong in the 2021–24 placebo.</a:t>
+            </a:r>
+            <a:endParaRPr lang="en-US" sz="1400" dirty="0"/>
+          </a:p>
+          <a:p>
+            <a:pPr indent="0" marL="0">
+              <a:buNone/>
+            </a:pPr>
+            <a:r>
+              <a:rPr lang="en-US" sz="600" dirty="0">
+                <a:solidFill>
+                  <a:schemeClr val="tx1"/>
+                </a:solidFill>
+              </a:rPr>
+              <a:t> </a:t>
+            </a:r>
+            <a:endParaRPr lang="en-US" sz="1400" dirty="0"/>
+          </a:p>
+          <a:p>
+            <a:pPr indent="0" marL="0">
+              <a:buNone/>
+            </a:pPr>
+            <a:r>
+              <a:rPr lang="en-US" sz="1400" b="1" dirty="0">
+                <a:solidFill>
+                  <a:schemeClr val="tx1"/>
+                </a:solidFill>
+              </a:rPr>
+              <a:t>Why it may differ: </a:t>
+            </a:r>
+            <a:pPr indent="0" marL="0">
+              <a:buNone/>
+            </a:pPr>
+            <a:r>
+              <a:rPr lang="en-US" sz="1400" dirty="0">
+                <a:solidFill>
+                  <a:schemeClr val="tx1"/>
+                </a:solidFill>
+              </a:rPr>
+              <a:t>daily proxies instead of 5-minute data, today's index members and factors, an assumed Nikkei share.</a:t>
+            </a:r>
+            <a:endParaRPr lang="en-US" sz="1400" dirty="0"/>
           </a:p>
         </p:txBody>
       </p:sp>
@@ -7215,8 +9579,8 @@
         </p:nvSpPr>
         <p:spPr>
           <a:xfrm>
-            <a:off x="777240" y="2286000"/>
-            <a:ext cx="3044952" cy="1188720"/>
+            <a:off x="548640" y="5120640"/>
+            <a:ext cx="7223760" cy="685800"/>
           </a:xfrm>
           <a:prstGeom prst="rect">
             <a:avLst/>
@@ -7232,754 +9596,14 @@
               <a:buNone/>
             </a:pPr>
             <a:r>
-              <a:rPr lang="en-US" sz="1400" dirty="0">
-                <a:solidFill>
-                  <a:schemeClr val="tx1"/>
-                </a:solidFill>
-              </a:rPr>
-              <a:t>One year (2015); stock tests rest on a single ETF; Table 6 has 255 observations</a:t>
-            </a:r>
-            <a:endParaRPr lang="en-US" sz="1400" dirty="0"/>
-          </a:p>
-        </p:txBody>
-      </p:sp>
-      <p:sp>
-        <p:nvSpPr>
-          <p:cNvPr id="8" name="Critique card 2"/>
-          <p:cNvSpPr/>
-          <p:nvPr/>
-        </p:nvSpPr>
-        <p:spPr>
-          <a:xfrm>
-            <a:off x="4325112" y="1371600"/>
-            <a:ext cx="3502152" cy="2194560"/>
-          </a:xfrm>
-          <a:prstGeom prst="roundRect">
-            <a:avLst>
-              <a:gd name="adj" fmla="val 5000"/>
-            </a:avLst>
-          </a:prstGeom>
-          <a:solidFill>
-            <a:schemeClr val="bg2"/>
-          </a:solidFill>
-          <a:ln w="12700">
-            <a:solidFill>
-              <a:schemeClr val="bg2"/>
-            </a:solidFill>
-            <a:prstDash val="solid"/>
-          </a:ln>
-        </p:spPr>
-      </p:sp>
-      <p:sp>
-        <p:nvSpPr>
-          <p:cNvPr id="9" name="Critique 2 circle"/>
-          <p:cNvSpPr/>
-          <p:nvPr/>
-        </p:nvSpPr>
-        <p:spPr>
-          <a:xfrm>
-            <a:off x="4553712" y="1600200"/>
-            <a:ext cx="548640" cy="548640"/>
-          </a:xfrm>
-          <a:prstGeom prst="ellipse">
-            <a:avLst/>
-          </a:prstGeom>
-          <a:solidFill>
-            <a:schemeClr val="accent2"/>
-          </a:solidFill>
-          <a:ln w="12700">
-            <a:solidFill>
-              <a:schemeClr val="accent2"/>
-            </a:solidFill>
-            <a:prstDash val="solid"/>
-          </a:ln>
-        </p:spPr>
-      </p:sp>
-      <p:pic>
-        <p:nvPicPr>
-          <p:cNvPr id="10" name="Critique 2 icon" descr="preencoded.png">    </p:cNvPr>
-          <p:cNvPicPr>
-            <a:picLocks noChangeAspect="1"/>
-          </p:cNvPicPr>
-          <p:nvPr/>
-        </p:nvPicPr>
-        <p:blipFill>
-          <a:blip r:embed="rId2"/>
-          <a:stretch>
-            <a:fillRect/>
-          </a:stretch>
-        </p:blipFill>
-        <p:spPr>
-          <a:xfrm>
-            <a:off x="4685386" y="1731874"/>
-            <a:ext cx="285293" cy="285293"/>
-          </a:xfrm>
-          <a:prstGeom prst="rect">
-            <a:avLst/>
-          </a:prstGeom>
-        </p:spPr>
-      </p:pic>
-      <p:sp>
-        <p:nvSpPr>
-          <p:cNvPr id="11" name="Text 7"/>
-          <p:cNvSpPr txBox="1"/>
-          <p:nvPr/>
-        </p:nvSpPr>
-        <p:spPr>
-          <a:xfrm>
-            <a:off x="5239512" y="1600200"/>
-            <a:ext cx="2404872" cy="548640"/>
-          </a:xfrm>
-          <a:prstGeom prst="rect">
-            <a:avLst/>
-          </a:prstGeom>
-          <a:noFill/>
-          <a:ln/>
-        </p:spPr>
-        <p:txBody>
-          <a:bodyPr wrap="square" lIns="0" tIns="0" rIns="0" bIns="0" rtlCol="0" anchor="ctr"/>
-          <a:lstStyle/>
-          <a:p>
-            <a:pPr indent="0" marL="0">
-              <a:buNone/>
-            </a:pPr>
-            <a:r>
-              <a:rPr lang="en-US" sz="1700" b="1" dirty="0">
+              <a:rPr lang="en-US" sz="1500" b="1" dirty="0">
                 <a:solidFill>
                   <a:schemeClr val="tx2"/>
                 </a:solidFill>
               </a:rPr>
-              <a:t>Noisy proxies</a:t>
-            </a:r>
-            <a:endParaRPr lang="en-US" sz="1700" dirty="0"/>
-          </a:p>
-        </p:txBody>
-      </p:sp>
-      <p:sp>
-        <p:nvSpPr>
-          <p:cNvPr id="12" name="Text 8"/>
-          <p:cNvSpPr txBox="1"/>
-          <p:nvPr/>
-        </p:nvSpPr>
-        <p:spPr>
-          <a:xfrm>
-            <a:off x="4553712" y="2286000"/>
-            <a:ext cx="3044952" cy="1188720"/>
-          </a:xfrm>
-          <a:prstGeom prst="rect">
-            <a:avLst/>
-          </a:prstGeom>
-          <a:noFill/>
-          <a:ln/>
-        </p:spPr>
-        <p:txBody>
-          <a:bodyPr wrap="square" lIns="0" tIns="0" rIns="0" bIns="0" rtlCol="0" anchor="t"/>
-          <a:lstStyle/>
-          <a:p>
-            <a:pPr indent="0" marL="0">
-              <a:buNone/>
-            </a:pPr>
-            <a:r>
-              <a:rPr lang="en-US" sz="1400" dirty="0">
-                <a:solidFill>
-                  <a:schemeClr val="tx1"/>
-                </a:solidFill>
-              </a:rPr>
-              <a:t>Units outstanding settle with lags (up to 5 days in the US); the HFT flag excludes bank desks</a:t>
-            </a:r>
-            <a:endParaRPr lang="en-US" sz="1400" dirty="0"/>
-          </a:p>
-        </p:txBody>
-      </p:sp>
-      <p:sp>
-        <p:nvSpPr>
-          <p:cNvPr id="13" name="Critique card 3"/>
-          <p:cNvSpPr/>
-          <p:nvPr/>
-        </p:nvSpPr>
-        <p:spPr>
-          <a:xfrm>
-            <a:off x="8101584" y="1371600"/>
-            <a:ext cx="3502152" cy="2194560"/>
-          </a:xfrm>
-          <a:prstGeom prst="roundRect">
-            <a:avLst>
-              <a:gd name="adj" fmla="val 5000"/>
-            </a:avLst>
-          </a:prstGeom>
-          <a:solidFill>
-            <a:schemeClr val="bg2"/>
-          </a:solidFill>
-          <a:ln w="12700">
-            <a:solidFill>
-              <a:schemeClr val="bg2"/>
-            </a:solidFill>
-            <a:prstDash val="solid"/>
-          </a:ln>
-        </p:spPr>
-      </p:sp>
-      <p:sp>
-        <p:nvSpPr>
-          <p:cNvPr id="14" name="Critique 3 circle"/>
-          <p:cNvSpPr/>
-          <p:nvPr/>
-        </p:nvSpPr>
-        <p:spPr>
-          <a:xfrm>
-            <a:off x="8330184" y="1600200"/>
-            <a:ext cx="548640" cy="548640"/>
-          </a:xfrm>
-          <a:prstGeom prst="ellipse">
-            <a:avLst/>
-          </a:prstGeom>
-          <a:solidFill>
-            <a:schemeClr val="accent2"/>
-          </a:solidFill>
-          <a:ln w="12700">
-            <a:solidFill>
-              <a:schemeClr val="accent2"/>
-            </a:solidFill>
-            <a:prstDash val="solid"/>
-          </a:ln>
-        </p:spPr>
-      </p:sp>
-      <p:pic>
-        <p:nvPicPr>
-          <p:cNvPr id="15" name="Critique 3 icon" descr="preencoded.png">    </p:cNvPr>
-          <p:cNvPicPr>
-            <a:picLocks noChangeAspect="1"/>
-          </p:cNvPicPr>
-          <p:nvPr/>
-        </p:nvPicPr>
-        <p:blipFill>
-          <a:blip r:embed="rId3"/>
-          <a:stretch>
-            <a:fillRect/>
-          </a:stretch>
-        </p:blipFill>
-        <p:spPr>
-          <a:xfrm>
-            <a:off x="8461858" y="1731874"/>
-            <a:ext cx="285293" cy="285293"/>
-          </a:xfrm>
-          <a:prstGeom prst="rect">
-            <a:avLst/>
-          </a:prstGeom>
-        </p:spPr>
-      </p:pic>
-      <p:sp>
-        <p:nvSpPr>
-          <p:cNvPr id="16" name="Text 11"/>
-          <p:cNvSpPr txBox="1"/>
-          <p:nvPr/>
-        </p:nvSpPr>
-        <p:spPr>
-          <a:xfrm>
-            <a:off x="9015984" y="1600200"/>
-            <a:ext cx="2404872" cy="548640"/>
-          </a:xfrm>
-          <a:prstGeom prst="rect">
-            <a:avLst/>
-          </a:prstGeom>
-          <a:noFill/>
-          <a:ln/>
-        </p:spPr>
-        <p:txBody>
-          <a:bodyPr wrap="square" lIns="0" tIns="0" rIns="0" bIns="0" rtlCol="0" anchor="ctr"/>
-          <a:lstStyle/>
-          <a:p>
-            <a:pPr indent="0" marL="0">
-              <a:buNone/>
-            </a:pPr>
-            <a:r>
-              <a:rPr lang="en-US" sz="1700" b="1" dirty="0">
-                <a:solidFill>
-                  <a:schemeClr val="tx2"/>
-                </a:solidFill>
-              </a:rPr>
-              <a:t>Creations only</a:t>
-            </a:r>
-            <a:endParaRPr lang="en-US" sz="1700" dirty="0"/>
-          </a:p>
-        </p:txBody>
-      </p:sp>
-      <p:sp>
-        <p:nvSpPr>
-          <p:cNvPr id="17" name="Text 12"/>
-          <p:cNvSpPr txBox="1"/>
-          <p:nvPr/>
-        </p:nvSpPr>
-        <p:spPr>
-          <a:xfrm>
-            <a:off x="8330184" y="2286000"/>
-            <a:ext cx="3044952" cy="1188720"/>
-          </a:xfrm>
-          <a:prstGeom prst="rect">
-            <a:avLst/>
-          </a:prstGeom>
-          <a:noFill/>
-          <a:ln/>
-        </p:spPr>
-        <p:txBody>
-          <a:bodyPr wrap="square" lIns="0" tIns="0" rIns="0" bIns="0" rtlCol="0" anchor="t"/>
-          <a:lstStyle/>
-          <a:p>
-            <a:pPr indent="0" marL="0">
-              <a:buNone/>
-            </a:pPr>
-            <a:r>
-              <a:rPr lang="en-US" sz="1400" dirty="0">
-                <a:solidFill>
-                  <a:schemeClr val="tx1"/>
-                </a:solidFill>
-              </a:rPr>
-              <a:t>The BoJ only bought, so redemptions — the fragility scenario — are untested</a:t>
-            </a:r>
-            <a:endParaRPr lang="en-US" sz="1400" dirty="0"/>
-          </a:p>
-        </p:txBody>
-      </p:sp>
-      <p:sp>
-        <p:nvSpPr>
-          <p:cNvPr id="18" name="Critique card 4"/>
-          <p:cNvSpPr/>
-          <p:nvPr/>
-        </p:nvSpPr>
-        <p:spPr>
-          <a:xfrm>
-            <a:off x="548640" y="3794760"/>
-            <a:ext cx="3502152" cy="2194560"/>
-          </a:xfrm>
-          <a:prstGeom prst="roundRect">
-            <a:avLst>
-              <a:gd name="adj" fmla="val 5000"/>
-            </a:avLst>
-          </a:prstGeom>
-          <a:solidFill>
-            <a:schemeClr val="bg2"/>
-          </a:solidFill>
-          <a:ln w="12700">
-            <a:solidFill>
-              <a:schemeClr val="bg2"/>
-            </a:solidFill>
-            <a:prstDash val="solid"/>
-          </a:ln>
-        </p:spPr>
-      </p:sp>
-      <p:sp>
-        <p:nvSpPr>
-          <p:cNvPr id="19" name="Critique 4 circle"/>
-          <p:cNvSpPr/>
-          <p:nvPr/>
-        </p:nvSpPr>
-        <p:spPr>
-          <a:xfrm>
-            <a:off x="777240" y="4023360"/>
-            <a:ext cx="548640" cy="548640"/>
-          </a:xfrm>
-          <a:prstGeom prst="ellipse">
-            <a:avLst/>
-          </a:prstGeom>
-          <a:solidFill>
-            <a:schemeClr val="accent2"/>
-          </a:solidFill>
-          <a:ln w="12700">
-            <a:solidFill>
-              <a:schemeClr val="accent2"/>
-            </a:solidFill>
-            <a:prstDash val="solid"/>
-          </a:ln>
-        </p:spPr>
-      </p:sp>
-      <p:pic>
-        <p:nvPicPr>
-          <p:cNvPr id="20" name="Critique 4 icon" descr="preencoded.png">    </p:cNvPr>
-          <p:cNvPicPr>
-            <a:picLocks noChangeAspect="1"/>
-          </p:cNvPicPr>
-          <p:nvPr/>
-        </p:nvPicPr>
-        <p:blipFill>
-          <a:blip r:embed="rId4"/>
-          <a:stretch>
-            <a:fillRect/>
-          </a:stretch>
-        </p:blipFill>
-        <p:spPr>
-          <a:xfrm>
-            <a:off x="908914" y="4155034"/>
-            <a:ext cx="285293" cy="285293"/>
-          </a:xfrm>
-          <a:prstGeom prst="rect">
-            <a:avLst/>
-          </a:prstGeom>
-        </p:spPr>
-      </p:pic>
-      <p:sp>
-        <p:nvSpPr>
-          <p:cNvPr id="21" name="Text 15"/>
-          <p:cNvSpPr txBox="1"/>
-          <p:nvPr/>
-        </p:nvSpPr>
-        <p:spPr>
-          <a:xfrm>
-            <a:off x="1463040" y="4023360"/>
-            <a:ext cx="2404872" cy="548640"/>
-          </a:xfrm>
-          <a:prstGeom prst="rect">
-            <a:avLst/>
-          </a:prstGeom>
-          <a:noFill/>
-          <a:ln/>
-        </p:spPr>
-        <p:txBody>
-          <a:bodyPr wrap="square" lIns="0" tIns="0" rIns="0" bIns="0" rtlCol="0" anchor="ctr"/>
-          <a:lstStyle/>
-          <a:p>
-            <a:pPr indent="0" marL="0">
-              <a:buNone/>
-            </a:pPr>
-            <a:r>
-              <a:rPr lang="en-US" sz="1700" b="1" dirty="0">
-                <a:solidFill>
-                  <a:schemeClr val="tx2"/>
-                </a:solidFill>
-              </a:rPr>
-              <a:t>Selected days, extreme dose</a:t>
-            </a:r>
-            <a:endParaRPr lang="en-US" sz="1700" dirty="0"/>
-          </a:p>
-        </p:txBody>
-      </p:sp>
-      <p:sp>
-        <p:nvSpPr>
-          <p:cNvPr id="22" name="Text 16"/>
-          <p:cNvSpPr txBox="1"/>
-          <p:nvPr/>
-        </p:nvSpPr>
-        <p:spPr>
-          <a:xfrm>
-            <a:off x="777240" y="4709160"/>
-            <a:ext cx="3044952" cy="1188720"/>
-          </a:xfrm>
-          <a:prstGeom prst="rect">
-            <a:avLst/>
-          </a:prstGeom>
-          <a:noFill/>
-          <a:ln/>
-        </p:spPr>
-        <p:txBody>
-          <a:bodyPr wrap="square" lIns="0" tIns="0" rIns="0" bIns="0" rtlCol="0" anchor="t"/>
-          <a:lstStyle/>
-          <a:p>
-            <a:pPr indent="0" marL="0">
-              <a:buNone/>
-            </a:pPr>
-            <a:r>
-              <a:rPr lang="en-US" sz="1400" dirty="0">
-                <a:solidFill>
-                  <a:schemeClr val="tx1"/>
-                </a:solidFill>
-              </a:rPr>
-              <a:t>Purchases followed weak mornings; ¥70bn per day is far from routine arbitrage</a:t>
-            </a:r>
-            <a:endParaRPr lang="en-US" sz="1400" dirty="0"/>
-          </a:p>
-        </p:txBody>
-      </p:sp>
-      <p:sp>
-        <p:nvSpPr>
-          <p:cNvPr id="23" name="Critique card 5"/>
-          <p:cNvSpPr/>
-          <p:nvPr/>
-        </p:nvSpPr>
-        <p:spPr>
-          <a:xfrm>
-            <a:off x="4325112" y="3794760"/>
-            <a:ext cx="3502152" cy="2194560"/>
-          </a:xfrm>
-          <a:prstGeom prst="roundRect">
-            <a:avLst>
-              <a:gd name="adj" fmla="val 5000"/>
-            </a:avLst>
-          </a:prstGeom>
-          <a:solidFill>
-            <a:schemeClr val="bg2"/>
-          </a:solidFill>
-          <a:ln w="12700">
-            <a:solidFill>
-              <a:schemeClr val="bg2"/>
-            </a:solidFill>
-            <a:prstDash val="solid"/>
-          </a:ln>
-        </p:spPr>
-      </p:sp>
-      <p:sp>
-        <p:nvSpPr>
-          <p:cNvPr id="24" name="Critique 5 circle"/>
-          <p:cNvSpPr/>
-          <p:nvPr/>
-        </p:nvSpPr>
-        <p:spPr>
-          <a:xfrm>
-            <a:off x="4553712" y="4023360"/>
-            <a:ext cx="548640" cy="548640"/>
-          </a:xfrm>
-          <a:prstGeom prst="ellipse">
-            <a:avLst/>
-          </a:prstGeom>
-          <a:solidFill>
-            <a:schemeClr val="accent1"/>
-          </a:solidFill>
-          <a:ln w="12700">
-            <a:solidFill>
-              <a:schemeClr val="accent1"/>
-            </a:solidFill>
-            <a:prstDash val="solid"/>
-          </a:ln>
-        </p:spPr>
-      </p:sp>
-      <p:pic>
-        <p:nvPicPr>
-          <p:cNvPr id="25" name="Critique 5 icon" descr="preencoded.png">    </p:cNvPr>
-          <p:cNvPicPr>
-            <a:picLocks noChangeAspect="1"/>
-          </p:cNvPicPr>
-          <p:nvPr/>
-        </p:nvPicPr>
-        <p:blipFill>
-          <a:blip r:embed="rId5"/>
-          <a:stretch>
-            <a:fillRect/>
-          </a:stretch>
-        </p:blipFill>
-        <p:spPr>
-          <a:xfrm>
-            <a:off x="4685386" y="4155034"/>
-            <a:ext cx="285293" cy="285293"/>
-          </a:xfrm>
-          <a:prstGeom prst="rect">
-            <a:avLst/>
-          </a:prstGeom>
-        </p:spPr>
-      </p:pic>
-      <p:sp>
-        <p:nvSpPr>
-          <p:cNvPr id="26" name="Text 19"/>
-          <p:cNvSpPr txBox="1"/>
-          <p:nvPr/>
-        </p:nvSpPr>
-        <p:spPr>
-          <a:xfrm>
-            <a:off x="5239512" y="4023360"/>
-            <a:ext cx="2404872" cy="548640"/>
-          </a:xfrm>
-          <a:prstGeom prst="rect">
-            <a:avLst/>
-          </a:prstGeom>
-          <a:noFill/>
-          <a:ln/>
-        </p:spPr>
-        <p:txBody>
-          <a:bodyPr wrap="square" lIns="0" tIns="0" rIns="0" bIns="0" rtlCol="0" anchor="ctr"/>
-          <a:lstStyle/>
-          <a:p>
-            <a:pPr indent="0" marL="0">
-              <a:buNone/>
-            </a:pPr>
-            <a:r>
-              <a:rPr lang="en-US" sz="1700" b="1" dirty="0">
-                <a:solidFill>
-                  <a:schemeClr val="tx2"/>
-                </a:solidFill>
-              </a:rPr>
-              <a:t>Trend ≠ causality</a:t>
-            </a:r>
-            <a:endParaRPr lang="en-US" sz="1700" dirty="0"/>
-          </a:p>
-        </p:txBody>
-      </p:sp>
-      <p:sp>
-        <p:nvSpPr>
-          <p:cNvPr id="27" name="Text 20"/>
-          <p:cNvSpPr txBox="1"/>
-          <p:nvPr/>
-        </p:nvSpPr>
-        <p:spPr>
-          <a:xfrm>
-            <a:off x="4553712" y="4709160"/>
-            <a:ext cx="3044952" cy="1188720"/>
-          </a:xfrm>
-          <a:prstGeom prst="rect">
-            <a:avLst/>
-          </a:prstGeom>
-          <a:noFill/>
-          <a:ln/>
-        </p:spPr>
-        <p:txBody>
-          <a:bodyPr wrap="square" lIns="0" tIns="0" rIns="0" bIns="0" rtlCol="0" anchor="t"/>
-          <a:lstStyle/>
-          <a:p>
-            <a:pPr indent="0" marL="0">
-              <a:buNone/>
-            </a:pPr>
-            <a:r>
-              <a:rPr lang="en-US" sz="1400" dirty="0">
-                <a:solidFill>
-                  <a:schemeClr val="tx1"/>
-                </a:solidFill>
-              </a:rPr>
-              <a:t>TSE cut tick sizes for TOPIX100 in 2014–15, mechanically narrowing spreads; trend regressions need Newey–West SEs</a:t>
-            </a:r>
-            <a:endParaRPr lang="en-US" sz="1400" dirty="0"/>
-          </a:p>
-        </p:txBody>
-      </p:sp>
-      <p:sp>
-        <p:nvSpPr>
-          <p:cNvPr id="28" name="Critique card 6"/>
-          <p:cNvSpPr/>
-          <p:nvPr/>
-        </p:nvSpPr>
-        <p:spPr>
-          <a:xfrm>
-            <a:off x="8101584" y="3794760"/>
-            <a:ext cx="3502152" cy="2194560"/>
-          </a:xfrm>
-          <a:prstGeom prst="roundRect">
-            <a:avLst>
-              <a:gd name="adj" fmla="val 5000"/>
-            </a:avLst>
-          </a:prstGeom>
-          <a:solidFill>
-            <a:schemeClr val="bg2"/>
-          </a:solidFill>
-          <a:ln w="12700">
-            <a:solidFill>
-              <a:schemeClr val="bg2"/>
-            </a:solidFill>
-            <a:prstDash val="solid"/>
-          </a:ln>
-        </p:spPr>
-      </p:sp>
-      <p:sp>
-        <p:nvSpPr>
-          <p:cNvPr id="29" name="Critique 6 circle"/>
-          <p:cNvSpPr/>
-          <p:nvPr/>
-        </p:nvSpPr>
-        <p:spPr>
-          <a:xfrm>
-            <a:off x="8330184" y="4023360"/>
-            <a:ext cx="548640" cy="548640"/>
-          </a:xfrm>
-          <a:prstGeom prst="ellipse">
-            <a:avLst/>
-          </a:prstGeom>
-          <a:solidFill>
-            <a:schemeClr val="accent1"/>
-          </a:solidFill>
-          <a:ln w="12700">
-            <a:solidFill>
-              <a:schemeClr val="accent1"/>
-            </a:solidFill>
-            <a:prstDash val="solid"/>
-          </a:ln>
-        </p:spPr>
-      </p:sp>
-      <p:pic>
-        <p:nvPicPr>
-          <p:cNvPr id="30" name="Critique 6 icon" descr="preencoded.png">    </p:cNvPr>
-          <p:cNvPicPr>
-            <a:picLocks noChangeAspect="1"/>
-          </p:cNvPicPr>
-          <p:nvPr/>
-        </p:nvPicPr>
-        <p:blipFill>
-          <a:blip r:embed="rId6"/>
-          <a:stretch>
-            <a:fillRect/>
-          </a:stretch>
-        </p:blipFill>
-        <p:spPr>
-          <a:xfrm>
-            <a:off x="8461858" y="4155034"/>
-            <a:ext cx="285293" cy="285293"/>
-          </a:xfrm>
-          <a:prstGeom prst="rect">
-            <a:avLst/>
-          </a:prstGeom>
-        </p:spPr>
-      </p:pic>
-      <p:sp>
-        <p:nvSpPr>
-          <p:cNvPr id="31" name="Text 23"/>
-          <p:cNvSpPr txBox="1"/>
-          <p:nvPr/>
-        </p:nvSpPr>
-        <p:spPr>
-          <a:xfrm>
-            <a:off x="9015984" y="4023360"/>
-            <a:ext cx="2404872" cy="548640"/>
-          </a:xfrm>
-          <a:prstGeom prst="rect">
-            <a:avLst/>
-          </a:prstGeom>
-          <a:noFill/>
-          <a:ln/>
-        </p:spPr>
-        <p:txBody>
-          <a:bodyPr wrap="square" lIns="0" tIns="0" rIns="0" bIns="0" rtlCol="0" anchor="ctr"/>
-          <a:lstStyle/>
-          <a:p>
-            <a:pPr indent="0" marL="0">
-              <a:buNone/>
-            </a:pPr>
-            <a:r>
-              <a:rPr lang="en-US" sz="1700" b="1" dirty="0">
-                <a:solidFill>
-                  <a:schemeClr val="tx2"/>
-                </a:solidFill>
-              </a:rPr>
-              <a:t>Units &amp; consistency</a:t>
-            </a:r>
-            <a:endParaRPr lang="en-US" sz="1700" dirty="0"/>
-          </a:p>
-        </p:txBody>
-      </p:sp>
-      <p:sp>
-        <p:nvSpPr>
-          <p:cNvPr id="32" name="Text 24"/>
-          <p:cNvSpPr txBox="1"/>
-          <p:nvPr/>
-        </p:nvSpPr>
-        <p:spPr>
-          <a:xfrm>
-            <a:off x="8330184" y="4709160"/>
-            <a:ext cx="3044952" cy="1188720"/>
-          </a:xfrm>
-          <a:prstGeom prst="rect">
-            <a:avLst/>
-          </a:prstGeom>
-          <a:noFill/>
-          <a:ln/>
-        </p:spPr>
-        <p:txBody>
-          <a:bodyPr wrap="square" lIns="0" tIns="0" rIns="0" bIns="0" rtlCol="0" anchor="t"/>
-          <a:lstStyle/>
-          <a:p>
-            <a:pPr indent="0" marL="0">
-              <a:buNone/>
-            </a:pPr>
-            <a:r>
-              <a:rPr lang="en-US" sz="1400" dirty="0">
-                <a:solidFill>
-                  <a:schemeClr val="tx1"/>
-                </a:solidFill>
-              </a:rPr>
-              <a:t>PMStockActivity mean 0.33% vs. ≈0.01–0.02% implied by ¥70bn on ¥300–600trn; text vs. Table 9 slopes differ</a:t>
-            </a:r>
-            <a:endParaRPr lang="en-US" sz="1400" dirty="0"/>
+              <a:t>Mean PMStockActivity on BoJ days: 0.336 bps (paper: 0.33) — the shock is the right size; the response is not there.</a:t>
+            </a:r>
+            <a:endParaRPr lang="en-US" sz="1500" dirty="0"/>
           </a:p>
         </p:txBody>
       </p:sp>
@@ -8086,70 +9710,38 @@
                 <a:ea typeface="Cambria" pitchFamily="34" charset="-122"/>
                 <a:cs typeface="Cambria" pitchFamily="34" charset="-120"/>
               </a:rPr>
-              <a:t>Since publication: the BoJ is now selling</a:t>
+              <a:t>Real data II: liquidity spills over; no trend</a:t>
             </a:r>
             <a:endParaRPr lang="en-US" sz="3200" dirty="0"/>
           </a:p>
         </p:txBody>
       </p:sp>
-      <p:sp>
-        <p:nvSpPr>
-          <p:cNvPr id="3" name="Timeline"/>
-          <p:cNvSpPr/>
-          <p:nvPr/>
-        </p:nvSpPr>
-        <p:spPr>
-          <a:xfrm>
-            <a:off x="1005840" y="2331720"/>
-            <a:ext cx="10241280" cy="0"/>
-          </a:xfrm>
-          <a:prstGeom prst="line">
-            <a:avLst/>
-          </a:prstGeom>
-          <a:noFill/>
-          <a:ln w="38100">
-            <a:solidFill>
-              <a:srgbClr val="CBD5E1"/>
-            </a:solidFill>
-            <a:prstDash val="solid"/>
-          </a:ln>
-        </p:spPr>
-      </p:sp>
-      <p:sp>
-        <p:nvSpPr>
-          <p:cNvPr id="4" name="Timeline dot 1"/>
-          <p:cNvSpPr/>
-          <p:nvPr/>
-        </p:nvSpPr>
-        <p:spPr>
-          <a:xfrm>
-            <a:off x="822960" y="2103120"/>
-            <a:ext cx="457200" cy="457200"/>
-          </a:xfrm>
-          <a:prstGeom prst="ellipse">
-            <a:avLst/>
-          </a:prstGeom>
-          <a:solidFill>
-            <a:schemeClr val="accent2"/>
-          </a:solidFill>
-          <a:ln w="25400">
-            <a:solidFill>
-              <a:srgbClr val="FFFFFF"/>
-            </a:solidFill>
-            <a:prstDash val="solid"/>
-          </a:ln>
-        </p:spPr>
-      </p:sp>
-      <p:sp>
-        <p:nvSpPr>
-          <p:cNvPr id="5" name="Text 3"/>
+      <p:graphicFrame>
+        <p:nvGraphicFramePr>
+          <p:cNvPr id="3" name="Real spread chart" descr=""/>
+          <p:cNvGraphicFramePr/>
+          <p:nvPr/>
+        </p:nvGraphicFramePr>
+        <p:xfrm>
+          <a:off x="548640" y="1371600"/>
+          <a:ext cx="5760720" cy="4206240"/>
+        </p:xfrm>
+        <a:graphic xmlns:a="http://schemas.openxmlformats.org/drawingml/2006/main">
+          <a:graphicData uri="http://schemas.openxmlformats.org/drawingml/2006/chart">
+            <c:chart xmlns:c="http://schemas.openxmlformats.org/drawingml/2006/chart" r:id="rId1"/>
+          </a:graphicData>
+        </a:graphic>
+      </p:graphicFrame>
+      <p:sp>
+        <p:nvSpPr>
+          <p:cNvPr id="4" name="Caption"/>
           <p:cNvSpPr txBox="1"/>
           <p:nvPr/>
         </p:nvSpPr>
         <p:spPr>
           <a:xfrm>
-            <a:off x="777240" y="1417320"/>
-            <a:ext cx="2651760" cy="457200"/>
+            <a:off x="548640" y="5669280"/>
+            <a:ext cx="5760720" cy="365760"/>
           </a:xfrm>
           <a:prstGeom prst="rect">
             <a:avLst/>
@@ -8165,358 +9757,31 @@
               <a:buNone/>
             </a:pPr>
             <a:r>
-              <a:rPr lang="en-US" sz="1800" b="1" dirty="0">
-                <a:solidFill>
-                  <a:schemeClr val="tx2"/>
-                </a:solidFill>
-              </a:rPr>
-              <a:t>Mar 2024</a:t>
-            </a:r>
-            <a:endParaRPr lang="en-US" sz="1800" dirty="0"/>
-          </a:p>
-        </p:txBody>
-      </p:sp>
-      <p:sp>
-        <p:nvSpPr>
-          <p:cNvPr id="6" name="Text 4"/>
-          <p:cNvSpPr txBox="1"/>
-          <p:nvPr/>
-        </p:nvSpPr>
-        <p:spPr>
-          <a:xfrm>
-            <a:off x="777240" y="2743200"/>
-            <a:ext cx="2560320" cy="914400"/>
-          </a:xfrm>
-          <a:prstGeom prst="rect">
-            <a:avLst/>
-          </a:prstGeom>
-          <a:noFill/>
-          <a:ln/>
-        </p:spPr>
-        <p:txBody>
-          <a:bodyPr wrap="square" lIns="0" tIns="0" rIns="0" bIns="0" rtlCol="0" anchor="t"/>
-          <a:lstStyle/>
-          <a:p>
-            <a:pPr indent="0" marL="0">
-              <a:buNone/>
-            </a:pPr>
-            <a:r>
-              <a:rPr lang="en-US" sz="1400" dirty="0">
-                <a:solidFill>
-                  <a:schemeClr val="tx1"/>
-                </a:solidFill>
-              </a:rPr>
-              <a:t>BoJ ends new ETF purchases</a:t>
-            </a:r>
-            <a:endParaRPr lang="en-US" sz="1400" dirty="0"/>
-          </a:p>
-        </p:txBody>
-      </p:sp>
-      <p:sp>
-        <p:nvSpPr>
-          <p:cNvPr id="7" name="Timeline dot 2"/>
+              <a:rPr lang="en-US" sz="1100" i="1" dirty="0">
+                <a:solidFill>
+                  <a:srgbClr val="6B7280"/>
+                </a:solidFill>
+              </a:rPr>
+              <a:t>EDGE levels overstate true spreads for very liquid instruments; compare ETF with basket, not the levels.</a:t>
+            </a:r>
+            <a:endParaRPr lang="en-US" sz="1100" dirty="0"/>
+          </a:p>
+        </p:txBody>
+      </p:sp>
+      <p:sp>
+        <p:nvSpPr>
+          <p:cNvPr id="5" name="Real data II card 1"/>
           <p:cNvSpPr/>
           <p:nvPr/>
         </p:nvSpPr>
         <p:spPr>
           <a:xfrm>
-            <a:off x="3657600" y="2103120"/>
-            <a:ext cx="457200" cy="457200"/>
-          </a:xfrm>
-          <a:prstGeom prst="ellipse">
-            <a:avLst/>
-          </a:prstGeom>
-          <a:solidFill>
-            <a:schemeClr val="accent2"/>
-          </a:solidFill>
-          <a:ln w="25400">
-            <a:solidFill>
-              <a:srgbClr val="FFFFFF"/>
-            </a:solidFill>
-            <a:prstDash val="solid"/>
-          </a:ln>
-        </p:spPr>
-      </p:sp>
-      <p:sp>
-        <p:nvSpPr>
-          <p:cNvPr id="8" name="Text 6"/>
-          <p:cNvSpPr txBox="1"/>
-          <p:nvPr/>
-        </p:nvSpPr>
-        <p:spPr>
-          <a:xfrm>
-            <a:off x="3611880" y="1417320"/>
-            <a:ext cx="2651760" cy="457200"/>
-          </a:xfrm>
-          <a:prstGeom prst="rect">
-            <a:avLst/>
-          </a:prstGeom>
-          <a:noFill/>
-          <a:ln/>
-        </p:spPr>
-        <p:txBody>
-          <a:bodyPr wrap="square" lIns="0" tIns="0" rIns="0" bIns="0" rtlCol="0" anchor="ctr"/>
-          <a:lstStyle/>
-          <a:p>
-            <a:pPr indent="0" marL="0">
-              <a:buNone/>
-            </a:pPr>
-            <a:r>
-              <a:rPr lang="en-US" sz="1800" b="1" dirty="0">
-                <a:solidFill>
-                  <a:schemeClr val="tx2"/>
-                </a:solidFill>
-              </a:rPr>
-              <a:t>Sep 2025</a:t>
-            </a:r>
-            <a:endParaRPr lang="en-US" sz="1800" dirty="0"/>
-          </a:p>
-        </p:txBody>
-      </p:sp>
-      <p:sp>
-        <p:nvSpPr>
-          <p:cNvPr id="9" name="Text 7"/>
-          <p:cNvSpPr txBox="1"/>
-          <p:nvPr/>
-        </p:nvSpPr>
-        <p:spPr>
-          <a:xfrm>
-            <a:off x="3611880" y="2743200"/>
-            <a:ext cx="2560320" cy="914400"/>
-          </a:xfrm>
-          <a:prstGeom prst="rect">
-            <a:avLst/>
-          </a:prstGeom>
-          <a:noFill/>
-          <a:ln/>
-        </p:spPr>
-        <p:txBody>
-          <a:bodyPr wrap="square" lIns="0" tIns="0" rIns="0" bIns="0" rtlCol="0" anchor="t"/>
-          <a:lstStyle/>
-          <a:p>
-            <a:pPr indent="0" marL="0">
-              <a:buNone/>
-            </a:pPr>
-            <a:r>
-              <a:rPr lang="en-US" sz="1400" dirty="0">
-                <a:solidFill>
-                  <a:schemeClr val="tx1"/>
-                </a:solidFill>
-              </a:rPr>
-              <a:t>Decides to sell ≈ ¥330bn a year (book value), ≈0.05% of turnover</a:t>
-            </a:r>
-            <a:endParaRPr lang="en-US" sz="1400" dirty="0"/>
-          </a:p>
-        </p:txBody>
-      </p:sp>
-      <p:sp>
-        <p:nvSpPr>
-          <p:cNvPr id="10" name="Timeline dot 3"/>
-          <p:cNvSpPr/>
-          <p:nvPr/>
-        </p:nvSpPr>
-        <p:spPr>
-          <a:xfrm>
-            <a:off x="6492240" y="2103120"/>
-            <a:ext cx="457200" cy="457200"/>
-          </a:xfrm>
-          <a:prstGeom prst="ellipse">
-            <a:avLst/>
-          </a:prstGeom>
-          <a:solidFill>
-            <a:schemeClr val="accent2"/>
-          </a:solidFill>
-          <a:ln w="25400">
-            <a:solidFill>
-              <a:srgbClr val="FFFFFF"/>
-            </a:solidFill>
-            <a:prstDash val="solid"/>
-          </a:ln>
-        </p:spPr>
-      </p:sp>
-      <p:sp>
-        <p:nvSpPr>
-          <p:cNvPr id="11" name="Text 9"/>
-          <p:cNvSpPr txBox="1"/>
-          <p:nvPr/>
-        </p:nvSpPr>
-        <p:spPr>
-          <a:xfrm>
-            <a:off x="6446520" y="1417320"/>
-            <a:ext cx="2651760" cy="457200"/>
-          </a:xfrm>
-          <a:prstGeom prst="rect">
-            <a:avLst/>
-          </a:prstGeom>
-          <a:noFill/>
-          <a:ln/>
-        </p:spPr>
-        <p:txBody>
-          <a:bodyPr wrap="square" lIns="0" tIns="0" rIns="0" bIns="0" rtlCol="0" anchor="ctr"/>
-          <a:lstStyle/>
-          <a:p>
-            <a:pPr indent="0" marL="0">
-              <a:buNone/>
-            </a:pPr>
-            <a:r>
-              <a:rPr lang="en-US" sz="1800" b="1" dirty="0">
-                <a:solidFill>
-                  <a:schemeClr val="tx2"/>
-                </a:solidFill>
-              </a:rPr>
-              <a:t>Jan 2026</a:t>
-            </a:r>
-            <a:endParaRPr lang="en-US" sz="1800" dirty="0"/>
-          </a:p>
-        </p:txBody>
-      </p:sp>
-      <p:sp>
-        <p:nvSpPr>
-          <p:cNvPr id="12" name="Text 10"/>
-          <p:cNvSpPr txBox="1"/>
-          <p:nvPr/>
-        </p:nvSpPr>
-        <p:spPr>
-          <a:xfrm>
-            <a:off x="6446520" y="2743200"/>
-            <a:ext cx="2560320" cy="914400"/>
-          </a:xfrm>
-          <a:prstGeom prst="rect">
-            <a:avLst/>
-          </a:prstGeom>
-          <a:noFill/>
-          <a:ln/>
-        </p:spPr>
-        <p:txBody>
-          <a:bodyPr wrap="square" lIns="0" tIns="0" rIns="0" bIns="0" rtlCol="0" anchor="t"/>
-          <a:lstStyle/>
-          <a:p>
-            <a:pPr indent="0" marL="0">
-              <a:buNone/>
-            </a:pPr>
-            <a:r>
-              <a:rPr lang="en-US" sz="1400" dirty="0">
-                <a:solidFill>
-                  <a:schemeClr val="tx1"/>
-                </a:solidFill>
-              </a:rPr>
-              <a:t>Sales begin; full exit would take over a century</a:t>
-            </a:r>
-            <a:endParaRPr lang="en-US" sz="1400" dirty="0"/>
-          </a:p>
-        </p:txBody>
-      </p:sp>
-      <p:sp>
-        <p:nvSpPr>
-          <p:cNvPr id="13" name="Timeline dot 4"/>
-          <p:cNvSpPr/>
-          <p:nvPr/>
-        </p:nvSpPr>
-        <p:spPr>
-          <a:xfrm>
-            <a:off x="9326880" y="2103120"/>
-            <a:ext cx="457200" cy="457200"/>
-          </a:xfrm>
-          <a:prstGeom prst="ellipse">
-            <a:avLst/>
-          </a:prstGeom>
-          <a:solidFill>
-            <a:schemeClr val="accent1"/>
-          </a:solidFill>
-          <a:ln w="25400">
-            <a:solidFill>
-              <a:srgbClr val="FFFFFF"/>
-            </a:solidFill>
-            <a:prstDash val="solid"/>
-          </a:ln>
-        </p:spPr>
-      </p:sp>
-      <p:sp>
-        <p:nvSpPr>
-          <p:cNvPr id="14" name="Text 12"/>
-          <p:cNvSpPr txBox="1"/>
-          <p:nvPr/>
-        </p:nvSpPr>
-        <p:spPr>
-          <a:xfrm>
-            <a:off x="9281160" y="1417320"/>
-            <a:ext cx="2651760" cy="457200"/>
-          </a:xfrm>
-          <a:prstGeom prst="rect">
-            <a:avLst/>
-          </a:prstGeom>
-          <a:noFill/>
-          <a:ln/>
-        </p:spPr>
-        <p:txBody>
-          <a:bodyPr wrap="square" lIns="0" tIns="0" rIns="0" bIns="0" rtlCol="0" anchor="ctr"/>
-          <a:lstStyle/>
-          <a:p>
-            <a:pPr indent="0" marL="0">
-              <a:buNone/>
-            </a:pPr>
-            <a:r>
-              <a:rPr lang="en-US" sz="1800" b="1" dirty="0">
-                <a:solidFill>
-                  <a:schemeClr val="tx2"/>
-                </a:solidFill>
-              </a:rPr>
-              <a:t>Aug 2026</a:t>
-            </a:r>
-            <a:endParaRPr lang="en-US" sz="1800" dirty="0"/>
-          </a:p>
-        </p:txBody>
-      </p:sp>
-      <p:sp>
-        <p:nvSpPr>
-          <p:cNvPr id="15" name="Text 13"/>
-          <p:cNvSpPr txBox="1"/>
-          <p:nvPr/>
-        </p:nvSpPr>
-        <p:spPr>
-          <a:xfrm>
-            <a:off x="9281160" y="2743200"/>
-            <a:ext cx="2560320" cy="914400"/>
-          </a:xfrm>
-          <a:prstGeom prst="rect">
-            <a:avLst/>
-          </a:prstGeom>
-          <a:noFill/>
-          <a:ln/>
-        </p:spPr>
-        <p:txBody>
-          <a:bodyPr wrap="square" lIns="0" tIns="0" rIns="0" bIns="0" rtlCol="0" anchor="t"/>
-          <a:lstStyle/>
-          <a:p>
-            <a:pPr indent="0" marL="0">
-              <a:buNone/>
-            </a:pPr>
-            <a:r>
-              <a:rPr lang="en-US" sz="1400" dirty="0">
-                <a:solidFill>
-                  <a:schemeClr val="tx1"/>
-                </a:solidFill>
-              </a:rPr>
-              <a:t>Global ETF assets reach a record $24.0trn</a:t>
-            </a:r>
-            <a:endParaRPr lang="en-US" sz="1400" dirty="0"/>
-          </a:p>
-        </p:txBody>
-      </p:sp>
-      <p:sp>
-        <p:nvSpPr>
-          <p:cNvPr id="16" name="Implication card"/>
-          <p:cNvSpPr/>
-          <p:nvPr/>
-        </p:nvSpPr>
-        <p:spPr>
-          <a:xfrm>
-            <a:off x="548640" y="4069080"/>
-            <a:ext cx="11094415" cy="1783080"/>
+            <a:off x="6675120" y="1463040"/>
+            <a:ext cx="4965192" cy="2011680"/>
           </a:xfrm>
           <a:prstGeom prst="roundRect">
             <a:avLst>
-              <a:gd name="adj" fmla="val 6154"/>
+              <a:gd name="adj" fmla="val 5455"/>
             </a:avLst>
           </a:prstGeom>
           <a:solidFill>
@@ -8532,14 +9797,14 @@
       </p:sp>
       <p:sp>
         <p:nvSpPr>
-          <p:cNvPr id="17" name="Text 15"/>
+          <p:cNvPr id="6" name="Text 3"/>
           <p:cNvSpPr txBox="1"/>
           <p:nvPr/>
         </p:nvSpPr>
         <p:spPr>
           <a:xfrm>
-            <a:off x="868680" y="4206240"/>
-            <a:ext cx="10454335" cy="1554480"/>
+            <a:off x="6949440" y="1645920"/>
+            <a:ext cx="4480560" cy="457200"/>
           </a:xfrm>
           <a:prstGeom prst="rect">
             <a:avLst/>
@@ -8555,13 +9820,38 @@
               <a:buNone/>
             </a:pPr>
             <a:r>
-              <a:rPr lang="en-US" sz="1500" b="1" dirty="0">
-                <a:solidFill>
-                  <a:srgbClr val="14213D"/>
-                </a:solidFill>
-              </a:rPr>
-              <a:t>Why it matters for the paper: </a:t>
-            </a:r>
+              <a:rPr lang="en-US" sz="2000" b="1" dirty="0">
+                <a:solidFill>
+                  <a:schemeClr val="accent1"/>
+                </a:solidFill>
+              </a:rPr>
+              <a:t>Spill-over confirmed</a:t>
+            </a:r>
+            <a:endParaRPr lang="en-US" sz="2000" dirty="0"/>
+          </a:p>
+        </p:txBody>
+      </p:sp>
+      <p:sp>
+        <p:nvSpPr>
+          <p:cNvPr id="7" name="Text 4"/>
+          <p:cNvSpPr txBox="1"/>
+          <p:nvPr/>
+        </p:nvSpPr>
+        <p:spPr>
+          <a:xfrm>
+            <a:off x="6949440" y="2194560"/>
+            <a:ext cx="4480560" cy="1143000"/>
+          </a:xfrm>
+          <a:prstGeom prst="rect">
+            <a:avLst/>
+          </a:prstGeom>
+          <a:noFill/>
+          <a:ln/>
+        </p:spPr>
+        <p:txBody>
+          <a:bodyPr wrap="square" lIns="0" tIns="0" rIns="0" bIns="0" rtlCol="0" anchor="t"/>
+          <a:lstStyle/>
+          <a:p>
             <a:pPr indent="0" marL="0">
               <a:buNone/>
             </a:pPr>
@@ -8571,22 +9861,96 @@
                   <a:schemeClr val="tx1"/>
                 </a:solidFill>
               </a:rPr>
-              <a:t>the redemption side it could not test is now live, but at ≈0.05% of turnover the paper's logic predicts negligible effects on stocks.</a:t>
+              <a:t>Basket spread on ETF spread: β = 0.95 (t 7.8) for SPY, 0.76 (t 4.0) for 1321.T — as in the paper's Table 6</a:t>
             </a:r>
             <a:endParaRPr lang="en-US" sz="1500" dirty="0"/>
           </a:p>
+        </p:txBody>
+      </p:sp>
+      <p:sp>
+        <p:nvSpPr>
+          <p:cNvPr id="8" name="Real data II card 2"/>
+          <p:cNvSpPr/>
+          <p:nvPr/>
+        </p:nvSpPr>
+        <p:spPr>
+          <a:xfrm>
+            <a:off x="6675120" y="3703320"/>
+            <a:ext cx="4965192" cy="2011680"/>
+          </a:xfrm>
+          <a:prstGeom prst="roundRect">
+            <a:avLst>
+              <a:gd name="adj" fmla="val 5455"/>
+            </a:avLst>
+          </a:prstGeom>
+          <a:solidFill>
+            <a:schemeClr val="bg2"/>
+          </a:solidFill>
+          <a:ln w="12700">
+            <a:solidFill>
+              <a:schemeClr val="bg2"/>
+            </a:solidFill>
+            <a:prstDash val="solid"/>
+          </a:ln>
+        </p:spPr>
+      </p:sp>
+      <p:sp>
+        <p:nvSpPr>
+          <p:cNvPr id="9" name="Text 6"/>
+          <p:cNvSpPr txBox="1"/>
+          <p:nvPr/>
+        </p:nvSpPr>
+        <p:spPr>
+          <a:xfrm>
+            <a:off x="6949440" y="3886200"/>
+            <a:ext cx="4480560" cy="457200"/>
+          </a:xfrm>
+          <a:prstGeom prst="rect">
+            <a:avLst/>
+          </a:prstGeom>
+          <a:noFill/>
+          <a:ln/>
+        </p:spPr>
+        <p:txBody>
+          <a:bodyPr wrap="square" lIns="0" tIns="0" rIns="0" bIns="0" rtlCol="0" anchor="ctr"/>
+          <a:lstStyle/>
           <a:p>
             <a:pPr indent="0" marL="0">
               <a:buNone/>
             </a:pPr>
             <a:r>
-              <a:rPr lang="en-US" sz="1500" b="1" dirty="0">
-                <a:solidFill>
-                  <a:srgbClr val="14213D"/>
-                </a:solidFill>
-              </a:rPr>
-              <a:t>In our notebook: </a:t>
-            </a:r>
+              <a:rPr lang="en-US" sz="2000" b="1" dirty="0">
+                <a:solidFill>
+                  <a:schemeClr val="accent2"/>
+                </a:solidFill>
+              </a:rPr>
+              <a:t>No improvement 2010–16</a:t>
+            </a:r>
+            <a:endParaRPr lang="en-US" sz="2000" dirty="0"/>
+          </a:p>
+        </p:txBody>
+      </p:sp>
+      <p:sp>
+        <p:nvSpPr>
+          <p:cNvPr id="10" name="Text 7"/>
+          <p:cNvSpPr txBox="1"/>
+          <p:nvPr/>
+        </p:nvSpPr>
+        <p:spPr>
+          <a:xfrm>
+            <a:off x="6949440" y="4434840"/>
+            <a:ext cx="4480560" cy="1143000"/>
+          </a:xfrm>
+          <a:prstGeom prst="rect">
+            <a:avLst/>
+          </a:prstGeom>
+          <a:noFill/>
+          <a:ln/>
+        </p:spPr>
+        <p:txBody>
+          <a:bodyPr wrap="square" lIns="0" tIns="0" rIns="0" bIns="0" rtlCol="0" anchor="t"/>
+          <a:lstStyle/>
+          <a:p>
             <a:pPr indent="0" marL="0">
               <a:buNone/>
             </a:pPr>
@@ -8596,7 +9960,7 @@
                   <a:schemeClr val="tx1"/>
                 </a:solidFill>
               </a:rPr>
-              <a:t>real-data modules (a dose–response test across BoJ regimes, with a 2021–24 placebo, and a tick-size-controlled trend) ready to run on BoJ statistics and Yahoo Finance data.</a:t>
+              <a:t>Large Japanese stocks: spread trend +1.1 bps/yr (t 0.7); +2.6 (t 0.8) with tick-size dummies; volatility +0.6 pts/yr (t 1.3)</a:t>
             </a:r>
             <a:endParaRPr lang="en-US" sz="1500" dirty="0"/>
           </a:p>
@@ -8699,13 +10063,13 @@
             <a:r>
               <a:rPr lang="en-US" sz="3200" b="1" dirty="0">
                 <a:solidFill>
-                  <a:schemeClr val="bg1"/>
+                  <a:schemeClr val="tx2"/>
                 </a:solidFill>
                 <a:latin typeface="Cambria" pitchFamily="34" charset="0"/>
                 <a:ea typeface="Cambria" pitchFamily="34" charset="-122"/>
                 <a:cs typeface="Cambria" pitchFamily="34" charset="-120"/>
               </a:rPr>
-              <a:t>Takeaways</a:t>
+              <a:t>Critical assessment</a:t>
             </a:r>
             <a:endParaRPr lang="en-US" sz="3200" dirty="0"/>
           </a:p>
@@ -8713,14 +10077,41 @@
       </p:sp>
       <p:sp>
         <p:nvSpPr>
-          <p:cNvPr id="3" name="Number 1"/>
+          <p:cNvPr id="3" name="Critique card 1"/>
           <p:cNvSpPr/>
           <p:nvPr/>
         </p:nvSpPr>
         <p:spPr>
           <a:xfrm>
-            <a:off x="548640" y="1508760"/>
-            <a:ext cx="640080" cy="640080"/>
+            <a:off x="548640" y="1371600"/>
+            <a:ext cx="3502152" cy="2194560"/>
+          </a:xfrm>
+          <a:prstGeom prst="roundRect">
+            <a:avLst>
+              <a:gd name="adj" fmla="val 5000"/>
+            </a:avLst>
+          </a:prstGeom>
+          <a:solidFill>
+            <a:schemeClr val="bg2"/>
+          </a:solidFill>
+          <a:ln w="12700">
+            <a:solidFill>
+              <a:schemeClr val="bg2"/>
+            </a:solidFill>
+            <a:prstDash val="solid"/>
+          </a:ln>
+        </p:spPr>
+      </p:sp>
+      <p:sp>
+        <p:nvSpPr>
+          <p:cNvPr id="4" name="Critique 1 circle"/>
+          <p:cNvSpPr/>
+          <p:nvPr/>
+        </p:nvSpPr>
+        <p:spPr>
+          <a:xfrm>
+            <a:off x="777240" y="1600200"/>
+            <a:ext cx="548640" cy="548640"/>
           </a:xfrm>
           <a:prstGeom prst="ellipse">
             <a:avLst/>
@@ -8730,22 +10121,46 @@
           </a:solidFill>
           <a:ln w="12700">
             <a:solidFill>
-              <a:srgbClr val="EB6834"/>
+              <a:schemeClr val="accent2"/>
             </a:solidFill>
             <a:prstDash val="solid"/>
           </a:ln>
         </p:spPr>
       </p:sp>
-      <p:sp>
-        <p:nvSpPr>
-          <p:cNvPr id="4" name="Text 2"/>
+      <p:pic>
+        <p:nvPicPr>
+          <p:cNvPr id="5" name="Critique 1 icon" descr="preencoded.png">    </p:cNvPr>
+          <p:cNvPicPr>
+            <a:picLocks noChangeAspect="1"/>
+          </p:cNvPicPr>
+          <p:nvPr/>
+        </p:nvPicPr>
+        <p:blipFill>
+          <a:blip r:embed="rId1"/>
+          <a:stretch>
+            <a:fillRect/>
+          </a:stretch>
+        </p:blipFill>
+        <p:spPr>
+          <a:xfrm>
+            <a:off x="908914" y="1731874"/>
+            <a:ext cx="285293" cy="285293"/>
+          </a:xfrm>
+          <a:prstGeom prst="rect">
+            <a:avLst/>
+          </a:prstGeom>
+        </p:spPr>
+      </p:pic>
+      <p:sp>
+        <p:nvSpPr>
+          <p:cNvPr id="6" name="Text 3"/>
           <p:cNvSpPr txBox="1"/>
           <p:nvPr/>
         </p:nvSpPr>
         <p:spPr>
           <a:xfrm>
-            <a:off x="548640" y="1508760"/>
-            <a:ext cx="640080" cy="640080"/>
+            <a:off x="1463040" y="1600200"/>
+            <a:ext cx="2404872" cy="548640"/>
           </a:xfrm>
           <a:prstGeom prst="rect">
             <a:avLst/>
@@ -8757,31 +10172,31 @@
           <a:bodyPr wrap="square" lIns="0" tIns="0" rIns="0" bIns="0" rtlCol="0" anchor="ctr"/>
           <a:lstStyle/>
           <a:p>
-            <a:pPr algn="ctr" indent="0" marL="0">
-              <a:buNone/>
-            </a:pPr>
-            <a:r>
-              <a:rPr lang="en-US" sz="2200" b="1" dirty="0">
-                <a:solidFill>
-                  <a:schemeClr val="bg1"/>
-                </a:solidFill>
-              </a:rPr>
-              <a:t>1</a:t>
-            </a:r>
-            <a:endParaRPr lang="en-US" sz="2200" dirty="0"/>
-          </a:p>
-        </p:txBody>
-      </p:sp>
-      <p:sp>
-        <p:nvSpPr>
-          <p:cNvPr id="5" name="Text 3"/>
+            <a:pPr indent="0" marL="0">
+              <a:buNone/>
+            </a:pPr>
+            <a:r>
+              <a:rPr lang="en-US" sz="1700" b="1" dirty="0">
+                <a:solidFill>
+                  <a:schemeClr val="tx2"/>
+                </a:solidFill>
+              </a:rPr>
+              <a:t>Narrow French sample</a:t>
+            </a:r>
+            <a:endParaRPr lang="en-US" sz="1700" dirty="0"/>
+          </a:p>
+        </p:txBody>
+      </p:sp>
+      <p:sp>
+        <p:nvSpPr>
+          <p:cNvPr id="7" name="Text 4"/>
           <p:cNvSpPr txBox="1"/>
           <p:nvPr/>
         </p:nvSpPr>
         <p:spPr>
           <a:xfrm>
-            <a:off x="1463040" y="1463040"/>
-            <a:ext cx="10180015" cy="777240"/>
+            <a:off x="777240" y="2286000"/>
+            <a:ext cx="3044952" cy="1188720"/>
           </a:xfrm>
           <a:prstGeom prst="rect">
             <a:avLst/>
@@ -8790,34 +10205,61 @@
           <a:ln/>
         </p:spPr>
         <p:txBody>
-          <a:bodyPr wrap="square" lIns="0" tIns="0" rIns="0" bIns="0" rtlCol="0" anchor="ctr"/>
+          <a:bodyPr wrap="square" lIns="0" tIns="0" rIns="0" bIns="0" rtlCol="0" anchor="t"/>
           <a:lstStyle/>
           <a:p>
             <a:pPr indent="0" marL="0">
               <a:buNone/>
             </a:pPr>
             <a:r>
-              <a:rPr lang="en-US" sz="1800" dirty="0">
-                <a:solidFill>
-                  <a:schemeClr val="bg1"/>
-                </a:solidFill>
-              </a:rPr>
-              <a:t>ETF arbitrage is rare (32% of days) and small (13% of volume); HFTs carry the trading and do not arbitrage</a:t>
-            </a:r>
-            <a:endParaRPr lang="en-US" sz="1800" dirty="0"/>
-          </a:p>
-        </p:txBody>
-      </p:sp>
-      <p:sp>
-        <p:nvSpPr>
-          <p:cNvPr id="6" name="Number 2"/>
+              <a:rPr lang="en-US" sz="1400" dirty="0">
+                <a:solidFill>
+                  <a:schemeClr val="tx1"/>
+                </a:solidFill>
+              </a:rPr>
+              <a:t>One year (2015); stock tests rest on a single ETF; Table 6 has 255 observations</a:t>
+            </a:r>
+            <a:endParaRPr lang="en-US" sz="1400" dirty="0"/>
+          </a:p>
+        </p:txBody>
+      </p:sp>
+      <p:sp>
+        <p:nvSpPr>
+          <p:cNvPr id="8" name="Critique card 2"/>
           <p:cNvSpPr/>
           <p:nvPr/>
         </p:nvSpPr>
         <p:spPr>
           <a:xfrm>
-            <a:off x="548640" y="2606040"/>
-            <a:ext cx="640080" cy="640080"/>
+            <a:off x="4325112" y="1371600"/>
+            <a:ext cx="3502152" cy="2194560"/>
+          </a:xfrm>
+          <a:prstGeom prst="roundRect">
+            <a:avLst>
+              <a:gd name="adj" fmla="val 5000"/>
+            </a:avLst>
+          </a:prstGeom>
+          <a:solidFill>
+            <a:schemeClr val="bg2"/>
+          </a:solidFill>
+          <a:ln w="12700">
+            <a:solidFill>
+              <a:schemeClr val="bg2"/>
+            </a:solidFill>
+            <a:prstDash val="solid"/>
+          </a:ln>
+        </p:spPr>
+      </p:sp>
+      <p:sp>
+        <p:nvSpPr>
+          <p:cNvPr id="9" name="Critique 2 circle"/>
+          <p:cNvSpPr/>
+          <p:nvPr/>
+        </p:nvSpPr>
+        <p:spPr>
+          <a:xfrm>
+            <a:off x="4553712" y="1600200"/>
+            <a:ext cx="548640" cy="548640"/>
           </a:xfrm>
           <a:prstGeom prst="ellipse">
             <a:avLst/>
@@ -8827,22 +10269,46 @@
           </a:solidFill>
           <a:ln w="12700">
             <a:solidFill>
-              <a:srgbClr val="EB6834"/>
+              <a:schemeClr val="accent2"/>
             </a:solidFill>
             <a:prstDash val="solid"/>
           </a:ln>
         </p:spPr>
       </p:sp>
-      <p:sp>
-        <p:nvSpPr>
-          <p:cNvPr id="7" name="Text 5"/>
+      <p:pic>
+        <p:nvPicPr>
+          <p:cNvPr id="10" name="Critique 2 icon" descr="preencoded.png">    </p:cNvPr>
+          <p:cNvPicPr>
+            <a:picLocks noChangeAspect="1"/>
+          </p:cNvPicPr>
+          <p:nvPr/>
+        </p:nvPicPr>
+        <p:blipFill>
+          <a:blip r:embed="rId2"/>
+          <a:stretch>
+            <a:fillRect/>
+          </a:stretch>
+        </p:blipFill>
+        <p:spPr>
+          <a:xfrm>
+            <a:off x="4685386" y="1731874"/>
+            <a:ext cx="285293" cy="285293"/>
+          </a:xfrm>
+          <a:prstGeom prst="rect">
+            <a:avLst/>
+          </a:prstGeom>
+        </p:spPr>
+      </p:pic>
+      <p:sp>
+        <p:nvSpPr>
+          <p:cNvPr id="11" name="Text 7"/>
           <p:cNvSpPr txBox="1"/>
           <p:nvPr/>
         </p:nvSpPr>
         <p:spPr>
           <a:xfrm>
-            <a:off x="548640" y="2606040"/>
-            <a:ext cx="640080" cy="640080"/>
+            <a:off x="5239512" y="1600200"/>
+            <a:ext cx="2404872" cy="548640"/>
           </a:xfrm>
           <a:prstGeom prst="rect">
             <a:avLst/>
@@ -8854,31 +10320,31 @@
           <a:bodyPr wrap="square" lIns="0" tIns="0" rIns="0" bIns="0" rtlCol="0" anchor="ctr"/>
           <a:lstStyle/>
           <a:p>
-            <a:pPr algn="ctr" indent="0" marL="0">
-              <a:buNone/>
-            </a:pPr>
-            <a:r>
-              <a:rPr lang="en-US" sz="2200" b="1" dirty="0">
-                <a:solidFill>
-                  <a:schemeClr val="bg1"/>
-                </a:solidFill>
-              </a:rPr>
-              <a:t>2</a:t>
-            </a:r>
-            <a:endParaRPr lang="en-US" sz="2200" dirty="0"/>
-          </a:p>
-        </p:txBody>
-      </p:sp>
-      <p:sp>
-        <p:nvSpPr>
-          <p:cNvPr id="8" name="Text 6"/>
+            <a:pPr indent="0" marL="0">
+              <a:buNone/>
+            </a:pPr>
+            <a:r>
+              <a:rPr lang="en-US" sz="1700" b="1" dirty="0">
+                <a:solidFill>
+                  <a:schemeClr val="tx2"/>
+                </a:solidFill>
+              </a:rPr>
+              <a:t>Noisy proxies</a:t>
+            </a:r>
+            <a:endParaRPr lang="en-US" sz="1700" dirty="0"/>
+          </a:p>
+        </p:txBody>
+      </p:sp>
+      <p:sp>
+        <p:nvSpPr>
+          <p:cNvPr id="12" name="Text 8"/>
           <p:cNvSpPr txBox="1"/>
           <p:nvPr/>
         </p:nvSpPr>
         <p:spPr>
           <a:xfrm>
-            <a:off x="1463040" y="2560320"/>
-            <a:ext cx="10180015" cy="777240"/>
+            <a:off x="4553712" y="2286000"/>
+            <a:ext cx="3044952" cy="1188720"/>
           </a:xfrm>
           <a:prstGeom prst="rect">
             <a:avLst/>
@@ -8887,34 +10353,61 @@
           <a:ln/>
         </p:spPr>
         <p:txBody>
-          <a:bodyPr wrap="square" lIns="0" tIns="0" rIns="0" bIns="0" rtlCol="0" anchor="ctr"/>
+          <a:bodyPr wrap="square" lIns="0" tIns="0" rIns="0" bIns="0" rtlCol="0" anchor="t"/>
           <a:lstStyle/>
           <a:p>
             <a:pPr indent="0" marL="0">
               <a:buNone/>
             </a:pPr>
             <a:r>
-              <a:rPr lang="en-US" sz="1800" dirty="0">
-                <a:solidFill>
-                  <a:schemeClr val="bg1"/>
-                </a:solidFill>
-              </a:rPr>
-              <a:t>Arbitrage goes with worse market quality in overweighted stocks; HFT activity goes with narrower spreads</a:t>
-            </a:r>
-            <a:endParaRPr lang="en-US" sz="1800" dirty="0"/>
-          </a:p>
-        </p:txBody>
-      </p:sp>
-      <p:sp>
-        <p:nvSpPr>
-          <p:cNvPr id="9" name="Number 3"/>
+              <a:rPr lang="en-US" sz="1400" dirty="0">
+                <a:solidFill>
+                  <a:schemeClr val="tx1"/>
+                </a:solidFill>
+              </a:rPr>
+              <a:t>Units outstanding settle with lags (up to 5 days in the US); the HFT flag excludes bank desks</a:t>
+            </a:r>
+            <a:endParaRPr lang="en-US" sz="1400" dirty="0"/>
+          </a:p>
+        </p:txBody>
+      </p:sp>
+      <p:sp>
+        <p:nvSpPr>
+          <p:cNvPr id="13" name="Critique card 3"/>
           <p:cNvSpPr/>
           <p:nvPr/>
         </p:nvSpPr>
         <p:spPr>
           <a:xfrm>
-            <a:off x="548640" y="3703320"/>
-            <a:ext cx="640080" cy="640080"/>
+            <a:off x="8101584" y="1371600"/>
+            <a:ext cx="3502152" cy="2194560"/>
+          </a:xfrm>
+          <a:prstGeom prst="roundRect">
+            <a:avLst>
+              <a:gd name="adj" fmla="val 5000"/>
+            </a:avLst>
+          </a:prstGeom>
+          <a:solidFill>
+            <a:schemeClr val="bg2"/>
+          </a:solidFill>
+          <a:ln w="12700">
+            <a:solidFill>
+              <a:schemeClr val="bg2"/>
+            </a:solidFill>
+            <a:prstDash val="solid"/>
+          </a:ln>
+        </p:spPr>
+      </p:sp>
+      <p:sp>
+        <p:nvSpPr>
+          <p:cNvPr id="14" name="Critique 3 circle"/>
+          <p:cNvSpPr/>
+          <p:nvPr/>
+        </p:nvSpPr>
+        <p:spPr>
+          <a:xfrm>
+            <a:off x="8330184" y="1600200"/>
+            <a:ext cx="548640" cy="548640"/>
           </a:xfrm>
           <a:prstGeom prst="ellipse">
             <a:avLst/>
@@ -8924,22 +10417,46 @@
           </a:solidFill>
           <a:ln w="12700">
             <a:solidFill>
-              <a:srgbClr val="EB6834"/>
+              <a:schemeClr val="accent2"/>
             </a:solidFill>
             <a:prstDash val="solid"/>
           </a:ln>
         </p:spPr>
       </p:sp>
-      <p:sp>
-        <p:nvSpPr>
-          <p:cNvPr id="10" name="Text 8"/>
+      <p:pic>
+        <p:nvPicPr>
+          <p:cNvPr id="15" name="Critique 3 icon" descr="preencoded.png">    </p:cNvPr>
+          <p:cNvPicPr>
+            <a:picLocks noChangeAspect="1"/>
+          </p:cNvPicPr>
+          <p:nvPr/>
+        </p:nvPicPr>
+        <p:blipFill>
+          <a:blip r:embed="rId3"/>
+          <a:stretch>
+            <a:fillRect/>
+          </a:stretch>
+        </p:blipFill>
+        <p:spPr>
+          <a:xfrm>
+            <a:off x="8461858" y="1731874"/>
+            <a:ext cx="285293" cy="285293"/>
+          </a:xfrm>
+          <a:prstGeom prst="rect">
+            <a:avLst/>
+          </a:prstGeom>
+        </p:spPr>
+      </p:pic>
+      <p:sp>
+        <p:nvSpPr>
+          <p:cNvPr id="16" name="Text 11"/>
           <p:cNvSpPr txBox="1"/>
           <p:nvPr/>
         </p:nvSpPr>
         <p:spPr>
           <a:xfrm>
-            <a:off x="548640" y="3703320"/>
-            <a:ext cx="640080" cy="640080"/>
+            <a:off x="9015984" y="1600200"/>
+            <a:ext cx="2404872" cy="548640"/>
           </a:xfrm>
           <a:prstGeom prst="rect">
             <a:avLst/>
@@ -8951,31 +10468,31 @@
           <a:bodyPr wrap="square" lIns="0" tIns="0" rIns="0" bIns="0" rtlCol="0" anchor="ctr"/>
           <a:lstStyle/>
           <a:p>
-            <a:pPr algn="ctr" indent="0" marL="0">
-              <a:buNone/>
-            </a:pPr>
-            <a:r>
-              <a:rPr lang="en-US" sz="2200" b="1" dirty="0">
-                <a:solidFill>
-                  <a:schemeClr val="bg1"/>
-                </a:solidFill>
-              </a:rPr>
-              <a:t>3</a:t>
-            </a:r>
-            <a:endParaRPr lang="en-US" sz="2200" dirty="0"/>
-          </a:p>
-        </p:txBody>
-      </p:sp>
-      <p:sp>
-        <p:nvSpPr>
-          <p:cNvPr id="11" name="Text 9"/>
+            <a:pPr indent="0" marL="0">
+              <a:buNone/>
+            </a:pPr>
+            <a:r>
+              <a:rPr lang="en-US" sz="1700" b="1" dirty="0">
+                <a:solidFill>
+                  <a:schemeClr val="tx2"/>
+                </a:solidFill>
+              </a:rPr>
+              <a:t>Creations only</a:t>
+            </a:r>
+            <a:endParaRPr lang="en-US" sz="1700" dirty="0"/>
+          </a:p>
+        </p:txBody>
+      </p:sp>
+      <p:sp>
+        <p:nvSpPr>
+          <p:cNvPr id="17" name="Text 12"/>
           <p:cNvSpPr txBox="1"/>
           <p:nvPr/>
         </p:nvSpPr>
         <p:spPr>
           <a:xfrm>
-            <a:off x="1463040" y="3657600"/>
-            <a:ext cx="10180015" cy="777240"/>
+            <a:off x="8330184" y="2286000"/>
+            <a:ext cx="3044952" cy="1188720"/>
           </a:xfrm>
           <a:prstGeom prst="rect">
             <a:avLst/>
@@ -8984,34 +10501,61 @@
           <a:ln/>
         </p:spPr>
         <p:txBody>
-          <a:bodyPr wrap="square" lIns="0" tIns="0" rIns="0" bIns="0" rtlCol="0" anchor="ctr"/>
+          <a:bodyPr wrap="square" lIns="0" tIns="0" rIns="0" bIns="0" rtlCol="0" anchor="t"/>
           <a:lstStyle/>
           <a:p>
             <a:pPr indent="0" marL="0">
               <a:buNone/>
             </a:pPr>
             <a:r>
-              <a:rPr lang="en-US" sz="1800" dirty="0">
-                <a:solidFill>
-                  <a:schemeClr val="bg1"/>
-                </a:solidFill>
-              </a:rPr>
-              <a:t>The BoJ experiment shows the arbitrage damage is causal, but local and transitory</a:t>
-            </a:r>
-            <a:endParaRPr lang="en-US" sz="1800" dirty="0"/>
-          </a:p>
-        </p:txBody>
-      </p:sp>
-      <p:sp>
-        <p:nvSpPr>
-          <p:cNvPr id="12" name="Number 4"/>
+              <a:rPr lang="en-US" sz="1400" dirty="0">
+                <a:solidFill>
+                  <a:schemeClr val="tx1"/>
+                </a:solidFill>
+              </a:rPr>
+              <a:t>The BoJ only bought, so redemptions — the fragility scenario — are untested</a:t>
+            </a:r>
+            <a:endParaRPr lang="en-US" sz="1400" dirty="0"/>
+          </a:p>
+        </p:txBody>
+      </p:sp>
+      <p:sp>
+        <p:nvSpPr>
+          <p:cNvPr id="18" name="Critique card 4"/>
           <p:cNvSpPr/>
           <p:nvPr/>
         </p:nvSpPr>
         <p:spPr>
           <a:xfrm>
-            <a:off x="548640" y="4800600"/>
-            <a:ext cx="640080" cy="640080"/>
+            <a:off x="548640" y="3794760"/>
+            <a:ext cx="3502152" cy="2194560"/>
+          </a:xfrm>
+          <a:prstGeom prst="roundRect">
+            <a:avLst>
+              <a:gd name="adj" fmla="val 5000"/>
+            </a:avLst>
+          </a:prstGeom>
+          <a:solidFill>
+            <a:schemeClr val="bg2"/>
+          </a:solidFill>
+          <a:ln w="12700">
+            <a:solidFill>
+              <a:schemeClr val="bg2"/>
+            </a:solidFill>
+            <a:prstDash val="solid"/>
+          </a:ln>
+        </p:spPr>
+      </p:sp>
+      <p:sp>
+        <p:nvSpPr>
+          <p:cNvPr id="19" name="Critique 4 circle"/>
+          <p:cNvSpPr/>
+          <p:nvPr/>
+        </p:nvSpPr>
+        <p:spPr>
+          <a:xfrm>
+            <a:off x="777240" y="4023360"/>
+            <a:ext cx="548640" cy="548640"/>
           </a:xfrm>
           <a:prstGeom prst="ellipse">
             <a:avLst/>
@@ -9021,22 +10565,46 @@
           </a:solidFill>
           <a:ln w="12700">
             <a:solidFill>
-              <a:srgbClr val="EB6834"/>
+              <a:schemeClr val="accent2"/>
             </a:solidFill>
             <a:prstDash val="solid"/>
           </a:ln>
         </p:spPr>
       </p:sp>
-      <p:sp>
-        <p:nvSpPr>
-          <p:cNvPr id="13" name="Text 11"/>
+      <p:pic>
+        <p:nvPicPr>
+          <p:cNvPr id="20" name="Critique 4 icon" descr="preencoded.png">    </p:cNvPr>
+          <p:cNvPicPr>
+            <a:picLocks noChangeAspect="1"/>
+          </p:cNvPicPr>
+          <p:nvPr/>
+        </p:nvPicPr>
+        <p:blipFill>
+          <a:blip r:embed="rId4"/>
+          <a:stretch>
+            <a:fillRect/>
+          </a:stretch>
+        </p:blipFill>
+        <p:spPr>
+          <a:xfrm>
+            <a:off x="908914" y="4155034"/>
+            <a:ext cx="285293" cy="285293"/>
+          </a:xfrm>
+          <a:prstGeom prst="rect">
+            <a:avLst/>
+          </a:prstGeom>
+        </p:spPr>
+      </p:pic>
+      <p:sp>
+        <p:nvSpPr>
+          <p:cNvPr id="21" name="Text 15"/>
           <p:cNvSpPr txBox="1"/>
           <p:nvPr/>
         </p:nvSpPr>
         <p:spPr>
           <a:xfrm>
-            <a:off x="548640" y="4800600"/>
-            <a:ext cx="640080" cy="640080"/>
+            <a:off x="1463040" y="4023360"/>
+            <a:ext cx="2404872" cy="548640"/>
           </a:xfrm>
           <a:prstGeom prst="rect">
             <a:avLst/>
@@ -9048,31 +10616,31 @@
           <a:bodyPr wrap="square" lIns="0" tIns="0" rIns="0" bIns="0" rtlCol="0" anchor="ctr"/>
           <a:lstStyle/>
           <a:p>
-            <a:pPr algn="ctr" indent="0" marL="0">
-              <a:buNone/>
-            </a:pPr>
-            <a:r>
-              <a:rPr lang="en-US" sz="2200" b="1" dirty="0">
-                <a:solidFill>
-                  <a:schemeClr val="bg1"/>
-                </a:solidFill>
-              </a:rPr>
-              <a:t>4</a:t>
-            </a:r>
-            <a:endParaRPr lang="en-US" sz="2200" dirty="0"/>
-          </a:p>
-        </p:txBody>
-      </p:sp>
-      <p:sp>
-        <p:nvSpPr>
-          <p:cNvPr id="14" name="Text 12"/>
+            <a:pPr indent="0" marL="0">
+              <a:buNone/>
+            </a:pPr>
+            <a:r>
+              <a:rPr lang="en-US" sz="1700" b="1" dirty="0">
+                <a:solidFill>
+                  <a:schemeClr val="tx2"/>
+                </a:solidFill>
+              </a:rPr>
+              <a:t>Selected days, extreme dose</a:t>
+            </a:r>
+            <a:endParaRPr lang="en-US" sz="1700" dirty="0"/>
+          </a:p>
+        </p:txBody>
+      </p:sp>
+      <p:sp>
+        <p:nvSpPr>
+          <p:cNvPr id="22" name="Text 16"/>
           <p:cNvSpPr txBox="1"/>
           <p:nvPr/>
         </p:nvSpPr>
         <p:spPr>
           <a:xfrm>
-            <a:off x="1463040" y="4754880"/>
-            <a:ext cx="10180015" cy="777240"/>
+            <a:off x="777240" y="4709160"/>
+            <a:ext cx="3044952" cy="1188720"/>
           </a:xfrm>
           <a:prstGeom prst="rect">
             <a:avLst/>
@@ -9081,34 +10649,110 @@
           <a:ln/>
         </p:spPr>
         <p:txBody>
-          <a:bodyPr wrap="square" lIns="0" tIns="0" rIns="0" bIns="0" rtlCol="0" anchor="ctr"/>
+          <a:bodyPr wrap="square" lIns="0" tIns="0" rIns="0" bIns="0" rtlCol="0" anchor="t"/>
           <a:lstStyle/>
           <a:p>
             <a:pPr indent="0" marL="0">
               <a:buNone/>
             </a:pPr>
             <a:r>
-              <a:rPr lang="en-US" sz="1800" dirty="0">
-                <a:solidFill>
-                  <a:schemeClr val="bg1"/>
-                </a:solidFill>
-              </a:rPr>
-              <a:t>Our simulations confirm the design can detect both channels; the long-run claim still needs a cleaner test</a:t>
-            </a:r>
-            <a:endParaRPr lang="en-US" sz="1800" dirty="0"/>
-          </a:p>
-        </p:txBody>
-      </p:sp>
-      <p:sp>
-        <p:nvSpPr>
-          <p:cNvPr id="15" name="Text 13"/>
+              <a:rPr lang="en-US" sz="1400" dirty="0">
+                <a:solidFill>
+                  <a:schemeClr val="tx1"/>
+                </a:solidFill>
+              </a:rPr>
+              <a:t>Purchases followed weak mornings; ¥70bn per day is far from routine arbitrage</a:t>
+            </a:r>
+            <a:endParaRPr lang="en-US" sz="1400" dirty="0"/>
+          </a:p>
+        </p:txBody>
+      </p:sp>
+      <p:sp>
+        <p:nvSpPr>
+          <p:cNvPr id="23" name="Critique card 5"/>
+          <p:cNvSpPr/>
+          <p:nvPr/>
+        </p:nvSpPr>
+        <p:spPr>
+          <a:xfrm>
+            <a:off x="4325112" y="3794760"/>
+            <a:ext cx="3502152" cy="2194560"/>
+          </a:xfrm>
+          <a:prstGeom prst="roundRect">
+            <a:avLst>
+              <a:gd name="adj" fmla="val 5000"/>
+            </a:avLst>
+          </a:prstGeom>
+          <a:solidFill>
+            <a:schemeClr val="bg2"/>
+          </a:solidFill>
+          <a:ln w="12700">
+            <a:solidFill>
+              <a:schemeClr val="bg2"/>
+            </a:solidFill>
+            <a:prstDash val="solid"/>
+          </a:ln>
+        </p:spPr>
+      </p:sp>
+      <p:sp>
+        <p:nvSpPr>
+          <p:cNvPr id="24" name="Critique 5 circle"/>
+          <p:cNvSpPr/>
+          <p:nvPr/>
+        </p:nvSpPr>
+        <p:spPr>
+          <a:xfrm>
+            <a:off x="4553712" y="4023360"/>
+            <a:ext cx="548640" cy="548640"/>
+          </a:xfrm>
+          <a:prstGeom prst="ellipse">
+            <a:avLst/>
+          </a:prstGeom>
+          <a:solidFill>
+            <a:schemeClr val="accent1"/>
+          </a:solidFill>
+          <a:ln w="12700">
+            <a:solidFill>
+              <a:schemeClr val="accent1"/>
+            </a:solidFill>
+            <a:prstDash val="solid"/>
+          </a:ln>
+        </p:spPr>
+      </p:sp>
+      <p:pic>
+        <p:nvPicPr>
+          <p:cNvPr id="25" name="Critique 5 icon" descr="preencoded.png">    </p:cNvPr>
+          <p:cNvPicPr>
+            <a:picLocks noChangeAspect="1"/>
+          </p:cNvPicPr>
+          <p:nvPr/>
+        </p:nvPicPr>
+        <p:blipFill>
+          <a:blip r:embed="rId5"/>
+          <a:stretch>
+            <a:fillRect/>
+          </a:stretch>
+        </p:blipFill>
+        <p:spPr>
+          <a:xfrm>
+            <a:off x="4685386" y="4155034"/>
+            <a:ext cx="285293" cy="285293"/>
+          </a:xfrm>
+          <a:prstGeom prst="rect">
+            <a:avLst/>
+          </a:prstGeom>
+        </p:spPr>
+      </p:pic>
+      <p:sp>
+        <p:nvSpPr>
+          <p:cNvPr id="26" name="Text 19"/>
           <p:cNvSpPr txBox="1"/>
           <p:nvPr/>
         </p:nvSpPr>
         <p:spPr>
           <a:xfrm>
-            <a:off x="548640" y="5989320"/>
-            <a:ext cx="11094415" cy="365760"/>
+            <a:off x="5239512" y="4023360"/>
+            <a:ext cx="2404872" cy="548640"/>
           </a:xfrm>
           <a:prstGeom prst="rect">
             <a:avLst/>
@@ -9124,14 +10768,198 @@
               <a:buNone/>
             </a:pPr>
             <a:r>
-              <a:rPr lang="en-US" sz="1200" dirty="0">
-                <a:solidFill>
-                  <a:srgbClr val="AFC3E0"/>
-                </a:solidFill>
-              </a:rPr>
-              <a:t>Notebook: github.com/Mnntn/Finances → ETF_effects_The_role_of_primary_versus_secondary_market_activities/etf_effects.ipynb</a:t>
-            </a:r>
-            <a:endParaRPr lang="en-US" sz="1200" dirty="0"/>
+              <a:rPr lang="en-US" sz="1700" b="1" dirty="0">
+                <a:solidFill>
+                  <a:schemeClr val="tx2"/>
+                </a:solidFill>
+              </a:rPr>
+              <a:t>Trend ≠ causality</a:t>
+            </a:r>
+            <a:endParaRPr lang="en-US" sz="1700" dirty="0"/>
+          </a:p>
+        </p:txBody>
+      </p:sp>
+      <p:sp>
+        <p:nvSpPr>
+          <p:cNvPr id="27" name="Text 20"/>
+          <p:cNvSpPr txBox="1"/>
+          <p:nvPr/>
+        </p:nvSpPr>
+        <p:spPr>
+          <a:xfrm>
+            <a:off x="4553712" y="4709160"/>
+            <a:ext cx="3044952" cy="1188720"/>
+          </a:xfrm>
+          <a:prstGeom prst="rect">
+            <a:avLst/>
+          </a:prstGeom>
+          <a:noFill/>
+          <a:ln/>
+        </p:spPr>
+        <p:txBody>
+          <a:bodyPr wrap="square" lIns="0" tIns="0" rIns="0" bIns="0" rtlCol="0" anchor="t"/>
+          <a:lstStyle/>
+          <a:p>
+            <a:pPr indent="0" marL="0">
+              <a:buNone/>
+            </a:pPr>
+            <a:r>
+              <a:rPr lang="en-US" sz="1400" dirty="0">
+                <a:solidFill>
+                  <a:schemeClr val="tx1"/>
+                </a:solidFill>
+              </a:rPr>
+              <a:t>TSE cut tick sizes for TOPIX100 in 2014–15, mechanically narrowing spreads; trend regressions need Newey–West SEs</a:t>
+            </a:r>
+            <a:endParaRPr lang="en-US" sz="1400" dirty="0"/>
+          </a:p>
+        </p:txBody>
+      </p:sp>
+      <p:sp>
+        <p:nvSpPr>
+          <p:cNvPr id="28" name="Critique card 6"/>
+          <p:cNvSpPr/>
+          <p:nvPr/>
+        </p:nvSpPr>
+        <p:spPr>
+          <a:xfrm>
+            <a:off x="8101584" y="3794760"/>
+            <a:ext cx="3502152" cy="2194560"/>
+          </a:xfrm>
+          <a:prstGeom prst="roundRect">
+            <a:avLst>
+              <a:gd name="adj" fmla="val 5000"/>
+            </a:avLst>
+          </a:prstGeom>
+          <a:solidFill>
+            <a:schemeClr val="bg2"/>
+          </a:solidFill>
+          <a:ln w="12700">
+            <a:solidFill>
+              <a:schemeClr val="bg2"/>
+            </a:solidFill>
+            <a:prstDash val="solid"/>
+          </a:ln>
+        </p:spPr>
+      </p:sp>
+      <p:sp>
+        <p:nvSpPr>
+          <p:cNvPr id="29" name="Critique 6 circle"/>
+          <p:cNvSpPr/>
+          <p:nvPr/>
+        </p:nvSpPr>
+        <p:spPr>
+          <a:xfrm>
+            <a:off x="8330184" y="4023360"/>
+            <a:ext cx="548640" cy="548640"/>
+          </a:xfrm>
+          <a:prstGeom prst="ellipse">
+            <a:avLst/>
+          </a:prstGeom>
+          <a:solidFill>
+            <a:schemeClr val="accent1"/>
+          </a:solidFill>
+          <a:ln w="12700">
+            <a:solidFill>
+              <a:schemeClr val="accent1"/>
+            </a:solidFill>
+            <a:prstDash val="solid"/>
+          </a:ln>
+        </p:spPr>
+      </p:sp>
+      <p:pic>
+        <p:nvPicPr>
+          <p:cNvPr id="30" name="Critique 6 icon" descr="preencoded.png">    </p:cNvPr>
+          <p:cNvPicPr>
+            <a:picLocks noChangeAspect="1"/>
+          </p:cNvPicPr>
+          <p:nvPr/>
+        </p:nvPicPr>
+        <p:blipFill>
+          <a:blip r:embed="rId6"/>
+          <a:stretch>
+            <a:fillRect/>
+          </a:stretch>
+        </p:blipFill>
+        <p:spPr>
+          <a:xfrm>
+            <a:off x="8461858" y="4155034"/>
+            <a:ext cx="285293" cy="285293"/>
+          </a:xfrm>
+          <a:prstGeom prst="rect">
+            <a:avLst/>
+          </a:prstGeom>
+        </p:spPr>
+      </p:pic>
+      <p:sp>
+        <p:nvSpPr>
+          <p:cNvPr id="31" name="Text 23"/>
+          <p:cNvSpPr txBox="1"/>
+          <p:nvPr/>
+        </p:nvSpPr>
+        <p:spPr>
+          <a:xfrm>
+            <a:off x="9015984" y="4023360"/>
+            <a:ext cx="2404872" cy="548640"/>
+          </a:xfrm>
+          <a:prstGeom prst="rect">
+            <a:avLst/>
+          </a:prstGeom>
+          <a:noFill/>
+          <a:ln/>
+        </p:spPr>
+        <p:txBody>
+          <a:bodyPr wrap="square" lIns="0" tIns="0" rIns="0" bIns="0" rtlCol="0" anchor="ctr"/>
+          <a:lstStyle/>
+          <a:p>
+            <a:pPr indent="0" marL="0">
+              <a:buNone/>
+            </a:pPr>
+            <a:r>
+              <a:rPr lang="en-US" sz="1700" b="1" dirty="0">
+                <a:solidFill>
+                  <a:schemeClr val="tx2"/>
+                </a:solidFill>
+              </a:rPr>
+              <a:t>Units &amp; consistency</a:t>
+            </a:r>
+            <a:endParaRPr lang="en-US" sz="1700" dirty="0"/>
+          </a:p>
+        </p:txBody>
+      </p:sp>
+      <p:sp>
+        <p:nvSpPr>
+          <p:cNvPr id="32" name="Text 24"/>
+          <p:cNvSpPr txBox="1"/>
+          <p:nvPr/>
+        </p:nvSpPr>
+        <p:spPr>
+          <a:xfrm>
+            <a:off x="8330184" y="4709160"/>
+            <a:ext cx="3044952" cy="1188720"/>
+          </a:xfrm>
+          <a:prstGeom prst="rect">
+            <a:avLst/>
+          </a:prstGeom>
+          <a:noFill/>
+          <a:ln/>
+        </p:spPr>
+        <p:txBody>
+          <a:bodyPr wrap="square" lIns="0" tIns="0" rIns="0" bIns="0" rtlCol="0" anchor="t"/>
+          <a:lstStyle/>
+          <a:p>
+            <a:pPr indent="0" marL="0">
+              <a:buNone/>
+            </a:pPr>
+            <a:r>
+              <a:rPr lang="en-US" sz="1400" dirty="0">
+                <a:solidFill>
+                  <a:schemeClr val="tx1"/>
+                </a:solidFill>
+              </a:rPr>
+              <a:t>PMStockActivity mean 0.33% vs. ≈0.01–0.02% implied by ¥70bn on ¥300–600trn; text vs. Table 9 slopes differ</a:t>
+            </a:r>
+            <a:endParaRPr lang="en-US" sz="1400" dirty="0"/>
           </a:p>
         </p:txBody>
       </p:sp>
@@ -9165,7 +10993,7 @@
             <a:lvl1pPr>
               <a:defRPr sz="1000">
                 <a:solidFill>
-                  <a:srgbClr val="AFC3E0"/>
+                  <a:srgbClr val="6B7280"/>
                 </a:solidFill>
               </a:defRPr>
             </a:lvl1pPr>
@@ -9844,7 +11672,7 @@
                 <a:ea typeface="Cambria" pitchFamily="34" charset="-122"/>
                 <a:cs typeface="Cambria" pitchFamily="34" charset="-120"/>
               </a:rPr>
-              <a:t>References</a:t>
+              <a:t>Since publication: the BoJ is now selling</a:t>
             </a:r>
             <a:endParaRPr lang="en-US" sz="3200" dirty="0"/>
           </a:p>
@@ -9852,14 +11680,62 @@
       </p:sp>
       <p:sp>
         <p:nvSpPr>
-          <p:cNvPr id="3" name="Text 1"/>
+          <p:cNvPr id="3" name="Timeline"/>
+          <p:cNvSpPr/>
+          <p:nvPr/>
+        </p:nvSpPr>
+        <p:spPr>
+          <a:xfrm>
+            <a:off x="1005840" y="2331720"/>
+            <a:ext cx="10241280" cy="0"/>
+          </a:xfrm>
+          <a:prstGeom prst="line">
+            <a:avLst/>
+          </a:prstGeom>
+          <a:noFill/>
+          <a:ln w="38100">
+            <a:solidFill>
+              <a:srgbClr val="CBD5E1"/>
+            </a:solidFill>
+            <a:prstDash val="solid"/>
+          </a:ln>
+        </p:spPr>
+      </p:sp>
+      <p:sp>
+        <p:nvSpPr>
+          <p:cNvPr id="4" name="Timeline dot 1"/>
+          <p:cNvSpPr/>
+          <p:nvPr/>
+        </p:nvSpPr>
+        <p:spPr>
+          <a:xfrm>
+            <a:off x="822960" y="2103120"/>
+            <a:ext cx="457200" cy="457200"/>
+          </a:xfrm>
+          <a:prstGeom prst="ellipse">
+            <a:avLst/>
+          </a:prstGeom>
+          <a:solidFill>
+            <a:schemeClr val="accent2"/>
+          </a:solidFill>
+          <a:ln w="25400">
+            <a:solidFill>
+              <a:srgbClr val="FFFFFF"/>
+            </a:solidFill>
+            <a:prstDash val="solid"/>
+          </a:ln>
+        </p:spPr>
+      </p:sp>
+      <p:sp>
+        <p:nvSpPr>
+          <p:cNvPr id="5" name="Text 3"/>
           <p:cNvSpPr txBox="1"/>
           <p:nvPr/>
         </p:nvSpPr>
         <p:spPr>
           <a:xfrm>
-            <a:off x="548640" y="1325880"/>
-            <a:ext cx="11094415" cy="4846320"/>
+            <a:off x="777240" y="1417320"/>
+            <a:ext cx="2651760" cy="457200"/>
           </a:xfrm>
           <a:prstGeom prst="rect">
             <a:avLst/>
@@ -9868,13 +11744,46 @@
           <a:ln/>
         </p:spPr>
         <p:txBody>
+          <a:bodyPr wrap="square" lIns="0" tIns="0" rIns="0" bIns="0" rtlCol="0" anchor="ctr"/>
+          <a:lstStyle/>
+          <a:p>
+            <a:pPr indent="0" marL="0">
+              <a:buNone/>
+            </a:pPr>
+            <a:r>
+              <a:rPr lang="en-US" sz="1800" b="1" dirty="0">
+                <a:solidFill>
+                  <a:schemeClr val="tx2"/>
+                </a:solidFill>
+              </a:rPr>
+              <a:t>Mar 2024</a:t>
+            </a:r>
+            <a:endParaRPr lang="en-US" sz="1800" dirty="0"/>
+          </a:p>
+        </p:txBody>
+      </p:sp>
+      <p:sp>
+        <p:nvSpPr>
+          <p:cNvPr id="6" name="Text 4"/>
+          <p:cNvSpPr txBox="1"/>
+          <p:nvPr/>
+        </p:nvSpPr>
+        <p:spPr>
+          <a:xfrm>
+            <a:off x="777240" y="2743200"/>
+            <a:ext cx="2560320" cy="914400"/>
+          </a:xfrm>
+          <a:prstGeom prst="rect">
+            <a:avLst/>
+          </a:prstGeom>
+          <a:noFill/>
+          <a:ln/>
+        </p:spPr>
+        <p:txBody>
           <a:bodyPr wrap="square" lIns="0" tIns="0" rIns="0" bIns="0" rtlCol="0" anchor="t"/>
           <a:lstStyle/>
           <a:p>
             <a:pPr indent="0" marL="0">
-              <a:spcAft>
-                <a:spcPts val="800"/>
-              </a:spcAft>
               <a:buNone/>
             </a:pPr>
             <a:r>
@@ -9883,15 +11792,95 @@
                   <a:schemeClr val="tx1"/>
                 </a:solidFill>
               </a:rPr>
-              <a:t>Comerton-Forde, C., Marta, T. (2025). ETF effects: The role of primary versus secondary market activities. Journal of Financial Markets 75, 100983.</a:t>
+              <a:t>BoJ ends new ETF purchases</a:t>
             </a:r>
             <a:endParaRPr lang="en-US" sz="1400" dirty="0"/>
           </a:p>
+        </p:txBody>
+      </p:sp>
+      <p:sp>
+        <p:nvSpPr>
+          <p:cNvPr id="7" name="Timeline dot 2"/>
+          <p:cNvSpPr/>
+          <p:nvPr/>
+        </p:nvSpPr>
+        <p:spPr>
+          <a:xfrm>
+            <a:off x="3657600" y="2103120"/>
+            <a:ext cx="457200" cy="457200"/>
+          </a:xfrm>
+          <a:prstGeom prst="ellipse">
+            <a:avLst/>
+          </a:prstGeom>
+          <a:solidFill>
+            <a:schemeClr val="accent2"/>
+          </a:solidFill>
+          <a:ln w="25400">
+            <a:solidFill>
+              <a:srgbClr val="FFFFFF"/>
+            </a:solidFill>
+            <a:prstDash val="solid"/>
+          </a:ln>
+        </p:spPr>
+      </p:sp>
+      <p:sp>
+        <p:nvSpPr>
+          <p:cNvPr id="8" name="Text 6"/>
+          <p:cNvSpPr txBox="1"/>
+          <p:nvPr/>
+        </p:nvSpPr>
+        <p:spPr>
+          <a:xfrm>
+            <a:off x="3611880" y="1417320"/>
+            <a:ext cx="2651760" cy="457200"/>
+          </a:xfrm>
+          <a:prstGeom prst="rect">
+            <a:avLst/>
+          </a:prstGeom>
+          <a:noFill/>
+          <a:ln/>
+        </p:spPr>
+        <p:txBody>
+          <a:bodyPr wrap="square" lIns="0" tIns="0" rIns="0" bIns="0" rtlCol="0" anchor="ctr"/>
+          <a:lstStyle/>
           <a:p>
             <a:pPr indent="0" marL="0">
-              <a:spcAft>
-                <a:spcPts val="800"/>
-              </a:spcAft>
+              <a:buNone/>
+            </a:pPr>
+            <a:r>
+              <a:rPr lang="en-US" sz="1800" b="1" dirty="0">
+                <a:solidFill>
+                  <a:schemeClr val="tx2"/>
+                </a:solidFill>
+              </a:rPr>
+              <a:t>Sep 2025</a:t>
+            </a:r>
+            <a:endParaRPr lang="en-US" sz="1800" dirty="0"/>
+          </a:p>
+        </p:txBody>
+      </p:sp>
+      <p:sp>
+        <p:nvSpPr>
+          <p:cNvPr id="9" name="Text 7"/>
+          <p:cNvSpPr txBox="1"/>
+          <p:nvPr/>
+        </p:nvSpPr>
+        <p:spPr>
+          <a:xfrm>
+            <a:off x="3611880" y="2743200"/>
+            <a:ext cx="2560320" cy="914400"/>
+          </a:xfrm>
+          <a:prstGeom prst="rect">
+            <a:avLst/>
+          </a:prstGeom>
+          <a:noFill/>
+          <a:ln/>
+        </p:spPr>
+        <p:txBody>
+          <a:bodyPr wrap="square" lIns="0" tIns="0" rIns="0" bIns="0" rtlCol="0" anchor="t"/>
+          <a:lstStyle/>
+          <a:p>
+            <a:pPr indent="0" marL="0">
               <a:buNone/>
             </a:pPr>
             <a:r>
@@ -9900,15 +11889,95 @@
                   <a:schemeClr val="tx1"/>
                 </a:solidFill>
               </a:rPr>
-              <a:t>Ben-David, I., Franzoni, F., Moussawi, R. (2018). Do ETFs increase volatility? Journal of Finance 73, 2471–2535.</a:t>
+              <a:t>Decides to sell ≈ ¥330bn a year (book value), ≈0.05% of turnover</a:t>
             </a:r>
             <a:endParaRPr lang="en-US" sz="1400" dirty="0"/>
           </a:p>
+        </p:txBody>
+      </p:sp>
+      <p:sp>
+        <p:nvSpPr>
+          <p:cNvPr id="10" name="Timeline dot 3"/>
+          <p:cNvSpPr/>
+          <p:nvPr/>
+        </p:nvSpPr>
+        <p:spPr>
+          <a:xfrm>
+            <a:off x="6492240" y="2103120"/>
+            <a:ext cx="457200" cy="457200"/>
+          </a:xfrm>
+          <a:prstGeom prst="ellipse">
+            <a:avLst/>
+          </a:prstGeom>
+          <a:solidFill>
+            <a:schemeClr val="accent2"/>
+          </a:solidFill>
+          <a:ln w="25400">
+            <a:solidFill>
+              <a:srgbClr val="FFFFFF"/>
+            </a:solidFill>
+            <a:prstDash val="solid"/>
+          </a:ln>
+        </p:spPr>
+      </p:sp>
+      <p:sp>
+        <p:nvSpPr>
+          <p:cNvPr id="11" name="Text 9"/>
+          <p:cNvSpPr txBox="1"/>
+          <p:nvPr/>
+        </p:nvSpPr>
+        <p:spPr>
+          <a:xfrm>
+            <a:off x="6446520" y="1417320"/>
+            <a:ext cx="2651760" cy="457200"/>
+          </a:xfrm>
+          <a:prstGeom prst="rect">
+            <a:avLst/>
+          </a:prstGeom>
+          <a:noFill/>
+          <a:ln/>
+        </p:spPr>
+        <p:txBody>
+          <a:bodyPr wrap="square" lIns="0" tIns="0" rIns="0" bIns="0" rtlCol="0" anchor="ctr"/>
+          <a:lstStyle/>
           <a:p>
             <a:pPr indent="0" marL="0">
-              <a:spcAft>
-                <a:spcPts val="800"/>
-              </a:spcAft>
+              <a:buNone/>
+            </a:pPr>
+            <a:r>
+              <a:rPr lang="en-US" sz="1800" b="1" dirty="0">
+                <a:solidFill>
+                  <a:schemeClr val="tx2"/>
+                </a:solidFill>
+              </a:rPr>
+              <a:t>Jan 2026</a:t>
+            </a:r>
+            <a:endParaRPr lang="en-US" sz="1800" dirty="0"/>
+          </a:p>
+        </p:txBody>
+      </p:sp>
+      <p:sp>
+        <p:nvSpPr>
+          <p:cNvPr id="12" name="Text 10"/>
+          <p:cNvSpPr txBox="1"/>
+          <p:nvPr/>
+        </p:nvSpPr>
+        <p:spPr>
+          <a:xfrm>
+            <a:off x="6446520" y="2743200"/>
+            <a:ext cx="2560320" cy="914400"/>
+          </a:xfrm>
+          <a:prstGeom prst="rect">
+            <a:avLst/>
+          </a:prstGeom>
+          <a:noFill/>
+          <a:ln/>
+        </p:spPr>
+        <p:txBody>
+          <a:bodyPr wrap="square" lIns="0" tIns="0" rIns="0" bIns="0" rtlCol="0" anchor="t"/>
+          <a:lstStyle/>
+          <a:p>
+            <a:pPr indent="0" marL="0">
               <a:buNone/>
             </a:pPr>
             <a:r>
@@ -9917,15 +11986,95 @@
                   <a:schemeClr val="tx1"/>
                 </a:solidFill>
               </a:rPr>
-              <a:t>Malamud, S. (2015). A dynamic equilibrium model of ETFs. Swiss Finance Institute Research Paper 15-37.</a:t>
+              <a:t>Sales begin; full exit would take over a century</a:t>
             </a:r>
             <a:endParaRPr lang="en-US" sz="1400" dirty="0"/>
           </a:p>
+        </p:txBody>
+      </p:sp>
+      <p:sp>
+        <p:nvSpPr>
+          <p:cNvPr id="13" name="Timeline dot 4"/>
+          <p:cNvSpPr/>
+          <p:nvPr/>
+        </p:nvSpPr>
+        <p:spPr>
+          <a:xfrm>
+            <a:off x="9326880" y="2103120"/>
+            <a:ext cx="457200" cy="457200"/>
+          </a:xfrm>
+          <a:prstGeom prst="ellipse">
+            <a:avLst/>
+          </a:prstGeom>
+          <a:solidFill>
+            <a:schemeClr val="accent1"/>
+          </a:solidFill>
+          <a:ln w="25400">
+            <a:solidFill>
+              <a:srgbClr val="FFFFFF"/>
+            </a:solidFill>
+            <a:prstDash val="solid"/>
+          </a:ln>
+        </p:spPr>
+      </p:sp>
+      <p:sp>
+        <p:nvSpPr>
+          <p:cNvPr id="14" name="Text 12"/>
+          <p:cNvSpPr txBox="1"/>
+          <p:nvPr/>
+        </p:nvSpPr>
+        <p:spPr>
+          <a:xfrm>
+            <a:off x="9281160" y="1417320"/>
+            <a:ext cx="2651760" cy="457200"/>
+          </a:xfrm>
+          <a:prstGeom prst="rect">
+            <a:avLst/>
+          </a:prstGeom>
+          <a:noFill/>
+          <a:ln/>
+        </p:spPr>
+        <p:txBody>
+          <a:bodyPr wrap="square" lIns="0" tIns="0" rIns="0" bIns="0" rtlCol="0" anchor="ctr"/>
+          <a:lstStyle/>
           <a:p>
             <a:pPr indent="0" marL="0">
-              <a:spcAft>
-                <a:spcPts val="800"/>
-              </a:spcAft>
+              <a:buNone/>
+            </a:pPr>
+            <a:r>
+              <a:rPr lang="en-US" sz="1800" b="1" dirty="0">
+                <a:solidFill>
+                  <a:schemeClr val="tx2"/>
+                </a:solidFill>
+              </a:rPr>
+              <a:t>Aug 2026</a:t>
+            </a:r>
+            <a:endParaRPr lang="en-US" sz="1800" dirty="0"/>
+          </a:p>
+        </p:txBody>
+      </p:sp>
+      <p:sp>
+        <p:nvSpPr>
+          <p:cNvPr id="15" name="Text 13"/>
+          <p:cNvSpPr txBox="1"/>
+          <p:nvPr/>
+        </p:nvSpPr>
+        <p:spPr>
+          <a:xfrm>
+            <a:off x="9281160" y="2743200"/>
+            <a:ext cx="2560320" cy="914400"/>
+          </a:xfrm>
+          <a:prstGeom prst="rect">
+            <a:avLst/>
+          </a:prstGeom>
+          <a:noFill/>
+          <a:ln/>
+        </p:spPr>
+        <p:txBody>
+          <a:bodyPr wrap="square" lIns="0" tIns="0" rIns="0" bIns="0" rtlCol="0" anchor="t"/>
+          <a:lstStyle/>
+          <a:p>
+            <a:pPr indent="0" marL="0">
               <a:buNone/>
             </a:pPr>
             <a:r>
@@ -9934,77 +12083,108 @@
                   <a:schemeClr val="tx1"/>
                 </a:solidFill>
               </a:rPr>
-              <a:t>Charoenwong, B., Morck, R., Wiwattanakantang, Y. (2021). Bank of Japan equity purchases: The (non-)effects of extreme quantitative easing. Review of Finance 25, 713–743.</a:t>
+              <a:t>Global ETF assets reach a record $24.0trn</a:t>
             </a:r>
             <a:endParaRPr lang="en-US" sz="1400" dirty="0"/>
           </a:p>
+        </p:txBody>
+      </p:sp>
+      <p:sp>
+        <p:nvSpPr>
+          <p:cNvPr id="16" name="Implication card"/>
+          <p:cNvSpPr/>
+          <p:nvPr/>
+        </p:nvSpPr>
+        <p:spPr>
+          <a:xfrm>
+            <a:off x="548640" y="4069080"/>
+            <a:ext cx="11094415" cy="1783080"/>
+          </a:xfrm>
+          <a:prstGeom prst="roundRect">
+            <a:avLst>
+              <a:gd name="adj" fmla="val 6154"/>
+            </a:avLst>
+          </a:prstGeom>
+          <a:solidFill>
+            <a:schemeClr val="bg2"/>
+          </a:solidFill>
+          <a:ln w="12700">
+            <a:solidFill>
+              <a:schemeClr val="bg2"/>
+            </a:solidFill>
+            <a:prstDash val="solid"/>
+          </a:ln>
+        </p:spPr>
+      </p:sp>
+      <p:sp>
+        <p:nvSpPr>
+          <p:cNvPr id="17" name="Text 15"/>
+          <p:cNvSpPr txBox="1"/>
+          <p:nvPr/>
+        </p:nvSpPr>
+        <p:spPr>
+          <a:xfrm>
+            <a:off x="868680" y="4206240"/>
+            <a:ext cx="10454335" cy="1554480"/>
+          </a:xfrm>
+          <a:prstGeom prst="rect">
+            <a:avLst/>
+          </a:prstGeom>
+          <a:noFill/>
+          <a:ln/>
+        </p:spPr>
+        <p:txBody>
+          <a:bodyPr wrap="square" lIns="0" tIns="0" rIns="0" bIns="0" rtlCol="0" anchor="ctr"/>
+          <a:lstStyle/>
           <a:p>
             <a:pPr indent="0" marL="0">
-              <a:spcAft>
-                <a:spcPts val="800"/>
-              </a:spcAft>
-              <a:buNone/>
-            </a:pPr>
-            <a:r>
-              <a:rPr lang="en-US" sz="1400" dirty="0">
+              <a:buNone/>
+            </a:pPr>
+            <a:r>
+              <a:rPr lang="en-US" sz="1500" b="1" dirty="0">
+                <a:solidFill>
+                  <a:srgbClr val="14213D"/>
+                </a:solidFill>
+              </a:rPr>
+              <a:t>Why it matters for the paper: </a:t>
+            </a:r>
+            <a:pPr indent="0" marL="0">
+              <a:buNone/>
+            </a:pPr>
+            <a:r>
+              <a:rPr lang="en-US" sz="1500" dirty="0">
                 <a:solidFill>
                   <a:schemeClr val="tx1"/>
                 </a:solidFill>
               </a:rPr>
-              <a:t>Shleifer, A., Vishny, R. (1997). The limits of arbitrage. Journal of Finance 52, 35–55.</a:t>
-            </a:r>
-            <a:endParaRPr lang="en-US" sz="1400" dirty="0"/>
+              <a:t>the redemption side it could not test is now live, but at ≈0.05% of turnover the paper's logic predicts negligible effects on stocks.</a:t>
+            </a:r>
+            <a:endParaRPr lang="en-US" sz="1500" dirty="0"/>
           </a:p>
           <a:p>
             <a:pPr indent="0" marL="0">
-              <a:spcAft>
-                <a:spcPts val="800"/>
-              </a:spcAft>
-              <a:buNone/>
-            </a:pPr>
-            <a:r>
-              <a:rPr lang="en-US" sz="1400" dirty="0">
+              <a:buNone/>
+            </a:pPr>
+            <a:r>
+              <a:rPr lang="en-US" sz="1500" b="1" dirty="0">
+                <a:solidFill>
+                  <a:srgbClr val="14213D"/>
+                </a:solidFill>
+              </a:rPr>
+              <a:t>Our real-data run: </a:t>
+            </a:r>
+            <a:pPr indent="0" marL="0">
+              <a:buNone/>
+            </a:pPr>
+            <a:r>
+              <a:rPr lang="en-US" sz="1500" dirty="0">
                 <a:solidFill>
                   <a:schemeClr val="tx1"/>
                 </a:solidFill>
               </a:rPr>
-              <a:t>Ardia, D., Guidotti, E., Kroencke, T. (2024). Efficient estimation of bid–ask spreads from open, high, low, and close prices. Journal of Financial Economics 161, 103916.</a:t>
-            </a:r>
-            <a:endParaRPr lang="en-US" sz="1400" dirty="0"/>
-          </a:p>
-          <a:p>
-            <a:pPr indent="0" marL="0">
-              <a:spcAft>
-                <a:spcPts val="800"/>
-              </a:spcAft>
-              <a:buNone/>
-            </a:pPr>
-            <a:r>
-              <a:rPr lang="en-US" sz="1400" dirty="0">
-                <a:solidFill>
-                  <a:schemeClr val="tx1"/>
-                </a:solidFill>
-              </a:rPr>
-              <a:t>Cameron, A.C., Gelbach, J., Miller, D. (2011). Robust inference with multiway clustering. Journal of Business &amp; Economic Statistics 29, 238–249.</a:t>
-            </a:r>
-            <a:endParaRPr lang="en-US" sz="1400" dirty="0"/>
-          </a:p>
-          <a:p>
-            <a:pPr indent="0" marL="0">
-              <a:spcAft>
-                <a:spcPts val="800"/>
-              </a:spcAft>
-              <a:buNone/>
-            </a:pPr>
-            <a:r>
-              <a:rPr lang="en-US" sz="1400" dirty="0">
-                <a:solidFill>
-                  <a:schemeClr val="tx1"/>
-                </a:solidFill>
-              </a:rPr>
-              <a:t>ETFGI (Sep 2026), global ETF industry assets; Bank of Japan, statement on monetary policy (19 Sep 2025).</a:t>
-            </a:r>
-            <a:endParaRPr lang="en-US" sz="1400" dirty="0"/>
+              <a:t>with daily data, even the BoJ's large purchases leave no detectable trace in stock returns, volatility or spreads, so a sale at this pace should be invisible too.</a:t>
+            </a:r>
+            <a:endParaRPr lang="en-US" sz="1500" dirty="0"/>
           </a:p>
         </p:txBody>
       </p:sp>
@@ -10048,6 +12228,806 @@
             <a:fld id="{F7021451-1387-4CA6-816F-3879F97B5CBC}" type="slidenum">
               <a:rPr b="0" lang="en-US"/>
               <a:t>20</a:t>
+            </a:fld>
+            <a:endParaRPr lang="en-US"/>
+          </a:p>
+        </p:txBody>
+      </p:sp>
+    </p:spTree>
+  </p:cSld>
+  <p:clrMapOvr>
+    <a:masterClrMapping/>
+  </p:clrMapOvr>
+</p:sld>
+</file>
+
+<file path=ppt/slides/slide21.xml><?xml version="1.0" encoding="utf-8"?>
+<p:sld xmlns:a="http://schemas.openxmlformats.org/drawingml/2006/main" xmlns:r="http://schemas.openxmlformats.org/officeDocument/2006/relationships" xmlns:p="http://schemas.openxmlformats.org/presentationml/2006/main">
+  <p:cSld name="Slide 21">
+    <p:spTree>
+      <p:nvGrpSpPr>
+        <p:cNvPr id="1" name=""/>
+        <p:cNvGrpSpPr/>
+        <p:nvPr/>
+      </p:nvGrpSpPr>
+      <p:grpSpPr>
+        <a:xfrm>
+          <a:off x="0" y="0"/>
+          <a:ext cx="0" cy="0"/>
+          <a:chOff x="0" y="0"/>
+          <a:chExt cx="0" cy="0"/>
+        </a:xfrm>
+      </p:grpSpPr>
+      <p:sp>
+        <p:nvSpPr>
+          <p:cNvPr id="2" name="Title"/>
+          <p:cNvSpPr txBox="1"/>
+          <p:nvPr/>
+        </p:nvSpPr>
+        <p:spPr>
+          <a:xfrm>
+            <a:off x="548640" y="320040"/>
+            <a:ext cx="11094415" cy="777240"/>
+          </a:xfrm>
+          <a:prstGeom prst="rect">
+            <a:avLst/>
+          </a:prstGeom>
+          <a:noFill/>
+          <a:ln/>
+        </p:spPr>
+        <p:txBody>
+          <a:bodyPr wrap="square" lIns="0" tIns="0" rIns="0" bIns="0" rtlCol="0" anchor="ctr"/>
+          <a:lstStyle/>
+          <a:p>
+            <a:pPr indent="0" marL="0">
+              <a:buNone/>
+            </a:pPr>
+            <a:r>
+              <a:rPr lang="en-US" sz="3200" b="1" dirty="0">
+                <a:solidFill>
+                  <a:schemeClr val="bg1"/>
+                </a:solidFill>
+                <a:latin typeface="Cambria" pitchFamily="34" charset="0"/>
+                <a:ea typeface="Cambria" pitchFamily="34" charset="-122"/>
+                <a:cs typeface="Cambria" pitchFamily="34" charset="-120"/>
+              </a:rPr>
+              <a:t>Takeaways</a:t>
+            </a:r>
+            <a:endParaRPr lang="en-US" sz="3200" dirty="0"/>
+          </a:p>
+        </p:txBody>
+      </p:sp>
+      <p:sp>
+        <p:nvSpPr>
+          <p:cNvPr id="3" name="Number 1"/>
+          <p:cNvSpPr/>
+          <p:nvPr/>
+        </p:nvSpPr>
+        <p:spPr>
+          <a:xfrm>
+            <a:off x="548640" y="1508760"/>
+            <a:ext cx="640080" cy="640080"/>
+          </a:xfrm>
+          <a:prstGeom prst="ellipse">
+            <a:avLst/>
+          </a:prstGeom>
+          <a:solidFill>
+            <a:schemeClr val="accent2"/>
+          </a:solidFill>
+          <a:ln w="12700">
+            <a:solidFill>
+              <a:srgbClr val="EB6834"/>
+            </a:solidFill>
+            <a:prstDash val="solid"/>
+          </a:ln>
+        </p:spPr>
+      </p:sp>
+      <p:sp>
+        <p:nvSpPr>
+          <p:cNvPr id="4" name="Text 2"/>
+          <p:cNvSpPr txBox="1"/>
+          <p:nvPr/>
+        </p:nvSpPr>
+        <p:spPr>
+          <a:xfrm>
+            <a:off x="548640" y="1508760"/>
+            <a:ext cx="640080" cy="640080"/>
+          </a:xfrm>
+          <a:prstGeom prst="rect">
+            <a:avLst/>
+          </a:prstGeom>
+          <a:noFill/>
+          <a:ln/>
+        </p:spPr>
+        <p:txBody>
+          <a:bodyPr wrap="square" lIns="0" tIns="0" rIns="0" bIns="0" rtlCol="0" anchor="ctr"/>
+          <a:lstStyle/>
+          <a:p>
+            <a:pPr algn="ctr" indent="0" marL="0">
+              <a:buNone/>
+            </a:pPr>
+            <a:r>
+              <a:rPr lang="en-US" sz="2200" b="1" dirty="0">
+                <a:solidFill>
+                  <a:schemeClr val="bg1"/>
+                </a:solidFill>
+              </a:rPr>
+              <a:t>1</a:t>
+            </a:r>
+            <a:endParaRPr lang="en-US" sz="2200" dirty="0"/>
+          </a:p>
+        </p:txBody>
+      </p:sp>
+      <p:sp>
+        <p:nvSpPr>
+          <p:cNvPr id="5" name="Text 3"/>
+          <p:cNvSpPr txBox="1"/>
+          <p:nvPr/>
+        </p:nvSpPr>
+        <p:spPr>
+          <a:xfrm>
+            <a:off x="1463040" y="1463040"/>
+            <a:ext cx="10180015" cy="777240"/>
+          </a:xfrm>
+          <a:prstGeom prst="rect">
+            <a:avLst/>
+          </a:prstGeom>
+          <a:noFill/>
+          <a:ln/>
+        </p:spPr>
+        <p:txBody>
+          <a:bodyPr wrap="square" lIns="0" tIns="0" rIns="0" bIns="0" rtlCol="0" anchor="ctr"/>
+          <a:lstStyle/>
+          <a:p>
+            <a:pPr indent="0" marL="0">
+              <a:buNone/>
+            </a:pPr>
+            <a:r>
+              <a:rPr lang="en-US" sz="1800" dirty="0">
+                <a:solidFill>
+                  <a:schemeClr val="bg1"/>
+                </a:solidFill>
+              </a:rPr>
+              <a:t>ETF arbitrage is rare (32% of days) and small (13% of volume); HFTs carry the trading and do not arbitrage</a:t>
+            </a:r>
+            <a:endParaRPr lang="en-US" sz="1800" dirty="0"/>
+          </a:p>
+        </p:txBody>
+      </p:sp>
+      <p:sp>
+        <p:nvSpPr>
+          <p:cNvPr id="6" name="Number 2"/>
+          <p:cNvSpPr/>
+          <p:nvPr/>
+        </p:nvSpPr>
+        <p:spPr>
+          <a:xfrm>
+            <a:off x="548640" y="2606040"/>
+            <a:ext cx="640080" cy="640080"/>
+          </a:xfrm>
+          <a:prstGeom prst="ellipse">
+            <a:avLst/>
+          </a:prstGeom>
+          <a:solidFill>
+            <a:schemeClr val="accent2"/>
+          </a:solidFill>
+          <a:ln w="12700">
+            <a:solidFill>
+              <a:srgbClr val="EB6834"/>
+            </a:solidFill>
+            <a:prstDash val="solid"/>
+          </a:ln>
+        </p:spPr>
+      </p:sp>
+      <p:sp>
+        <p:nvSpPr>
+          <p:cNvPr id="7" name="Text 5"/>
+          <p:cNvSpPr txBox="1"/>
+          <p:nvPr/>
+        </p:nvSpPr>
+        <p:spPr>
+          <a:xfrm>
+            <a:off x="548640" y="2606040"/>
+            <a:ext cx="640080" cy="640080"/>
+          </a:xfrm>
+          <a:prstGeom prst="rect">
+            <a:avLst/>
+          </a:prstGeom>
+          <a:noFill/>
+          <a:ln/>
+        </p:spPr>
+        <p:txBody>
+          <a:bodyPr wrap="square" lIns="0" tIns="0" rIns="0" bIns="0" rtlCol="0" anchor="ctr"/>
+          <a:lstStyle/>
+          <a:p>
+            <a:pPr algn="ctr" indent="0" marL="0">
+              <a:buNone/>
+            </a:pPr>
+            <a:r>
+              <a:rPr lang="en-US" sz="2200" b="1" dirty="0">
+                <a:solidFill>
+                  <a:schemeClr val="bg1"/>
+                </a:solidFill>
+              </a:rPr>
+              <a:t>2</a:t>
+            </a:r>
+            <a:endParaRPr lang="en-US" sz="2200" dirty="0"/>
+          </a:p>
+        </p:txBody>
+      </p:sp>
+      <p:sp>
+        <p:nvSpPr>
+          <p:cNvPr id="8" name="Text 6"/>
+          <p:cNvSpPr txBox="1"/>
+          <p:nvPr/>
+        </p:nvSpPr>
+        <p:spPr>
+          <a:xfrm>
+            <a:off x="1463040" y="2560320"/>
+            <a:ext cx="10180015" cy="777240"/>
+          </a:xfrm>
+          <a:prstGeom prst="rect">
+            <a:avLst/>
+          </a:prstGeom>
+          <a:noFill/>
+          <a:ln/>
+        </p:spPr>
+        <p:txBody>
+          <a:bodyPr wrap="square" lIns="0" tIns="0" rIns="0" bIns="0" rtlCol="0" anchor="ctr"/>
+          <a:lstStyle/>
+          <a:p>
+            <a:pPr indent="0" marL="0">
+              <a:buNone/>
+            </a:pPr>
+            <a:r>
+              <a:rPr lang="en-US" sz="1800" dirty="0">
+                <a:solidFill>
+                  <a:schemeClr val="bg1"/>
+                </a:solidFill>
+              </a:rPr>
+              <a:t>Arbitrage goes with worse market quality in overweighted stocks; HFT activity goes with narrower spreads</a:t>
+            </a:r>
+            <a:endParaRPr lang="en-US" sz="1800" dirty="0"/>
+          </a:p>
+        </p:txBody>
+      </p:sp>
+      <p:sp>
+        <p:nvSpPr>
+          <p:cNvPr id="9" name="Number 3"/>
+          <p:cNvSpPr/>
+          <p:nvPr/>
+        </p:nvSpPr>
+        <p:spPr>
+          <a:xfrm>
+            <a:off x="548640" y="3703320"/>
+            <a:ext cx="640080" cy="640080"/>
+          </a:xfrm>
+          <a:prstGeom prst="ellipse">
+            <a:avLst/>
+          </a:prstGeom>
+          <a:solidFill>
+            <a:schemeClr val="accent2"/>
+          </a:solidFill>
+          <a:ln w="12700">
+            <a:solidFill>
+              <a:srgbClr val="EB6834"/>
+            </a:solidFill>
+            <a:prstDash val="solid"/>
+          </a:ln>
+        </p:spPr>
+      </p:sp>
+      <p:sp>
+        <p:nvSpPr>
+          <p:cNvPr id="10" name="Text 8"/>
+          <p:cNvSpPr txBox="1"/>
+          <p:nvPr/>
+        </p:nvSpPr>
+        <p:spPr>
+          <a:xfrm>
+            <a:off x="548640" y="3703320"/>
+            <a:ext cx="640080" cy="640080"/>
+          </a:xfrm>
+          <a:prstGeom prst="rect">
+            <a:avLst/>
+          </a:prstGeom>
+          <a:noFill/>
+          <a:ln/>
+        </p:spPr>
+        <p:txBody>
+          <a:bodyPr wrap="square" lIns="0" tIns="0" rIns="0" bIns="0" rtlCol="0" anchor="ctr"/>
+          <a:lstStyle/>
+          <a:p>
+            <a:pPr algn="ctr" indent="0" marL="0">
+              <a:buNone/>
+            </a:pPr>
+            <a:r>
+              <a:rPr lang="en-US" sz="2200" b="1" dirty="0">
+                <a:solidFill>
+                  <a:schemeClr val="bg1"/>
+                </a:solidFill>
+              </a:rPr>
+              <a:t>3</a:t>
+            </a:r>
+            <a:endParaRPr lang="en-US" sz="2200" dirty="0"/>
+          </a:p>
+        </p:txBody>
+      </p:sp>
+      <p:sp>
+        <p:nvSpPr>
+          <p:cNvPr id="11" name="Text 9"/>
+          <p:cNvSpPr txBox="1"/>
+          <p:nvPr/>
+        </p:nvSpPr>
+        <p:spPr>
+          <a:xfrm>
+            <a:off x="1463040" y="3657600"/>
+            <a:ext cx="10180015" cy="777240"/>
+          </a:xfrm>
+          <a:prstGeom prst="rect">
+            <a:avLst/>
+          </a:prstGeom>
+          <a:noFill/>
+          <a:ln/>
+        </p:spPr>
+        <p:txBody>
+          <a:bodyPr wrap="square" lIns="0" tIns="0" rIns="0" bIns="0" rtlCol="0" anchor="ctr"/>
+          <a:lstStyle/>
+          <a:p>
+            <a:pPr indent="0" marL="0">
+              <a:buNone/>
+            </a:pPr>
+            <a:r>
+              <a:rPr lang="en-US" sz="1800" dirty="0">
+                <a:solidFill>
+                  <a:schemeClr val="bg1"/>
+                </a:solidFill>
+              </a:rPr>
+              <a:t>In the paper, the BoJ experiment makes the arbitrage damage causal, but local and transitory</a:t>
+            </a:r>
+            <a:endParaRPr lang="en-US" sz="1800" dirty="0"/>
+          </a:p>
+        </p:txBody>
+      </p:sp>
+      <p:sp>
+        <p:nvSpPr>
+          <p:cNvPr id="12" name="Number 4"/>
+          <p:cNvSpPr/>
+          <p:nvPr/>
+        </p:nvSpPr>
+        <p:spPr>
+          <a:xfrm>
+            <a:off x="548640" y="4800600"/>
+            <a:ext cx="640080" cy="640080"/>
+          </a:xfrm>
+          <a:prstGeom prst="ellipse">
+            <a:avLst/>
+          </a:prstGeom>
+          <a:solidFill>
+            <a:schemeClr val="accent2"/>
+          </a:solidFill>
+          <a:ln w="12700">
+            <a:solidFill>
+              <a:srgbClr val="EB6834"/>
+            </a:solidFill>
+            <a:prstDash val="solid"/>
+          </a:ln>
+        </p:spPr>
+      </p:sp>
+      <p:sp>
+        <p:nvSpPr>
+          <p:cNvPr id="13" name="Text 11"/>
+          <p:cNvSpPr txBox="1"/>
+          <p:nvPr/>
+        </p:nvSpPr>
+        <p:spPr>
+          <a:xfrm>
+            <a:off x="548640" y="4800600"/>
+            <a:ext cx="640080" cy="640080"/>
+          </a:xfrm>
+          <a:prstGeom prst="rect">
+            <a:avLst/>
+          </a:prstGeom>
+          <a:noFill/>
+          <a:ln/>
+        </p:spPr>
+        <p:txBody>
+          <a:bodyPr wrap="square" lIns="0" tIns="0" rIns="0" bIns="0" rtlCol="0" anchor="ctr"/>
+          <a:lstStyle/>
+          <a:p>
+            <a:pPr algn="ctr" indent="0" marL="0">
+              <a:buNone/>
+            </a:pPr>
+            <a:r>
+              <a:rPr lang="en-US" sz="2200" b="1" dirty="0">
+                <a:solidFill>
+                  <a:schemeClr val="bg1"/>
+                </a:solidFill>
+              </a:rPr>
+              <a:t>4</a:t>
+            </a:r>
+            <a:endParaRPr lang="en-US" sz="2200" dirty="0"/>
+          </a:p>
+        </p:txBody>
+      </p:sp>
+      <p:sp>
+        <p:nvSpPr>
+          <p:cNvPr id="14" name="Text 12"/>
+          <p:cNvSpPr txBox="1"/>
+          <p:nvPr/>
+        </p:nvSpPr>
+        <p:spPr>
+          <a:xfrm>
+            <a:off x="1463040" y="4754880"/>
+            <a:ext cx="10180015" cy="777240"/>
+          </a:xfrm>
+          <a:prstGeom prst="rect">
+            <a:avLst/>
+          </a:prstGeom>
+          <a:noFill/>
+          <a:ln/>
+        </p:spPr>
+        <p:txBody>
+          <a:bodyPr wrap="square" lIns="0" tIns="0" rIns="0" bIns="0" rtlCol="0" anchor="ctr"/>
+          <a:lstStyle/>
+          <a:p>
+            <a:pPr indent="0" marL="0">
+              <a:buNone/>
+            </a:pPr>
+            <a:r>
+              <a:rPr lang="en-US" sz="1800" dirty="0">
+                <a:solidFill>
+                  <a:schemeClr val="bg1"/>
+                </a:solidFill>
+              </a:rPr>
+              <a:t>On open daily data, the ETF-to-basket liquidity link replicates; the BoJ effect and the long-run improvement do not</a:t>
+            </a:r>
+            <a:endParaRPr lang="en-US" sz="1800" dirty="0"/>
+          </a:p>
+        </p:txBody>
+      </p:sp>
+      <p:sp>
+        <p:nvSpPr>
+          <p:cNvPr id="15" name="Text 13"/>
+          <p:cNvSpPr txBox="1"/>
+          <p:nvPr/>
+        </p:nvSpPr>
+        <p:spPr>
+          <a:xfrm>
+            <a:off x="548640" y="5989320"/>
+            <a:ext cx="11094415" cy="365760"/>
+          </a:xfrm>
+          <a:prstGeom prst="rect">
+            <a:avLst/>
+          </a:prstGeom>
+          <a:noFill/>
+          <a:ln/>
+        </p:spPr>
+        <p:txBody>
+          <a:bodyPr wrap="square" lIns="0" tIns="0" rIns="0" bIns="0" rtlCol="0" anchor="ctr"/>
+          <a:lstStyle/>
+          <a:p>
+            <a:pPr indent="0" marL="0">
+              <a:buNone/>
+            </a:pPr>
+            <a:r>
+              <a:rPr lang="en-US" sz="1200" dirty="0">
+                <a:solidFill>
+                  <a:srgbClr val="AFC3E0"/>
+                </a:solidFill>
+              </a:rPr>
+              <a:t>Notebook: github.com/Mnntn/Finances → ETF_effects_The_role_of_primary_versus_secondary_market_activities/etf_effects.ipynb</a:t>
+            </a:r>
+            <a:endParaRPr lang="en-US" sz="1200" dirty="0"/>
+          </a:p>
+        </p:txBody>
+      </p:sp>
+      <p:sp>
+        <p:nvSpPr>
+          <p:cNvPr id="25" name="Slide Number Placeholder 0"/>
+          <p:cNvSpPr>
+            <a:spLocks noGrp="1"/>
+          </p:cNvSpPr>
+          <p:nvPr>
+            <p:ph type="sldNum" sz="quarter" idx="4294967295"/>
+          </p:nvPr>
+        </p:nvSpPr>
+        <p:spPr>
+          <a:xfrm>
+            <a:off x="11109960" y="6400800"/>
+            <a:ext cx="548640" cy="274320"/>
+          </a:xfrm>
+          <a:prstGeom prst="rect">
+            <a:avLst/>
+          </a:prstGeom>
+          <a:extLst>
+            <a:ext uri="{C572A759-6A51-4108-AA02-DFA0A04FC94B}">
+              <ma14:wrappingTextBoxFlag xmlns:ma14="http://schemas.microsoft.com/office/mac/drawingml/2011/main" val="0"/>
+            </a:ext>
+          </a:extLst>
+        </p:spPr>
+        <p:txBody>
+          <a:bodyPr/>
+          <a:lstStyle>
+            <a:lvl1pPr>
+              <a:defRPr sz="1000">
+                <a:solidFill>
+                  <a:srgbClr val="AFC3E0"/>
+                </a:solidFill>
+              </a:defRPr>
+            </a:lvl1pPr>
+          </a:lstStyle>
+          <a:p>
+            <a:pPr algn="r"/>
+            <a:fld id="{F7021451-1387-4CA6-816F-3879F97B5CBC}" type="slidenum">
+              <a:rPr b="0" lang="en-US"/>
+              <a:t>21</a:t>
+            </a:fld>
+            <a:endParaRPr lang="en-US"/>
+          </a:p>
+        </p:txBody>
+      </p:sp>
+    </p:spTree>
+  </p:cSld>
+  <p:clrMapOvr>
+    <a:masterClrMapping/>
+  </p:clrMapOvr>
+</p:sld>
+</file>
+
+<file path=ppt/slides/slide22.xml><?xml version="1.0" encoding="utf-8"?>
+<p:sld xmlns:a="http://schemas.openxmlformats.org/drawingml/2006/main" xmlns:r="http://schemas.openxmlformats.org/officeDocument/2006/relationships" xmlns:p="http://schemas.openxmlformats.org/presentationml/2006/main">
+  <p:cSld name="Slide 22">
+    <p:spTree>
+      <p:nvGrpSpPr>
+        <p:cNvPr id="1" name=""/>
+        <p:cNvGrpSpPr/>
+        <p:nvPr/>
+      </p:nvGrpSpPr>
+      <p:grpSpPr>
+        <a:xfrm>
+          <a:off x="0" y="0"/>
+          <a:ext cx="0" cy="0"/>
+          <a:chOff x="0" y="0"/>
+          <a:chExt cx="0" cy="0"/>
+        </a:xfrm>
+      </p:grpSpPr>
+      <p:sp>
+        <p:nvSpPr>
+          <p:cNvPr id="2" name="Title"/>
+          <p:cNvSpPr txBox="1"/>
+          <p:nvPr/>
+        </p:nvSpPr>
+        <p:spPr>
+          <a:xfrm>
+            <a:off x="548640" y="320040"/>
+            <a:ext cx="11094415" cy="777240"/>
+          </a:xfrm>
+          <a:prstGeom prst="rect">
+            <a:avLst/>
+          </a:prstGeom>
+          <a:noFill/>
+          <a:ln/>
+        </p:spPr>
+        <p:txBody>
+          <a:bodyPr wrap="square" lIns="0" tIns="0" rIns="0" bIns="0" rtlCol="0" anchor="ctr"/>
+          <a:lstStyle/>
+          <a:p>
+            <a:pPr indent="0" marL="0">
+              <a:buNone/>
+            </a:pPr>
+            <a:r>
+              <a:rPr lang="en-US" sz="3200" b="1" dirty="0">
+                <a:solidFill>
+                  <a:schemeClr val="tx2"/>
+                </a:solidFill>
+                <a:latin typeface="Cambria" pitchFamily="34" charset="0"/>
+                <a:ea typeface="Cambria" pitchFamily="34" charset="-122"/>
+                <a:cs typeface="Cambria" pitchFamily="34" charset="-120"/>
+              </a:rPr>
+              <a:t>References</a:t>
+            </a:r>
+            <a:endParaRPr lang="en-US" sz="3200" dirty="0"/>
+          </a:p>
+        </p:txBody>
+      </p:sp>
+      <p:sp>
+        <p:nvSpPr>
+          <p:cNvPr id="3" name="Text 1"/>
+          <p:cNvSpPr txBox="1"/>
+          <p:nvPr/>
+        </p:nvSpPr>
+        <p:spPr>
+          <a:xfrm>
+            <a:off x="548640" y="1325880"/>
+            <a:ext cx="11094415" cy="4846320"/>
+          </a:xfrm>
+          <a:prstGeom prst="rect">
+            <a:avLst/>
+          </a:prstGeom>
+          <a:noFill/>
+          <a:ln/>
+        </p:spPr>
+        <p:txBody>
+          <a:bodyPr wrap="square" lIns="0" tIns="0" rIns="0" bIns="0" rtlCol="0" anchor="t"/>
+          <a:lstStyle/>
+          <a:p>
+            <a:pPr indent="0" marL="0">
+              <a:spcAft>
+                <a:spcPts val="800"/>
+              </a:spcAft>
+              <a:buNone/>
+            </a:pPr>
+            <a:r>
+              <a:rPr lang="en-US" sz="1400" dirty="0">
+                <a:solidFill>
+                  <a:schemeClr val="tx1"/>
+                </a:solidFill>
+              </a:rPr>
+              <a:t>Comerton-Forde, C., Marta, T. (2025). ETF effects: The role of primary versus secondary market activities. Journal of Financial Markets 75, 100983.</a:t>
+            </a:r>
+            <a:endParaRPr lang="en-US" sz="1400" dirty="0"/>
+          </a:p>
+          <a:p>
+            <a:pPr indent="0" marL="0">
+              <a:spcAft>
+                <a:spcPts val="800"/>
+              </a:spcAft>
+              <a:buNone/>
+            </a:pPr>
+            <a:r>
+              <a:rPr lang="en-US" sz="1400" dirty="0">
+                <a:solidFill>
+                  <a:schemeClr val="tx1"/>
+                </a:solidFill>
+              </a:rPr>
+              <a:t>Ben-David, I., Franzoni, F., Moussawi, R. (2018). Do ETFs increase volatility? Journal of Finance 73, 2471–2535.</a:t>
+            </a:r>
+            <a:endParaRPr lang="en-US" sz="1400" dirty="0"/>
+          </a:p>
+          <a:p>
+            <a:pPr indent="0" marL="0">
+              <a:spcAft>
+                <a:spcPts val="800"/>
+              </a:spcAft>
+              <a:buNone/>
+            </a:pPr>
+            <a:r>
+              <a:rPr lang="en-US" sz="1400" dirty="0">
+                <a:solidFill>
+                  <a:schemeClr val="tx1"/>
+                </a:solidFill>
+              </a:rPr>
+              <a:t>Malamud, S. (2015). A dynamic equilibrium model of ETFs. Swiss Finance Institute Research Paper 15-37.</a:t>
+            </a:r>
+            <a:endParaRPr lang="en-US" sz="1400" dirty="0"/>
+          </a:p>
+          <a:p>
+            <a:pPr indent="0" marL="0">
+              <a:spcAft>
+                <a:spcPts val="800"/>
+              </a:spcAft>
+              <a:buNone/>
+            </a:pPr>
+            <a:r>
+              <a:rPr lang="en-US" sz="1400" dirty="0">
+                <a:solidFill>
+                  <a:schemeClr val="tx1"/>
+                </a:solidFill>
+              </a:rPr>
+              <a:t>Charoenwong, B., Morck, R., Wiwattanakantang, Y. (2021). Bank of Japan equity purchases: The (non-)effects of extreme quantitative easing. Review of Finance 25, 713–743.</a:t>
+            </a:r>
+            <a:endParaRPr lang="en-US" sz="1400" dirty="0"/>
+          </a:p>
+          <a:p>
+            <a:pPr indent="0" marL="0">
+              <a:spcAft>
+                <a:spcPts val="800"/>
+              </a:spcAft>
+              <a:buNone/>
+            </a:pPr>
+            <a:r>
+              <a:rPr lang="en-US" sz="1400" dirty="0">
+                <a:solidFill>
+                  <a:schemeClr val="tx1"/>
+                </a:solidFill>
+              </a:rPr>
+              <a:t>Shleifer, A., Vishny, R. (1997). The limits of arbitrage. Journal of Finance 52, 35–55.</a:t>
+            </a:r>
+            <a:endParaRPr lang="en-US" sz="1400" dirty="0"/>
+          </a:p>
+          <a:p>
+            <a:pPr indent="0" marL="0">
+              <a:spcAft>
+                <a:spcPts val="800"/>
+              </a:spcAft>
+              <a:buNone/>
+            </a:pPr>
+            <a:r>
+              <a:rPr lang="en-US" sz="1400" dirty="0">
+                <a:solidFill>
+                  <a:schemeClr val="tx1"/>
+                </a:solidFill>
+              </a:rPr>
+              <a:t>Ardia, D., Guidotti, E., Kroencke, T. (2024). Efficient estimation of bid–ask spreads from open, high, low, and close prices. Journal of Financial Economics 161, 103916.</a:t>
+            </a:r>
+            <a:endParaRPr lang="en-US" sz="1400" dirty="0"/>
+          </a:p>
+          <a:p>
+            <a:pPr indent="0" marL="0">
+              <a:spcAft>
+                <a:spcPts val="800"/>
+              </a:spcAft>
+              <a:buNone/>
+            </a:pPr>
+            <a:r>
+              <a:rPr lang="en-US" sz="1400" dirty="0">
+                <a:solidFill>
+                  <a:schemeClr val="tx1"/>
+                </a:solidFill>
+              </a:rPr>
+              <a:t>Cameron, A.C., Gelbach, J., Miller, D. (2011). Robust inference with multiway clustering. Journal of Business &amp; Economic Statistics 29, 238–249.</a:t>
+            </a:r>
+            <a:endParaRPr lang="en-US" sz="1400" dirty="0"/>
+          </a:p>
+          <a:p>
+            <a:pPr indent="0" marL="0">
+              <a:spcAft>
+                <a:spcPts val="800"/>
+              </a:spcAft>
+              <a:buNone/>
+            </a:pPr>
+            <a:r>
+              <a:rPr lang="en-US" sz="1400" dirty="0">
+                <a:solidFill>
+                  <a:schemeClr val="tx1"/>
+                </a:solidFill>
+              </a:rPr>
+              <a:t>ETFGI (Sep 2026), global ETF industry assets; Bank of Japan, statement on monetary policy (19 Sep 2025).</a:t>
+            </a:r>
+            <a:endParaRPr lang="en-US" sz="1400" dirty="0"/>
+          </a:p>
+        </p:txBody>
+      </p:sp>
+      <p:sp>
+        <p:nvSpPr>
+          <p:cNvPr id="25" name="Slide Number Placeholder 0"/>
+          <p:cNvSpPr>
+            <a:spLocks noGrp="1"/>
+          </p:cNvSpPr>
+          <p:nvPr>
+            <p:ph type="sldNum" sz="quarter" idx="4294967295"/>
+          </p:nvPr>
+        </p:nvSpPr>
+        <p:spPr>
+          <a:xfrm>
+            <a:off x="11109960" y="6400800"/>
+            <a:ext cx="548640" cy="274320"/>
+          </a:xfrm>
+          <a:prstGeom prst="rect">
+            <a:avLst/>
+          </a:prstGeom>
+          <a:extLst>
+            <a:ext uri="{C572A759-6A51-4108-AA02-DFA0A04FC94B}">
+              <ma14:wrappingTextBoxFlag xmlns:ma14="http://schemas.microsoft.com/office/mac/drawingml/2011/main" val="0"/>
+            </a:ext>
+          </a:extLst>
+        </p:spPr>
+        <p:txBody>
+          <a:bodyPr/>
+          <a:lstStyle>
+            <a:lvl1pPr>
+              <a:defRPr sz="1000">
+                <a:solidFill>
+                  <a:srgbClr val="6B7280"/>
+                </a:solidFill>
+              </a:defRPr>
+            </a:lvl1pPr>
+          </a:lstStyle>
+          <a:p>
+            <a:pPr algn="r"/>
+            <a:fld id="{F7021451-1387-4CA6-816F-3879F97B5CBC}" type="slidenum">
+              <a:rPr b="0" lang="en-US"/>
+              <a:t>22</a:t>
             </a:fld>
             <a:endParaRPr lang="en-US"/>
           </a:p>
